--- a/media/module2/slides.pptx
+++ b/media/module2/slides.pptx
@@ -39,6 +39,30 @@
     <p:sldId id="287" r:id="rId39"/>
     <p:sldId id="288" r:id="rId40"/>
     <p:sldId id="289" r:id="rId41"/>
+    <p:sldId id="290" r:id="rId42"/>
+    <p:sldId id="291" r:id="rId43"/>
+    <p:sldId id="292" r:id="rId44"/>
+    <p:sldId id="293" r:id="rId45"/>
+    <p:sldId id="294" r:id="rId46"/>
+    <p:sldId id="295" r:id="rId47"/>
+    <p:sldId id="296" r:id="rId48"/>
+    <p:sldId id="297" r:id="rId49"/>
+    <p:sldId id="298" r:id="rId50"/>
+    <p:sldId id="299" r:id="rId51"/>
+    <p:sldId id="300" r:id="rId52"/>
+    <p:sldId id="301" r:id="rId53"/>
+    <p:sldId id="302" r:id="rId54"/>
+    <p:sldId id="303" r:id="rId55"/>
+    <p:sldId id="304" r:id="rId56"/>
+    <p:sldId id="305" r:id="rId57"/>
+    <p:sldId id="306" r:id="rId58"/>
+    <p:sldId id="307" r:id="rId59"/>
+    <p:sldId id="308" r:id="rId60"/>
+    <p:sldId id="309" r:id="rId61"/>
+    <p:sldId id="310" r:id="rId62"/>
+    <p:sldId id="311" r:id="rId63"/>
+    <p:sldId id="312" r:id="rId64"/>
+    <p:sldId id="313" r:id="rId65"/>
   </p:sldIdLst>
   <p:sldSz cx="12191695" cy="6858000" type="screen4x3"/>
   <p:notesSz cx="6858000" cy="9144000"/>
@@ -535,7 +559,7 @@
           <a:lstStyle/>
           <a:p>
             <a:r>
-              <a:t>From MODULE2 Topics Covered.</a:t>
+              <a:t>From docs/MODULE2.md — read guides before running demos.</a:t>
             </a:r>
           </a:p>
         </p:txBody>
@@ -605,7 +629,7 @@
           <a:lstStyle/>
           <a:p>
             <a:r>
-              <a:t>Requires iverilog on PATH (apt install iverilog).</a:t>
+              <a:t>From MODULE2 Topics Covered.</a:t>
             </a:r>
           </a:p>
         </p:txBody>
@@ -675,7 +699,7 @@
           <a:lstStyle/>
           <a:p>
             <a:r>
-              <a:t>Hands-on: module2/examples/ansi_ports/</a:t>
+              <a:t>From MODULE2 Topics Covered.</a:t>
             </a:r>
           </a:p>
         </p:txBody>
@@ -745,7 +769,7 @@
           <a:lstStyle/>
           <a:p>
             <a:r>
-              <a:t>Hands-on: module2/examples/procedural/</a:t>
+              <a:t>Requires iverilog on PATH (apt install iverilog).</a:t>
             </a:r>
           </a:p>
         </p:txBody>
@@ -815,7 +839,7 @@
           <a:lstStyle/>
           <a:p>
             <a:r>
-              <a:t>Hands-on: module2/examples/generate/</a:t>
+              <a:t>module2/examples/ansi_ports/README.md</a:t>
             </a:r>
           </a:p>
         </p:txBody>
@@ -885,7 +909,7 @@
           <a:lstStyle/>
           <a:p>
             <a:r>
-              <a:t>Hands-on: module2/examples/generate_if/</a:t>
+              <a:t>Hands-on: module2/examples/ansi_ports/</a:t>
             </a:r>
           </a:p>
         </p:txBody>
@@ -955,7 +979,7 @@
           <a:lstStyle/>
           <a:p>
             <a:r>
-              <a:t>Hands-on: module2/examples/generate_ripple_adder/</a:t>
+              <a:t>module2/examples/procedural/README.md</a:t>
             </a:r>
           </a:p>
         </p:txBody>
@@ -1025,7 +1049,7 @@
           <a:lstStyle/>
           <a:p>
             <a:r>
-              <a:t>Hands-on: module2/examples/signed/</a:t>
+              <a:t>Hands-on: module2/examples/procedural/</a:t>
             </a:r>
           </a:p>
         </p:txBody>
@@ -1095,7 +1119,7 @@
           <a:lstStyle/>
           <a:p>
             <a:r>
-              <a:t>Hands-on: module2/examples/signed_compare/</a:t>
+              <a:t>module2/examples/generate/README.md</a:t>
             </a:r>
           </a:p>
         </p:txBody>
@@ -1165,7 +1189,7 @@
           <a:lstStyle/>
           <a:p>
             <a:r>
-              <a:t>Hands-on: module2/examples/decoder/</a:t>
+              <a:t>Hands-on: module2/examples/generate/</a:t>
             </a:r>
           </a:p>
         </p:txBody>
@@ -1235,7 +1259,7 @@
           <a:lstStyle/>
           <a:p>
             <a:r>
-              <a:t>Hands-on: module2/examples/arrays/</a:t>
+              <a:t>module2/examples/generate_if/README.md</a:t>
             </a:r>
           </a:p>
         </p:txBody>
@@ -1305,7 +1329,7 @@
           <a:lstStyle/>
           <a:p>
             <a:r>
-              <a:t>From MODULE2 Topics Covered.</a:t>
+              <a:t>From docs/MODULE2.md — read guides before running demos.</a:t>
             </a:r>
           </a:p>
         </p:txBody>
@@ -1375,7 +1399,7 @@
           <a:lstStyle/>
           <a:p>
             <a:r>
-              <a:t>Hands-on: module2/examples/multi_dim_arrays/</a:t>
+              <a:t>Hands-on: module2/examples/generate_if/</a:t>
             </a:r>
           </a:p>
         </p:txBody>
@@ -1445,7 +1469,7 @@
           <a:lstStyle/>
           <a:p>
             <a:r>
-              <a:t>Hands-on: module2/examples/parameters/</a:t>
+              <a:t>module2/examples/generate_ripple_adder/README.md</a:t>
             </a:r>
           </a:p>
         </p:txBody>
@@ -1515,7 +1539,7 @@
           <a:lstStyle/>
           <a:p>
             <a:r>
-              <a:t>Hands-on: module2/examples/tasks_functions/</a:t>
+              <a:t>Hands-on: module2/examples/generate_ripple_adder/</a:t>
             </a:r>
           </a:p>
         </p:txBody>
@@ -1585,7 +1609,427 @@
           <a:lstStyle/>
           <a:p>
             <a:r>
-              <a:t>Hands-on: module2/examples/task_ansi/</a:t>
+              <a:t>module2/examples/signed/README.md</a:t>
+            </a:r>
+          </a:p>
+        </p:txBody>
+      </p:sp>
+      <p:sp>
+        <p:nvSpPr>
+          <p:cNvPr id="4" name="Slide Number Placeholder 3"/>
+          <p:cNvSpPr>
+            <a:spLocks noGrp="1"/>
+          </p:cNvSpPr>
+          <p:nvPr>
+            <p:ph type="sldNum" idx="5" sz="quarter"/>
+          </p:nvPr>
+        </p:nvSpPr>
+        <p:spPr/>
+      </p:sp>
+    </p:spTree>
+  </p:cSld>
+  <p:clrMapOvr>
+    <a:masterClrMapping/>
+  </p:clrMapOvr>
+</p:notes>
+</file>
+
+<file path=ppt/notesSlides/notesSlide24.xml><?xml version="1.0" encoding="utf-8"?>
+<p:notes xmlns:a="http://schemas.openxmlformats.org/drawingml/2006/main" xmlns:p="http://schemas.openxmlformats.org/presentationml/2006/main" xmlns:r="http://schemas.openxmlformats.org/officeDocument/2006/relationships">
+  <p:cSld>
+    <p:spTree>
+      <p:nvGrpSpPr>
+        <p:cNvPr id="1" name=""/>
+        <p:cNvGrpSpPr/>
+        <p:nvPr/>
+      </p:nvGrpSpPr>
+      <p:grpSpPr>
+        <a:xfrm>
+          <a:off x="0" y="0"/>
+          <a:ext cx="0" cy="0"/>
+          <a:chOff x="0" y="0"/>
+          <a:chExt cx="0" cy="0"/>
+        </a:xfrm>
+      </p:grpSpPr>
+      <p:sp>
+        <p:nvSpPr>
+          <p:cNvPr id="2" name="Slide Image Placeholder 1"/>
+          <p:cNvSpPr>
+            <a:spLocks noGrp="1"/>
+          </p:cNvSpPr>
+          <p:nvPr>
+            <p:ph type="sldImg" idx="2"/>
+          </p:nvPr>
+        </p:nvSpPr>
+        <p:spPr/>
+      </p:sp>
+      <p:sp>
+        <p:nvSpPr>
+          <p:cNvPr id="3" name="Notes Placeholder 2"/>
+          <p:cNvSpPr>
+            <a:spLocks noGrp="1"/>
+          </p:cNvSpPr>
+          <p:nvPr>
+            <p:ph type="body" idx="3" sz="quarter"/>
+          </p:nvPr>
+        </p:nvSpPr>
+        <p:spPr/>
+        <p:txBody>
+          <a:bodyPr/>
+          <a:lstStyle/>
+          <a:p>
+            <a:r>
+              <a:t>Hands-on: module2/examples/signed/</a:t>
+            </a:r>
+          </a:p>
+        </p:txBody>
+      </p:sp>
+      <p:sp>
+        <p:nvSpPr>
+          <p:cNvPr id="4" name="Slide Number Placeholder 3"/>
+          <p:cNvSpPr>
+            <a:spLocks noGrp="1"/>
+          </p:cNvSpPr>
+          <p:nvPr>
+            <p:ph type="sldNum" idx="5" sz="quarter"/>
+          </p:nvPr>
+        </p:nvSpPr>
+        <p:spPr/>
+      </p:sp>
+    </p:spTree>
+  </p:cSld>
+  <p:clrMapOvr>
+    <a:masterClrMapping/>
+  </p:clrMapOvr>
+</p:notes>
+</file>
+
+<file path=ppt/notesSlides/notesSlide25.xml><?xml version="1.0" encoding="utf-8"?>
+<p:notes xmlns:a="http://schemas.openxmlformats.org/drawingml/2006/main" xmlns:p="http://schemas.openxmlformats.org/presentationml/2006/main" xmlns:r="http://schemas.openxmlformats.org/officeDocument/2006/relationships">
+  <p:cSld>
+    <p:spTree>
+      <p:nvGrpSpPr>
+        <p:cNvPr id="1" name=""/>
+        <p:cNvGrpSpPr/>
+        <p:nvPr/>
+      </p:nvGrpSpPr>
+      <p:grpSpPr>
+        <a:xfrm>
+          <a:off x="0" y="0"/>
+          <a:ext cx="0" cy="0"/>
+          <a:chOff x="0" y="0"/>
+          <a:chExt cx="0" cy="0"/>
+        </a:xfrm>
+      </p:grpSpPr>
+      <p:sp>
+        <p:nvSpPr>
+          <p:cNvPr id="2" name="Slide Image Placeholder 1"/>
+          <p:cNvSpPr>
+            <a:spLocks noGrp="1"/>
+          </p:cNvSpPr>
+          <p:nvPr>
+            <p:ph type="sldImg" idx="2"/>
+          </p:nvPr>
+        </p:nvSpPr>
+        <p:spPr/>
+      </p:sp>
+      <p:sp>
+        <p:nvSpPr>
+          <p:cNvPr id="3" name="Notes Placeholder 2"/>
+          <p:cNvSpPr>
+            <a:spLocks noGrp="1"/>
+          </p:cNvSpPr>
+          <p:nvPr>
+            <p:ph type="body" idx="3" sz="quarter"/>
+          </p:nvPr>
+        </p:nvSpPr>
+        <p:spPr/>
+        <p:txBody>
+          <a:bodyPr/>
+          <a:lstStyle/>
+          <a:p>
+            <a:r>
+              <a:t>module2/examples/signed_compare/README.md</a:t>
+            </a:r>
+          </a:p>
+        </p:txBody>
+      </p:sp>
+      <p:sp>
+        <p:nvSpPr>
+          <p:cNvPr id="4" name="Slide Number Placeholder 3"/>
+          <p:cNvSpPr>
+            <a:spLocks noGrp="1"/>
+          </p:cNvSpPr>
+          <p:nvPr>
+            <p:ph type="sldNum" idx="5" sz="quarter"/>
+          </p:nvPr>
+        </p:nvSpPr>
+        <p:spPr/>
+      </p:sp>
+    </p:spTree>
+  </p:cSld>
+  <p:clrMapOvr>
+    <a:masterClrMapping/>
+  </p:clrMapOvr>
+</p:notes>
+</file>
+
+<file path=ppt/notesSlides/notesSlide26.xml><?xml version="1.0" encoding="utf-8"?>
+<p:notes xmlns:a="http://schemas.openxmlformats.org/drawingml/2006/main" xmlns:p="http://schemas.openxmlformats.org/presentationml/2006/main" xmlns:r="http://schemas.openxmlformats.org/officeDocument/2006/relationships">
+  <p:cSld>
+    <p:spTree>
+      <p:nvGrpSpPr>
+        <p:cNvPr id="1" name=""/>
+        <p:cNvGrpSpPr/>
+        <p:nvPr/>
+      </p:nvGrpSpPr>
+      <p:grpSpPr>
+        <a:xfrm>
+          <a:off x="0" y="0"/>
+          <a:ext cx="0" cy="0"/>
+          <a:chOff x="0" y="0"/>
+          <a:chExt cx="0" cy="0"/>
+        </a:xfrm>
+      </p:grpSpPr>
+      <p:sp>
+        <p:nvSpPr>
+          <p:cNvPr id="2" name="Slide Image Placeholder 1"/>
+          <p:cNvSpPr>
+            <a:spLocks noGrp="1"/>
+          </p:cNvSpPr>
+          <p:nvPr>
+            <p:ph type="sldImg" idx="2"/>
+          </p:nvPr>
+        </p:nvSpPr>
+        <p:spPr/>
+      </p:sp>
+      <p:sp>
+        <p:nvSpPr>
+          <p:cNvPr id="3" name="Notes Placeholder 2"/>
+          <p:cNvSpPr>
+            <a:spLocks noGrp="1"/>
+          </p:cNvSpPr>
+          <p:nvPr>
+            <p:ph type="body" idx="3" sz="quarter"/>
+          </p:nvPr>
+        </p:nvSpPr>
+        <p:spPr/>
+        <p:txBody>
+          <a:bodyPr/>
+          <a:lstStyle/>
+          <a:p>
+            <a:r>
+              <a:t>Hands-on: module2/examples/signed_compare/</a:t>
+            </a:r>
+          </a:p>
+        </p:txBody>
+      </p:sp>
+      <p:sp>
+        <p:nvSpPr>
+          <p:cNvPr id="4" name="Slide Number Placeholder 3"/>
+          <p:cNvSpPr>
+            <a:spLocks noGrp="1"/>
+          </p:cNvSpPr>
+          <p:nvPr>
+            <p:ph type="sldNum" idx="5" sz="quarter"/>
+          </p:nvPr>
+        </p:nvSpPr>
+        <p:spPr/>
+      </p:sp>
+    </p:spTree>
+  </p:cSld>
+  <p:clrMapOvr>
+    <a:masterClrMapping/>
+  </p:clrMapOvr>
+</p:notes>
+</file>
+
+<file path=ppt/notesSlides/notesSlide27.xml><?xml version="1.0" encoding="utf-8"?>
+<p:notes xmlns:a="http://schemas.openxmlformats.org/drawingml/2006/main" xmlns:p="http://schemas.openxmlformats.org/presentationml/2006/main" xmlns:r="http://schemas.openxmlformats.org/officeDocument/2006/relationships">
+  <p:cSld>
+    <p:spTree>
+      <p:nvGrpSpPr>
+        <p:cNvPr id="1" name=""/>
+        <p:cNvGrpSpPr/>
+        <p:nvPr/>
+      </p:nvGrpSpPr>
+      <p:grpSpPr>
+        <a:xfrm>
+          <a:off x="0" y="0"/>
+          <a:ext cx="0" cy="0"/>
+          <a:chOff x="0" y="0"/>
+          <a:chExt cx="0" cy="0"/>
+        </a:xfrm>
+      </p:grpSpPr>
+      <p:sp>
+        <p:nvSpPr>
+          <p:cNvPr id="2" name="Slide Image Placeholder 1"/>
+          <p:cNvSpPr>
+            <a:spLocks noGrp="1"/>
+          </p:cNvSpPr>
+          <p:nvPr>
+            <p:ph type="sldImg" idx="2"/>
+          </p:nvPr>
+        </p:nvSpPr>
+        <p:spPr/>
+      </p:sp>
+      <p:sp>
+        <p:nvSpPr>
+          <p:cNvPr id="3" name="Notes Placeholder 2"/>
+          <p:cNvSpPr>
+            <a:spLocks noGrp="1"/>
+          </p:cNvSpPr>
+          <p:nvPr>
+            <p:ph type="body" idx="3" sz="quarter"/>
+          </p:nvPr>
+        </p:nvSpPr>
+        <p:spPr/>
+        <p:txBody>
+          <a:bodyPr/>
+          <a:lstStyle/>
+          <a:p>
+            <a:r>
+              <a:t>module2/examples/decoder/README.md</a:t>
+            </a:r>
+          </a:p>
+        </p:txBody>
+      </p:sp>
+      <p:sp>
+        <p:nvSpPr>
+          <p:cNvPr id="4" name="Slide Number Placeholder 3"/>
+          <p:cNvSpPr>
+            <a:spLocks noGrp="1"/>
+          </p:cNvSpPr>
+          <p:nvPr>
+            <p:ph type="sldNum" idx="5" sz="quarter"/>
+          </p:nvPr>
+        </p:nvSpPr>
+        <p:spPr/>
+      </p:sp>
+    </p:spTree>
+  </p:cSld>
+  <p:clrMapOvr>
+    <a:masterClrMapping/>
+  </p:clrMapOvr>
+</p:notes>
+</file>
+
+<file path=ppt/notesSlides/notesSlide28.xml><?xml version="1.0" encoding="utf-8"?>
+<p:notes xmlns:a="http://schemas.openxmlformats.org/drawingml/2006/main" xmlns:p="http://schemas.openxmlformats.org/presentationml/2006/main" xmlns:r="http://schemas.openxmlformats.org/officeDocument/2006/relationships">
+  <p:cSld>
+    <p:spTree>
+      <p:nvGrpSpPr>
+        <p:cNvPr id="1" name=""/>
+        <p:cNvGrpSpPr/>
+        <p:nvPr/>
+      </p:nvGrpSpPr>
+      <p:grpSpPr>
+        <a:xfrm>
+          <a:off x="0" y="0"/>
+          <a:ext cx="0" cy="0"/>
+          <a:chOff x="0" y="0"/>
+          <a:chExt cx="0" cy="0"/>
+        </a:xfrm>
+      </p:grpSpPr>
+      <p:sp>
+        <p:nvSpPr>
+          <p:cNvPr id="2" name="Slide Image Placeholder 1"/>
+          <p:cNvSpPr>
+            <a:spLocks noGrp="1"/>
+          </p:cNvSpPr>
+          <p:nvPr>
+            <p:ph type="sldImg" idx="2"/>
+          </p:nvPr>
+        </p:nvSpPr>
+        <p:spPr/>
+      </p:sp>
+      <p:sp>
+        <p:nvSpPr>
+          <p:cNvPr id="3" name="Notes Placeholder 2"/>
+          <p:cNvSpPr>
+            <a:spLocks noGrp="1"/>
+          </p:cNvSpPr>
+          <p:nvPr>
+            <p:ph type="body" idx="3" sz="quarter"/>
+          </p:nvPr>
+        </p:nvSpPr>
+        <p:spPr/>
+        <p:txBody>
+          <a:bodyPr/>
+          <a:lstStyle/>
+          <a:p>
+            <a:r>
+              <a:t>Hands-on: module2/examples/decoder/</a:t>
+            </a:r>
+          </a:p>
+        </p:txBody>
+      </p:sp>
+      <p:sp>
+        <p:nvSpPr>
+          <p:cNvPr id="4" name="Slide Number Placeholder 3"/>
+          <p:cNvSpPr>
+            <a:spLocks noGrp="1"/>
+          </p:cNvSpPr>
+          <p:nvPr>
+            <p:ph type="sldNum" idx="5" sz="quarter"/>
+          </p:nvPr>
+        </p:nvSpPr>
+        <p:spPr/>
+      </p:sp>
+    </p:spTree>
+  </p:cSld>
+  <p:clrMapOvr>
+    <a:masterClrMapping/>
+  </p:clrMapOvr>
+</p:notes>
+</file>
+
+<file path=ppt/notesSlides/notesSlide29.xml><?xml version="1.0" encoding="utf-8"?>
+<p:notes xmlns:a="http://schemas.openxmlformats.org/drawingml/2006/main" xmlns:p="http://schemas.openxmlformats.org/presentationml/2006/main" xmlns:r="http://schemas.openxmlformats.org/officeDocument/2006/relationships">
+  <p:cSld>
+    <p:spTree>
+      <p:nvGrpSpPr>
+        <p:cNvPr id="1" name=""/>
+        <p:cNvGrpSpPr/>
+        <p:nvPr/>
+      </p:nvGrpSpPr>
+      <p:grpSpPr>
+        <a:xfrm>
+          <a:off x="0" y="0"/>
+          <a:ext cx="0" cy="0"/>
+          <a:chOff x="0" y="0"/>
+          <a:chExt cx="0" cy="0"/>
+        </a:xfrm>
+      </p:grpSpPr>
+      <p:sp>
+        <p:nvSpPr>
+          <p:cNvPr id="2" name="Slide Image Placeholder 1"/>
+          <p:cNvSpPr>
+            <a:spLocks noGrp="1"/>
+          </p:cNvSpPr>
+          <p:nvPr>
+            <p:ph type="sldImg" idx="2"/>
+          </p:nvPr>
+        </p:nvSpPr>
+        <p:spPr/>
+      </p:sp>
+      <p:sp>
+        <p:nvSpPr>
+          <p:cNvPr id="3" name="Notes Placeholder 2"/>
+          <p:cNvSpPr>
+            <a:spLocks noGrp="1"/>
+          </p:cNvSpPr>
+          <p:nvPr>
+            <p:ph type="body" idx="3" sz="quarter"/>
+          </p:nvPr>
+        </p:nvSpPr>
+        <p:spPr/>
+        <p:txBody>
+          <a:bodyPr/>
+          <a:lstStyle/>
+          <a:p>
+            <a:r>
+              <a:t>module2/examples/arrays/README.md</a:t>
             </a:r>
           </a:p>
         </p:txBody>
@@ -1680,6 +2124,706 @@
 </p:notes>
 </file>
 
+<file path=ppt/notesSlides/notesSlide30.xml><?xml version="1.0" encoding="utf-8"?>
+<p:notes xmlns:a="http://schemas.openxmlformats.org/drawingml/2006/main" xmlns:p="http://schemas.openxmlformats.org/presentationml/2006/main" xmlns:r="http://schemas.openxmlformats.org/officeDocument/2006/relationships">
+  <p:cSld>
+    <p:spTree>
+      <p:nvGrpSpPr>
+        <p:cNvPr id="1" name=""/>
+        <p:cNvGrpSpPr/>
+        <p:nvPr/>
+      </p:nvGrpSpPr>
+      <p:grpSpPr>
+        <a:xfrm>
+          <a:off x="0" y="0"/>
+          <a:ext cx="0" cy="0"/>
+          <a:chOff x="0" y="0"/>
+          <a:chExt cx="0" cy="0"/>
+        </a:xfrm>
+      </p:grpSpPr>
+      <p:sp>
+        <p:nvSpPr>
+          <p:cNvPr id="2" name="Slide Image Placeholder 1"/>
+          <p:cNvSpPr>
+            <a:spLocks noGrp="1"/>
+          </p:cNvSpPr>
+          <p:nvPr>
+            <p:ph type="sldImg" idx="2"/>
+          </p:nvPr>
+        </p:nvSpPr>
+        <p:spPr/>
+      </p:sp>
+      <p:sp>
+        <p:nvSpPr>
+          <p:cNvPr id="3" name="Notes Placeholder 2"/>
+          <p:cNvSpPr>
+            <a:spLocks noGrp="1"/>
+          </p:cNvSpPr>
+          <p:nvPr>
+            <p:ph type="body" idx="3" sz="quarter"/>
+          </p:nvPr>
+        </p:nvSpPr>
+        <p:spPr/>
+        <p:txBody>
+          <a:bodyPr/>
+          <a:lstStyle/>
+          <a:p>
+            <a:r>
+              <a:t>Hands-on: module2/examples/arrays/</a:t>
+            </a:r>
+          </a:p>
+        </p:txBody>
+      </p:sp>
+      <p:sp>
+        <p:nvSpPr>
+          <p:cNvPr id="4" name="Slide Number Placeholder 3"/>
+          <p:cNvSpPr>
+            <a:spLocks noGrp="1"/>
+          </p:cNvSpPr>
+          <p:nvPr>
+            <p:ph type="sldNum" idx="5" sz="quarter"/>
+          </p:nvPr>
+        </p:nvSpPr>
+        <p:spPr/>
+      </p:sp>
+    </p:spTree>
+  </p:cSld>
+  <p:clrMapOvr>
+    <a:masterClrMapping/>
+  </p:clrMapOvr>
+</p:notes>
+</file>
+
+<file path=ppt/notesSlides/notesSlide31.xml><?xml version="1.0" encoding="utf-8"?>
+<p:notes xmlns:a="http://schemas.openxmlformats.org/drawingml/2006/main" xmlns:p="http://schemas.openxmlformats.org/presentationml/2006/main" xmlns:r="http://schemas.openxmlformats.org/officeDocument/2006/relationships">
+  <p:cSld>
+    <p:spTree>
+      <p:nvGrpSpPr>
+        <p:cNvPr id="1" name=""/>
+        <p:cNvGrpSpPr/>
+        <p:nvPr/>
+      </p:nvGrpSpPr>
+      <p:grpSpPr>
+        <a:xfrm>
+          <a:off x="0" y="0"/>
+          <a:ext cx="0" cy="0"/>
+          <a:chOff x="0" y="0"/>
+          <a:chExt cx="0" cy="0"/>
+        </a:xfrm>
+      </p:grpSpPr>
+      <p:sp>
+        <p:nvSpPr>
+          <p:cNvPr id="2" name="Slide Image Placeholder 1"/>
+          <p:cNvSpPr>
+            <a:spLocks noGrp="1"/>
+          </p:cNvSpPr>
+          <p:nvPr>
+            <p:ph type="sldImg" idx="2"/>
+          </p:nvPr>
+        </p:nvSpPr>
+        <p:spPr/>
+      </p:sp>
+      <p:sp>
+        <p:nvSpPr>
+          <p:cNvPr id="3" name="Notes Placeholder 2"/>
+          <p:cNvSpPr>
+            <a:spLocks noGrp="1"/>
+          </p:cNvSpPr>
+          <p:nvPr>
+            <p:ph type="body" idx="3" sz="quarter"/>
+          </p:nvPr>
+        </p:nvSpPr>
+        <p:spPr/>
+        <p:txBody>
+          <a:bodyPr/>
+          <a:lstStyle/>
+          <a:p>
+            <a:r>
+              <a:t>module2/examples/multi_dim_arrays/README.md</a:t>
+            </a:r>
+          </a:p>
+        </p:txBody>
+      </p:sp>
+      <p:sp>
+        <p:nvSpPr>
+          <p:cNvPr id="4" name="Slide Number Placeholder 3"/>
+          <p:cNvSpPr>
+            <a:spLocks noGrp="1"/>
+          </p:cNvSpPr>
+          <p:nvPr>
+            <p:ph type="sldNum" idx="5" sz="quarter"/>
+          </p:nvPr>
+        </p:nvSpPr>
+        <p:spPr/>
+      </p:sp>
+    </p:spTree>
+  </p:cSld>
+  <p:clrMapOvr>
+    <a:masterClrMapping/>
+  </p:clrMapOvr>
+</p:notes>
+</file>
+
+<file path=ppt/notesSlides/notesSlide32.xml><?xml version="1.0" encoding="utf-8"?>
+<p:notes xmlns:a="http://schemas.openxmlformats.org/drawingml/2006/main" xmlns:p="http://schemas.openxmlformats.org/presentationml/2006/main" xmlns:r="http://schemas.openxmlformats.org/officeDocument/2006/relationships">
+  <p:cSld>
+    <p:spTree>
+      <p:nvGrpSpPr>
+        <p:cNvPr id="1" name=""/>
+        <p:cNvGrpSpPr/>
+        <p:nvPr/>
+      </p:nvGrpSpPr>
+      <p:grpSpPr>
+        <a:xfrm>
+          <a:off x="0" y="0"/>
+          <a:ext cx="0" cy="0"/>
+          <a:chOff x="0" y="0"/>
+          <a:chExt cx="0" cy="0"/>
+        </a:xfrm>
+      </p:grpSpPr>
+      <p:sp>
+        <p:nvSpPr>
+          <p:cNvPr id="2" name="Slide Image Placeholder 1"/>
+          <p:cNvSpPr>
+            <a:spLocks noGrp="1"/>
+          </p:cNvSpPr>
+          <p:nvPr>
+            <p:ph type="sldImg" idx="2"/>
+          </p:nvPr>
+        </p:nvSpPr>
+        <p:spPr/>
+      </p:sp>
+      <p:sp>
+        <p:nvSpPr>
+          <p:cNvPr id="3" name="Notes Placeholder 2"/>
+          <p:cNvSpPr>
+            <a:spLocks noGrp="1"/>
+          </p:cNvSpPr>
+          <p:nvPr>
+            <p:ph type="body" idx="3" sz="quarter"/>
+          </p:nvPr>
+        </p:nvSpPr>
+        <p:spPr/>
+        <p:txBody>
+          <a:bodyPr/>
+          <a:lstStyle/>
+          <a:p>
+            <a:r>
+              <a:t>Hands-on: module2/examples/multi_dim_arrays/</a:t>
+            </a:r>
+          </a:p>
+        </p:txBody>
+      </p:sp>
+      <p:sp>
+        <p:nvSpPr>
+          <p:cNvPr id="4" name="Slide Number Placeholder 3"/>
+          <p:cNvSpPr>
+            <a:spLocks noGrp="1"/>
+          </p:cNvSpPr>
+          <p:nvPr>
+            <p:ph type="sldNum" idx="5" sz="quarter"/>
+          </p:nvPr>
+        </p:nvSpPr>
+        <p:spPr/>
+      </p:sp>
+    </p:spTree>
+  </p:cSld>
+  <p:clrMapOvr>
+    <a:masterClrMapping/>
+  </p:clrMapOvr>
+</p:notes>
+</file>
+
+<file path=ppt/notesSlides/notesSlide33.xml><?xml version="1.0" encoding="utf-8"?>
+<p:notes xmlns:a="http://schemas.openxmlformats.org/drawingml/2006/main" xmlns:p="http://schemas.openxmlformats.org/presentationml/2006/main" xmlns:r="http://schemas.openxmlformats.org/officeDocument/2006/relationships">
+  <p:cSld>
+    <p:spTree>
+      <p:nvGrpSpPr>
+        <p:cNvPr id="1" name=""/>
+        <p:cNvGrpSpPr/>
+        <p:nvPr/>
+      </p:nvGrpSpPr>
+      <p:grpSpPr>
+        <a:xfrm>
+          <a:off x="0" y="0"/>
+          <a:ext cx="0" cy="0"/>
+          <a:chOff x="0" y="0"/>
+          <a:chExt cx="0" cy="0"/>
+        </a:xfrm>
+      </p:grpSpPr>
+      <p:sp>
+        <p:nvSpPr>
+          <p:cNvPr id="2" name="Slide Image Placeholder 1"/>
+          <p:cNvSpPr>
+            <a:spLocks noGrp="1"/>
+          </p:cNvSpPr>
+          <p:nvPr>
+            <p:ph type="sldImg" idx="2"/>
+          </p:nvPr>
+        </p:nvSpPr>
+        <p:spPr/>
+      </p:sp>
+      <p:sp>
+        <p:nvSpPr>
+          <p:cNvPr id="3" name="Notes Placeholder 2"/>
+          <p:cNvSpPr>
+            <a:spLocks noGrp="1"/>
+          </p:cNvSpPr>
+          <p:nvPr>
+            <p:ph type="body" idx="3" sz="quarter"/>
+          </p:nvPr>
+        </p:nvSpPr>
+        <p:spPr/>
+        <p:txBody>
+          <a:bodyPr/>
+          <a:lstStyle/>
+          <a:p>
+            <a:r>
+              <a:t>module2/examples/parameters/README.md</a:t>
+            </a:r>
+          </a:p>
+        </p:txBody>
+      </p:sp>
+      <p:sp>
+        <p:nvSpPr>
+          <p:cNvPr id="4" name="Slide Number Placeholder 3"/>
+          <p:cNvSpPr>
+            <a:spLocks noGrp="1"/>
+          </p:cNvSpPr>
+          <p:nvPr>
+            <p:ph type="sldNum" idx="5" sz="quarter"/>
+          </p:nvPr>
+        </p:nvSpPr>
+        <p:spPr/>
+      </p:sp>
+    </p:spTree>
+  </p:cSld>
+  <p:clrMapOvr>
+    <a:masterClrMapping/>
+  </p:clrMapOvr>
+</p:notes>
+</file>
+
+<file path=ppt/notesSlides/notesSlide34.xml><?xml version="1.0" encoding="utf-8"?>
+<p:notes xmlns:a="http://schemas.openxmlformats.org/drawingml/2006/main" xmlns:p="http://schemas.openxmlformats.org/presentationml/2006/main" xmlns:r="http://schemas.openxmlformats.org/officeDocument/2006/relationships">
+  <p:cSld>
+    <p:spTree>
+      <p:nvGrpSpPr>
+        <p:cNvPr id="1" name=""/>
+        <p:cNvGrpSpPr/>
+        <p:nvPr/>
+      </p:nvGrpSpPr>
+      <p:grpSpPr>
+        <a:xfrm>
+          <a:off x="0" y="0"/>
+          <a:ext cx="0" cy="0"/>
+          <a:chOff x="0" y="0"/>
+          <a:chExt cx="0" cy="0"/>
+        </a:xfrm>
+      </p:grpSpPr>
+      <p:sp>
+        <p:nvSpPr>
+          <p:cNvPr id="2" name="Slide Image Placeholder 1"/>
+          <p:cNvSpPr>
+            <a:spLocks noGrp="1"/>
+          </p:cNvSpPr>
+          <p:nvPr>
+            <p:ph type="sldImg" idx="2"/>
+          </p:nvPr>
+        </p:nvSpPr>
+        <p:spPr/>
+      </p:sp>
+      <p:sp>
+        <p:nvSpPr>
+          <p:cNvPr id="3" name="Notes Placeholder 2"/>
+          <p:cNvSpPr>
+            <a:spLocks noGrp="1"/>
+          </p:cNvSpPr>
+          <p:nvPr>
+            <p:ph type="body" idx="3" sz="quarter"/>
+          </p:nvPr>
+        </p:nvSpPr>
+        <p:spPr/>
+        <p:txBody>
+          <a:bodyPr/>
+          <a:lstStyle/>
+          <a:p>
+            <a:r>
+              <a:t>Hands-on: module2/examples/parameters/</a:t>
+            </a:r>
+          </a:p>
+        </p:txBody>
+      </p:sp>
+      <p:sp>
+        <p:nvSpPr>
+          <p:cNvPr id="4" name="Slide Number Placeholder 3"/>
+          <p:cNvSpPr>
+            <a:spLocks noGrp="1"/>
+          </p:cNvSpPr>
+          <p:nvPr>
+            <p:ph type="sldNum" idx="5" sz="quarter"/>
+          </p:nvPr>
+        </p:nvSpPr>
+        <p:spPr/>
+      </p:sp>
+    </p:spTree>
+  </p:cSld>
+  <p:clrMapOvr>
+    <a:masterClrMapping/>
+  </p:clrMapOvr>
+</p:notes>
+</file>
+
+<file path=ppt/notesSlides/notesSlide35.xml><?xml version="1.0" encoding="utf-8"?>
+<p:notes xmlns:a="http://schemas.openxmlformats.org/drawingml/2006/main" xmlns:p="http://schemas.openxmlformats.org/presentationml/2006/main" xmlns:r="http://schemas.openxmlformats.org/officeDocument/2006/relationships">
+  <p:cSld>
+    <p:spTree>
+      <p:nvGrpSpPr>
+        <p:cNvPr id="1" name=""/>
+        <p:cNvGrpSpPr/>
+        <p:nvPr/>
+      </p:nvGrpSpPr>
+      <p:grpSpPr>
+        <a:xfrm>
+          <a:off x="0" y="0"/>
+          <a:ext cx="0" cy="0"/>
+          <a:chOff x="0" y="0"/>
+          <a:chExt cx="0" cy="0"/>
+        </a:xfrm>
+      </p:grpSpPr>
+      <p:sp>
+        <p:nvSpPr>
+          <p:cNvPr id="2" name="Slide Image Placeholder 1"/>
+          <p:cNvSpPr>
+            <a:spLocks noGrp="1"/>
+          </p:cNvSpPr>
+          <p:nvPr>
+            <p:ph type="sldImg" idx="2"/>
+          </p:nvPr>
+        </p:nvSpPr>
+        <p:spPr/>
+      </p:sp>
+      <p:sp>
+        <p:nvSpPr>
+          <p:cNvPr id="3" name="Notes Placeholder 2"/>
+          <p:cNvSpPr>
+            <a:spLocks noGrp="1"/>
+          </p:cNvSpPr>
+          <p:nvPr>
+            <p:ph type="body" idx="3" sz="quarter"/>
+          </p:nvPr>
+        </p:nvSpPr>
+        <p:spPr/>
+        <p:txBody>
+          <a:bodyPr/>
+          <a:lstStyle/>
+          <a:p>
+            <a:r>
+              <a:t>module2/examples/tasks_functions/README.md</a:t>
+            </a:r>
+          </a:p>
+        </p:txBody>
+      </p:sp>
+      <p:sp>
+        <p:nvSpPr>
+          <p:cNvPr id="4" name="Slide Number Placeholder 3"/>
+          <p:cNvSpPr>
+            <a:spLocks noGrp="1"/>
+          </p:cNvSpPr>
+          <p:nvPr>
+            <p:ph type="sldNum" idx="5" sz="quarter"/>
+          </p:nvPr>
+        </p:nvSpPr>
+        <p:spPr/>
+      </p:sp>
+    </p:spTree>
+  </p:cSld>
+  <p:clrMapOvr>
+    <a:masterClrMapping/>
+  </p:clrMapOvr>
+</p:notes>
+</file>
+
+<file path=ppt/notesSlides/notesSlide36.xml><?xml version="1.0" encoding="utf-8"?>
+<p:notes xmlns:a="http://schemas.openxmlformats.org/drawingml/2006/main" xmlns:p="http://schemas.openxmlformats.org/presentationml/2006/main" xmlns:r="http://schemas.openxmlformats.org/officeDocument/2006/relationships">
+  <p:cSld>
+    <p:spTree>
+      <p:nvGrpSpPr>
+        <p:cNvPr id="1" name=""/>
+        <p:cNvGrpSpPr/>
+        <p:nvPr/>
+      </p:nvGrpSpPr>
+      <p:grpSpPr>
+        <a:xfrm>
+          <a:off x="0" y="0"/>
+          <a:ext cx="0" cy="0"/>
+          <a:chOff x="0" y="0"/>
+          <a:chExt cx="0" cy="0"/>
+        </a:xfrm>
+      </p:grpSpPr>
+      <p:sp>
+        <p:nvSpPr>
+          <p:cNvPr id="2" name="Slide Image Placeholder 1"/>
+          <p:cNvSpPr>
+            <a:spLocks noGrp="1"/>
+          </p:cNvSpPr>
+          <p:nvPr>
+            <p:ph type="sldImg" idx="2"/>
+          </p:nvPr>
+        </p:nvSpPr>
+        <p:spPr/>
+      </p:sp>
+      <p:sp>
+        <p:nvSpPr>
+          <p:cNvPr id="3" name="Notes Placeholder 2"/>
+          <p:cNvSpPr>
+            <a:spLocks noGrp="1"/>
+          </p:cNvSpPr>
+          <p:nvPr>
+            <p:ph type="body" idx="3" sz="quarter"/>
+          </p:nvPr>
+        </p:nvSpPr>
+        <p:spPr/>
+        <p:txBody>
+          <a:bodyPr/>
+          <a:lstStyle/>
+          <a:p>
+            <a:r>
+              <a:t>Hands-on: module2/examples/tasks_functions/</a:t>
+            </a:r>
+          </a:p>
+        </p:txBody>
+      </p:sp>
+      <p:sp>
+        <p:nvSpPr>
+          <p:cNvPr id="4" name="Slide Number Placeholder 3"/>
+          <p:cNvSpPr>
+            <a:spLocks noGrp="1"/>
+          </p:cNvSpPr>
+          <p:nvPr>
+            <p:ph type="sldNum" idx="5" sz="quarter"/>
+          </p:nvPr>
+        </p:nvSpPr>
+        <p:spPr/>
+      </p:sp>
+    </p:spTree>
+  </p:cSld>
+  <p:clrMapOvr>
+    <a:masterClrMapping/>
+  </p:clrMapOvr>
+</p:notes>
+</file>
+
+<file path=ppt/notesSlides/notesSlide37.xml><?xml version="1.0" encoding="utf-8"?>
+<p:notes xmlns:a="http://schemas.openxmlformats.org/drawingml/2006/main" xmlns:p="http://schemas.openxmlformats.org/presentationml/2006/main" xmlns:r="http://schemas.openxmlformats.org/officeDocument/2006/relationships">
+  <p:cSld>
+    <p:spTree>
+      <p:nvGrpSpPr>
+        <p:cNvPr id="1" name=""/>
+        <p:cNvGrpSpPr/>
+        <p:nvPr/>
+      </p:nvGrpSpPr>
+      <p:grpSpPr>
+        <a:xfrm>
+          <a:off x="0" y="0"/>
+          <a:ext cx="0" cy="0"/>
+          <a:chOff x="0" y="0"/>
+          <a:chExt cx="0" cy="0"/>
+        </a:xfrm>
+      </p:grpSpPr>
+      <p:sp>
+        <p:nvSpPr>
+          <p:cNvPr id="2" name="Slide Image Placeholder 1"/>
+          <p:cNvSpPr>
+            <a:spLocks noGrp="1"/>
+          </p:cNvSpPr>
+          <p:nvPr>
+            <p:ph type="sldImg" idx="2"/>
+          </p:nvPr>
+        </p:nvSpPr>
+        <p:spPr/>
+      </p:sp>
+      <p:sp>
+        <p:nvSpPr>
+          <p:cNvPr id="3" name="Notes Placeholder 2"/>
+          <p:cNvSpPr>
+            <a:spLocks noGrp="1"/>
+          </p:cNvSpPr>
+          <p:nvPr>
+            <p:ph type="body" idx="3" sz="quarter"/>
+          </p:nvPr>
+        </p:nvSpPr>
+        <p:spPr/>
+        <p:txBody>
+          <a:bodyPr/>
+          <a:lstStyle/>
+          <a:p>
+            <a:r>
+              <a:t>module2/examples/task_ansi/README.md</a:t>
+            </a:r>
+          </a:p>
+        </p:txBody>
+      </p:sp>
+      <p:sp>
+        <p:nvSpPr>
+          <p:cNvPr id="4" name="Slide Number Placeholder 3"/>
+          <p:cNvSpPr>
+            <a:spLocks noGrp="1"/>
+          </p:cNvSpPr>
+          <p:nvPr>
+            <p:ph type="sldNum" idx="5" sz="quarter"/>
+          </p:nvPr>
+        </p:nvSpPr>
+        <p:spPr/>
+      </p:sp>
+    </p:spTree>
+  </p:cSld>
+  <p:clrMapOvr>
+    <a:masterClrMapping/>
+  </p:clrMapOvr>
+</p:notes>
+</file>
+
+<file path=ppt/notesSlides/notesSlide38.xml><?xml version="1.0" encoding="utf-8"?>
+<p:notes xmlns:a="http://schemas.openxmlformats.org/drawingml/2006/main" xmlns:p="http://schemas.openxmlformats.org/presentationml/2006/main" xmlns:r="http://schemas.openxmlformats.org/officeDocument/2006/relationships">
+  <p:cSld>
+    <p:spTree>
+      <p:nvGrpSpPr>
+        <p:cNvPr id="1" name=""/>
+        <p:cNvGrpSpPr/>
+        <p:nvPr/>
+      </p:nvGrpSpPr>
+      <p:grpSpPr>
+        <a:xfrm>
+          <a:off x="0" y="0"/>
+          <a:ext cx="0" cy="0"/>
+          <a:chOff x="0" y="0"/>
+          <a:chExt cx="0" cy="0"/>
+        </a:xfrm>
+      </p:grpSpPr>
+      <p:sp>
+        <p:nvSpPr>
+          <p:cNvPr id="2" name="Slide Image Placeholder 1"/>
+          <p:cNvSpPr>
+            <a:spLocks noGrp="1"/>
+          </p:cNvSpPr>
+          <p:nvPr>
+            <p:ph type="sldImg" idx="2"/>
+          </p:nvPr>
+        </p:nvSpPr>
+        <p:spPr/>
+      </p:sp>
+      <p:sp>
+        <p:nvSpPr>
+          <p:cNvPr id="3" name="Notes Placeholder 2"/>
+          <p:cNvSpPr>
+            <a:spLocks noGrp="1"/>
+          </p:cNvSpPr>
+          <p:nvPr>
+            <p:ph type="body" idx="3" sz="quarter"/>
+          </p:nvPr>
+        </p:nvSpPr>
+        <p:spPr/>
+        <p:txBody>
+          <a:bodyPr/>
+          <a:lstStyle/>
+          <a:p>
+            <a:r>
+              <a:t>Hands-on: module2/examples/task_ansi/</a:t>
+            </a:r>
+          </a:p>
+        </p:txBody>
+      </p:sp>
+      <p:sp>
+        <p:nvSpPr>
+          <p:cNvPr id="4" name="Slide Number Placeholder 3"/>
+          <p:cNvSpPr>
+            <a:spLocks noGrp="1"/>
+          </p:cNvSpPr>
+          <p:nvPr>
+            <p:ph type="sldNum" idx="5" sz="quarter"/>
+          </p:nvPr>
+        </p:nvSpPr>
+        <p:spPr/>
+      </p:sp>
+    </p:spTree>
+  </p:cSld>
+  <p:clrMapOvr>
+    <a:masterClrMapping/>
+  </p:clrMapOvr>
+</p:notes>
+</file>
+
+<file path=ppt/notesSlides/notesSlide39.xml><?xml version="1.0" encoding="utf-8"?>
+<p:notes xmlns:a="http://schemas.openxmlformats.org/drawingml/2006/main" xmlns:p="http://schemas.openxmlformats.org/presentationml/2006/main" xmlns:r="http://schemas.openxmlformats.org/officeDocument/2006/relationships">
+  <p:cSld>
+    <p:spTree>
+      <p:nvGrpSpPr>
+        <p:cNvPr id="1" name=""/>
+        <p:cNvGrpSpPr/>
+        <p:nvPr/>
+      </p:nvGrpSpPr>
+      <p:grpSpPr>
+        <a:xfrm>
+          <a:off x="0" y="0"/>
+          <a:ext cx="0" cy="0"/>
+          <a:chOff x="0" y="0"/>
+          <a:chExt cx="0" cy="0"/>
+        </a:xfrm>
+      </p:grpSpPr>
+      <p:sp>
+        <p:nvSpPr>
+          <p:cNvPr id="2" name="Slide Image Placeholder 1"/>
+          <p:cNvSpPr>
+            <a:spLocks noGrp="1"/>
+          </p:cNvSpPr>
+          <p:nvPr>
+            <p:ph type="sldImg" idx="2"/>
+          </p:nvPr>
+        </p:nvSpPr>
+        <p:spPr/>
+      </p:sp>
+      <p:sp>
+        <p:nvSpPr>
+          <p:cNvPr id="3" name="Notes Placeholder 2"/>
+          <p:cNvSpPr>
+            <a:spLocks noGrp="1"/>
+          </p:cNvSpPr>
+          <p:nvPr>
+            <p:ph type="body" idx="3" sz="quarter"/>
+          </p:nvPr>
+        </p:nvSpPr>
+        <p:spPr/>
+        <p:txBody>
+          <a:bodyPr/>
+          <a:lstStyle/>
+          <a:p>
+            <a:r>
+              <a:t>From MODULE2 Common Pitfalls.</a:t>
+            </a:r>
+          </a:p>
+        </p:txBody>
+      </p:sp>
+      <p:sp>
+        <p:nvSpPr>
+          <p:cNvPr id="4" name="Slide Number Placeholder 3"/>
+          <p:cNvSpPr>
+            <a:spLocks noGrp="1"/>
+          </p:cNvSpPr>
+          <p:nvPr>
+            <p:ph type="sldNum" idx="5" sz="quarter"/>
+          </p:nvPr>
+        </p:nvSpPr>
+        <p:spPr/>
+      </p:sp>
+    </p:spTree>
+  </p:cSld>
+  <p:clrMapOvr>
+    <a:masterClrMapping/>
+  </p:clrMapOvr>
+</p:notes>
+</file>
+
 <file path=ppt/notesSlides/notesSlide4.xml><?xml version="1.0" encoding="utf-8"?>
 <p:notes xmlns:a="http://schemas.openxmlformats.org/drawingml/2006/main" xmlns:p="http://schemas.openxmlformats.org/presentationml/2006/main" xmlns:r="http://schemas.openxmlformats.org/officeDocument/2006/relationships">
   <p:cSld>
@@ -1726,6 +2870,426 @@
           <a:p>
             <a:r>
               <a:t>From MODULE2 Topics Covered.</a:t>
+            </a:r>
+          </a:p>
+        </p:txBody>
+      </p:sp>
+      <p:sp>
+        <p:nvSpPr>
+          <p:cNvPr id="4" name="Slide Number Placeholder 3"/>
+          <p:cNvSpPr>
+            <a:spLocks noGrp="1"/>
+          </p:cNvSpPr>
+          <p:nvPr>
+            <p:ph type="sldNum" idx="5" sz="quarter"/>
+          </p:nvPr>
+        </p:nvSpPr>
+        <p:spPr/>
+      </p:sp>
+    </p:spTree>
+  </p:cSld>
+  <p:clrMapOvr>
+    <a:masterClrMapping/>
+  </p:clrMapOvr>
+</p:notes>
+</file>
+
+<file path=ppt/notesSlides/notesSlide40.xml><?xml version="1.0" encoding="utf-8"?>
+<p:notes xmlns:a="http://schemas.openxmlformats.org/drawingml/2006/main" xmlns:p="http://schemas.openxmlformats.org/presentationml/2006/main" xmlns:r="http://schemas.openxmlformats.org/officeDocument/2006/relationships">
+  <p:cSld>
+    <p:spTree>
+      <p:nvGrpSpPr>
+        <p:cNvPr id="1" name=""/>
+        <p:cNvGrpSpPr/>
+        <p:nvPr/>
+      </p:nvGrpSpPr>
+      <p:grpSpPr>
+        <a:xfrm>
+          <a:off x="0" y="0"/>
+          <a:ext cx="0" cy="0"/>
+          <a:chOff x="0" y="0"/>
+          <a:chExt cx="0" cy="0"/>
+        </a:xfrm>
+      </p:grpSpPr>
+      <p:sp>
+        <p:nvSpPr>
+          <p:cNvPr id="2" name="Slide Image Placeholder 1"/>
+          <p:cNvSpPr>
+            <a:spLocks noGrp="1"/>
+          </p:cNvSpPr>
+          <p:nvPr>
+            <p:ph type="sldImg" idx="2"/>
+          </p:nvPr>
+        </p:nvSpPr>
+        <p:spPr/>
+      </p:sp>
+      <p:sp>
+        <p:nvSpPr>
+          <p:cNvPr id="3" name="Notes Placeholder 2"/>
+          <p:cNvSpPr>
+            <a:spLocks noGrp="1"/>
+          </p:cNvSpPr>
+          <p:nvPr>
+            <p:ph type="body" idx="3" sz="quarter"/>
+          </p:nvPr>
+        </p:nvSpPr>
+        <p:spPr/>
+        <p:txBody>
+          <a:bodyPr/>
+          <a:lstStyle/>
+          <a:p>
+            <a:r>
+              <a:t>From MODULE2 Common Pitfalls.</a:t>
+            </a:r>
+          </a:p>
+        </p:txBody>
+      </p:sp>
+      <p:sp>
+        <p:nvSpPr>
+          <p:cNvPr id="4" name="Slide Number Placeholder 3"/>
+          <p:cNvSpPr>
+            <a:spLocks noGrp="1"/>
+          </p:cNvSpPr>
+          <p:nvPr>
+            <p:ph type="sldNum" idx="5" sz="quarter"/>
+          </p:nvPr>
+        </p:nvSpPr>
+        <p:spPr/>
+      </p:sp>
+    </p:spTree>
+  </p:cSld>
+  <p:clrMapOvr>
+    <a:masterClrMapping/>
+  </p:clrMapOvr>
+</p:notes>
+</file>
+
+<file path=ppt/notesSlides/notesSlide41.xml><?xml version="1.0" encoding="utf-8"?>
+<p:notes xmlns:a="http://schemas.openxmlformats.org/drawingml/2006/main" xmlns:p="http://schemas.openxmlformats.org/presentationml/2006/main" xmlns:r="http://schemas.openxmlformats.org/officeDocument/2006/relationships">
+  <p:cSld>
+    <p:spTree>
+      <p:nvGrpSpPr>
+        <p:cNvPr id="1" name=""/>
+        <p:cNvGrpSpPr/>
+        <p:nvPr/>
+      </p:nvGrpSpPr>
+      <p:grpSpPr>
+        <a:xfrm>
+          <a:off x="0" y="0"/>
+          <a:ext cx="0" cy="0"/>
+          <a:chOff x="0" y="0"/>
+          <a:chExt cx="0" cy="0"/>
+        </a:xfrm>
+      </p:grpSpPr>
+      <p:sp>
+        <p:nvSpPr>
+          <p:cNvPr id="2" name="Slide Image Placeholder 1"/>
+          <p:cNvSpPr>
+            <a:spLocks noGrp="1"/>
+          </p:cNvSpPr>
+          <p:nvPr>
+            <p:ph type="sldImg" idx="2"/>
+          </p:nvPr>
+        </p:nvSpPr>
+        <p:spPr/>
+      </p:sp>
+      <p:sp>
+        <p:nvSpPr>
+          <p:cNvPr id="3" name="Notes Placeholder 2"/>
+          <p:cNvSpPr>
+            <a:spLocks noGrp="1"/>
+          </p:cNvSpPr>
+          <p:nvPr>
+            <p:ph type="body" idx="3" sz="quarter"/>
+          </p:nvPr>
+        </p:nvSpPr>
+        <p:spPr/>
+        <p:txBody>
+          <a:bodyPr/>
+          <a:lstStyle/>
+          <a:p>
+            <a:r>
+              <a:t>From MODULE2 Common Pitfalls.</a:t>
+            </a:r>
+          </a:p>
+        </p:txBody>
+      </p:sp>
+      <p:sp>
+        <p:nvSpPr>
+          <p:cNvPr id="4" name="Slide Number Placeholder 3"/>
+          <p:cNvSpPr>
+            <a:spLocks noGrp="1"/>
+          </p:cNvSpPr>
+          <p:nvPr>
+            <p:ph type="sldNum" idx="5" sz="quarter"/>
+          </p:nvPr>
+        </p:nvSpPr>
+        <p:spPr/>
+      </p:sp>
+    </p:spTree>
+  </p:cSld>
+  <p:clrMapOvr>
+    <a:masterClrMapping/>
+  </p:clrMapOvr>
+</p:notes>
+</file>
+
+<file path=ppt/notesSlides/notesSlide42.xml><?xml version="1.0" encoding="utf-8"?>
+<p:notes xmlns:a="http://schemas.openxmlformats.org/drawingml/2006/main" xmlns:p="http://schemas.openxmlformats.org/presentationml/2006/main" xmlns:r="http://schemas.openxmlformats.org/officeDocument/2006/relationships">
+  <p:cSld>
+    <p:spTree>
+      <p:nvGrpSpPr>
+        <p:cNvPr id="1" name=""/>
+        <p:cNvGrpSpPr/>
+        <p:nvPr/>
+      </p:nvGrpSpPr>
+      <p:grpSpPr>
+        <a:xfrm>
+          <a:off x="0" y="0"/>
+          <a:ext cx="0" cy="0"/>
+          <a:chOff x="0" y="0"/>
+          <a:chExt cx="0" cy="0"/>
+        </a:xfrm>
+      </p:grpSpPr>
+      <p:sp>
+        <p:nvSpPr>
+          <p:cNvPr id="2" name="Slide Image Placeholder 1"/>
+          <p:cNvSpPr>
+            <a:spLocks noGrp="1"/>
+          </p:cNvSpPr>
+          <p:nvPr>
+            <p:ph type="sldImg" idx="2"/>
+          </p:nvPr>
+        </p:nvSpPr>
+        <p:spPr/>
+      </p:sp>
+      <p:sp>
+        <p:nvSpPr>
+          <p:cNvPr id="3" name="Notes Placeholder 2"/>
+          <p:cNvSpPr>
+            <a:spLocks noGrp="1"/>
+          </p:cNvSpPr>
+          <p:nvPr>
+            <p:ph type="body" idx="3" sz="quarter"/>
+          </p:nvPr>
+        </p:nvSpPr>
+        <p:spPr/>
+        <p:txBody>
+          <a:bodyPr/>
+          <a:lstStyle/>
+          <a:p>
+            <a:r>
+              <a:t>From MODULE2 Common Pitfalls.</a:t>
+            </a:r>
+          </a:p>
+        </p:txBody>
+      </p:sp>
+      <p:sp>
+        <p:nvSpPr>
+          <p:cNvPr id="4" name="Slide Number Placeholder 3"/>
+          <p:cNvSpPr>
+            <a:spLocks noGrp="1"/>
+          </p:cNvSpPr>
+          <p:nvPr>
+            <p:ph type="sldNum" idx="5" sz="quarter"/>
+          </p:nvPr>
+        </p:nvSpPr>
+        <p:spPr/>
+      </p:sp>
+    </p:spTree>
+  </p:cSld>
+  <p:clrMapOvr>
+    <a:masterClrMapping/>
+  </p:clrMapOvr>
+</p:notes>
+</file>
+
+<file path=ppt/notesSlides/notesSlide43.xml><?xml version="1.0" encoding="utf-8"?>
+<p:notes xmlns:a="http://schemas.openxmlformats.org/drawingml/2006/main" xmlns:p="http://schemas.openxmlformats.org/presentationml/2006/main" xmlns:r="http://schemas.openxmlformats.org/officeDocument/2006/relationships">
+  <p:cSld>
+    <p:spTree>
+      <p:nvGrpSpPr>
+        <p:cNvPr id="1" name=""/>
+        <p:cNvGrpSpPr/>
+        <p:nvPr/>
+      </p:nvGrpSpPr>
+      <p:grpSpPr>
+        <a:xfrm>
+          <a:off x="0" y="0"/>
+          <a:ext cx="0" cy="0"/>
+          <a:chOff x="0" y="0"/>
+          <a:chExt cx="0" cy="0"/>
+        </a:xfrm>
+      </p:grpSpPr>
+      <p:sp>
+        <p:nvSpPr>
+          <p:cNvPr id="2" name="Slide Image Placeholder 1"/>
+          <p:cNvSpPr>
+            <a:spLocks noGrp="1"/>
+          </p:cNvSpPr>
+          <p:nvPr>
+            <p:ph type="sldImg" idx="2"/>
+          </p:nvPr>
+        </p:nvSpPr>
+        <p:spPr/>
+      </p:sp>
+      <p:sp>
+        <p:nvSpPr>
+          <p:cNvPr id="3" name="Notes Placeholder 2"/>
+          <p:cNvSpPr>
+            <a:spLocks noGrp="1"/>
+          </p:cNvSpPr>
+          <p:nvPr>
+            <p:ph type="body" idx="3" sz="quarter"/>
+          </p:nvPr>
+        </p:nvSpPr>
+        <p:spPr/>
+        <p:txBody>
+          <a:bodyPr/>
+          <a:lstStyle/>
+          <a:p>
+            <a:r>
+              <a:t>From MODULE2 Common Pitfalls.</a:t>
+            </a:r>
+          </a:p>
+        </p:txBody>
+      </p:sp>
+      <p:sp>
+        <p:nvSpPr>
+          <p:cNvPr id="4" name="Slide Number Placeholder 3"/>
+          <p:cNvSpPr>
+            <a:spLocks noGrp="1"/>
+          </p:cNvSpPr>
+          <p:nvPr>
+            <p:ph type="sldNum" idx="5" sz="quarter"/>
+          </p:nvPr>
+        </p:nvSpPr>
+        <p:spPr/>
+      </p:sp>
+    </p:spTree>
+  </p:cSld>
+  <p:clrMapOvr>
+    <a:masterClrMapping/>
+  </p:clrMapOvr>
+</p:notes>
+</file>
+
+<file path=ppt/notesSlides/notesSlide44.xml><?xml version="1.0" encoding="utf-8"?>
+<p:notes xmlns:a="http://schemas.openxmlformats.org/drawingml/2006/main" xmlns:p="http://schemas.openxmlformats.org/presentationml/2006/main" xmlns:r="http://schemas.openxmlformats.org/officeDocument/2006/relationships">
+  <p:cSld>
+    <p:spTree>
+      <p:nvGrpSpPr>
+        <p:cNvPr id="1" name=""/>
+        <p:cNvGrpSpPr/>
+        <p:nvPr/>
+      </p:nvGrpSpPr>
+      <p:grpSpPr>
+        <a:xfrm>
+          <a:off x="0" y="0"/>
+          <a:ext cx="0" cy="0"/>
+          <a:chOff x="0" y="0"/>
+          <a:chExt cx="0" cy="0"/>
+        </a:xfrm>
+      </p:grpSpPr>
+      <p:sp>
+        <p:nvSpPr>
+          <p:cNvPr id="2" name="Slide Image Placeholder 1"/>
+          <p:cNvSpPr>
+            <a:spLocks noGrp="1"/>
+          </p:cNvSpPr>
+          <p:nvPr>
+            <p:ph type="sldImg" idx="2"/>
+          </p:nvPr>
+        </p:nvSpPr>
+        <p:spPr/>
+      </p:sp>
+      <p:sp>
+        <p:nvSpPr>
+          <p:cNvPr id="3" name="Notes Placeholder 2"/>
+          <p:cNvSpPr>
+            <a:spLocks noGrp="1"/>
+          </p:cNvSpPr>
+          <p:nvPr>
+            <p:ph type="body" idx="3" sz="quarter"/>
+          </p:nvPr>
+        </p:nvSpPr>
+        <p:spPr/>
+        <p:txBody>
+          <a:bodyPr/>
+          <a:lstStyle/>
+          <a:p>
+            <a:r>
+              <a:t>From MODULE2 Learning Outcomes.</a:t>
+            </a:r>
+          </a:p>
+        </p:txBody>
+      </p:sp>
+      <p:sp>
+        <p:nvSpPr>
+          <p:cNvPr id="4" name="Slide Number Placeholder 3"/>
+          <p:cNvSpPr>
+            <a:spLocks noGrp="1"/>
+          </p:cNvSpPr>
+          <p:nvPr>
+            <p:ph type="sldNum" idx="5" sz="quarter"/>
+          </p:nvPr>
+        </p:nvSpPr>
+        <p:spPr/>
+      </p:sp>
+    </p:spTree>
+  </p:cSld>
+  <p:clrMapOvr>
+    <a:masterClrMapping/>
+  </p:clrMapOvr>
+</p:notes>
+</file>
+
+<file path=ppt/notesSlides/notesSlide45.xml><?xml version="1.0" encoding="utf-8"?>
+<p:notes xmlns:a="http://schemas.openxmlformats.org/drawingml/2006/main" xmlns:p="http://schemas.openxmlformats.org/presentationml/2006/main" xmlns:r="http://schemas.openxmlformats.org/officeDocument/2006/relationships">
+  <p:cSld>
+    <p:spTree>
+      <p:nvGrpSpPr>
+        <p:cNvPr id="1" name=""/>
+        <p:cNvGrpSpPr/>
+        <p:nvPr/>
+      </p:nvGrpSpPr>
+      <p:grpSpPr>
+        <a:xfrm>
+          <a:off x="0" y="0"/>
+          <a:ext cx="0" cy="0"/>
+          <a:chOff x="0" y="0"/>
+          <a:chExt cx="0" cy="0"/>
+        </a:xfrm>
+      </p:grpSpPr>
+      <p:sp>
+        <p:nvSpPr>
+          <p:cNvPr id="2" name="Slide Image Placeholder 1"/>
+          <p:cNvSpPr>
+            <a:spLocks noGrp="1"/>
+          </p:cNvSpPr>
+          <p:nvPr>
+            <p:ph type="sldImg" idx="2"/>
+          </p:nvPr>
+        </p:nvSpPr>
+        <p:spPr/>
+      </p:sp>
+      <p:sp>
+        <p:nvSpPr>
+          <p:cNvPr id="3" name="Notes Placeholder 2"/>
+          <p:cNvSpPr>
+            <a:spLocks noGrp="1"/>
+          </p:cNvSpPr>
+          <p:nvPr>
+            <p:ph type="body" idx="3" sz="quarter"/>
+          </p:nvPr>
+        </p:nvSpPr>
+        <p:spPr/>
+        <p:txBody>
+          <a:bodyPr/>
+          <a:lstStyle/>
+          <a:p>
+            <a:r>
+              <a:t>From MODULE2 Learning Outcomes.</a:t>
             </a:r>
           </a:p>
         </p:txBody>
@@ -5233,7 +6797,7 @@
               </a:defRPr>
             </a:pPr>
             <a:r>
-              <a:t>3. Implicit Sensitivity: always @* (2001)</a:t>
+              <a:t>1. IEEE 1364-2001 Context (1/2)</a:t>
             </a:r>
           </a:p>
         </p:txBody>
@@ -5275,7 +6839,7 @@
               </a:defRPr>
             </a:pPr>
             <a:r>
-              <a:t>• **`@*` (or `@(*)`**): Sensitive to every signal read</a:t>
+              <a:t>• ANSI-style port declarations: Direction and type</a:t>
             </a:r>
           </a:p>
           <a:p>
@@ -5294,7 +6858,7 @@
               </a:defRPr>
             </a:pPr>
             <a:r>
-              <a:t>      in the block (RHS and conditions).</a:t>
+              <a:t>      (and size) in the port list</a:t>
             </a:r>
           </a:p>
           <a:p>
@@ -5313,7 +6877,7 @@
               </a:defRPr>
             </a:pPr>
             <a:r>
-              <a:t>• Use for combinational logic only; do not use for</a:t>
+              <a:t>• **`always @*`**: Implicit sensitivity for</a:t>
             </a:r>
           </a:p>
           <a:p>
@@ -5332,7 +6896,7 @@
               </a:defRPr>
             </a:pPr>
             <a:r>
-              <a:t>      sequential (use `always @(posedge clk)`).</a:t>
+              <a:t>      combinational logic (no manual list)</a:t>
             </a:r>
           </a:p>
           <a:p>
@@ -5351,7 +6915,7 @@
               </a:defRPr>
             </a:pPr>
             <a:r>
-              <a:t>• **Prefer `@*`**: For combinational blocks; fewer</a:t>
+              <a:t>• generate: Conditional and loop-based instantiation</a:t>
             </a:r>
           </a:p>
           <a:p>
@@ -5370,7 +6934,7 @@
               </a:defRPr>
             </a:pPr>
             <a:r>
-              <a:t>      errors, easier to maintain.</a:t>
+              <a:t>      and logic</a:t>
             </a:r>
           </a:p>
           <a:p>
@@ -5389,7 +6953,7 @@
               </a:defRPr>
             </a:pPr>
             <a:r>
-              <a:t>• Explicit list: When targeting strict 1995</a:t>
+              <a:t>• signed: Signed arithmetic and signed nets/variables</a:t>
             </a:r>
           </a:p>
           <a:p>
@@ -5408,7 +6972,64 @@
               </a:defRPr>
             </a:pPr>
             <a:r>
-              <a:t>      compatibility or when a tool does not support `@*`.</a:t>
+              <a:t>• Multi-dimensional arrays: e.g. `reg [7:0] mem</a:t>
+            </a:r>
+          </a:p>
+          <a:p>
+            <a:pPr>
+              <a:lnSpc>
+                <a:spcPts val="2200"/>
+              </a:lnSpc>
+              <a:spcAft>
+                <a:spcPts val="1000"/>
+              </a:spcAft>
+              <a:defRPr sz="2000" b="0">
+                <a:solidFill>
+                  <a:srgbClr val="333333"/>
+                </a:solidFill>
+                <a:latin typeface="Calibri"/>
+              </a:defRPr>
+            </a:pPr>
+            <a:r>
+              <a:t>      [0:255]`</a:t>
+            </a:r>
+          </a:p>
+          <a:p>
+            <a:pPr>
+              <a:lnSpc>
+                <a:spcPts val="2200"/>
+              </a:lnSpc>
+              <a:spcAft>
+                <a:spcPts val="1000"/>
+              </a:spcAft>
+              <a:defRPr sz="2000" b="0">
+                <a:solidFill>
+                  <a:srgbClr val="333333"/>
+                </a:solidFill>
+                <a:latin typeface="Calibri"/>
+              </a:defRPr>
+            </a:pPr>
+            <a:r>
+              <a:t>• localparam: Named constants that cannot be</a:t>
+            </a:r>
+          </a:p>
+          <a:p>
+            <a:pPr>
+              <a:lnSpc>
+                <a:spcPts val="2200"/>
+              </a:lnSpc>
+              <a:spcAft>
+                <a:spcPts val="1000"/>
+              </a:spcAft>
+              <a:defRPr sz="2000" b="0">
+                <a:solidFill>
+                  <a:srgbClr val="333333"/>
+                </a:solidFill>
+                <a:latin typeface="Calibri"/>
+              </a:defRPr>
+            </a:pPr>
+            <a:r>
+              <a:t>      overridden</a:t>
             </a:r>
           </a:p>
         </p:txBody>
@@ -5504,7 +7125,7 @@
               </a:defRPr>
             </a:pPr>
             <a:r>
-              <a:t>4. Generate (2001)</a:t>
+              <a:t>1. IEEE 1364-2001 Context (2/2)</a:t>
             </a:r>
           </a:p>
         </p:txBody>
@@ -5546,7 +7167,7 @@
               </a:defRPr>
             </a:pPr>
             <a:r>
-              <a:t>• genvar: Loop variable for generate loops; not a</a:t>
+              <a:t>• ANSI-style task/function: Input/output in the header</a:t>
             </a:r>
           </a:p>
           <a:p>
@@ -5565,7 +7186,7 @@
               </a:defRPr>
             </a:pPr>
             <a:r>
-              <a:t>      runtime variable.</a:t>
+              <a:t>• Other: File I/O improvements, `$signed`/`$unsigned`,</a:t>
             </a:r>
           </a:p>
           <a:p>
@@ -5584,7 +7205,7 @@
               </a:defRPr>
             </a:pPr>
             <a:r>
-              <a:t>• generate for: Replicates logic/instances; index must</a:t>
+              <a:t>      attribute syntax, etc.</a:t>
             </a:r>
           </a:p>
           <a:p>
@@ -5603,7 +7224,7 @@
               </a:defRPr>
             </a:pPr>
             <a:r>
-              <a:t>      be constant at elaboration.</a:t>
+              <a:t>• No SystemVerilog: no `logic`,</a:t>
             </a:r>
           </a:p>
           <a:p>
@@ -5622,7 +7243,7 @@
               </a:defRPr>
             </a:pPr>
             <a:r>
-              <a:t>• generate if / else: Choose one of several</a:t>
+              <a:t>      `always_comb`/`always_ff`, interfaces, packages,</a:t>
             </a:r>
           </a:p>
           <a:p>
@@ -5641,7 +7262,26 @@
               </a:defRPr>
             </a:pPr>
             <a:r>
-              <a:t>      implementations at elaboration.</a:t>
+              <a:t>      classes</a:t>
+            </a:r>
+          </a:p>
+          <a:p>
+            <a:pPr>
+              <a:lnSpc>
+                <a:spcPts val="2200"/>
+              </a:lnSpc>
+              <a:spcAft>
+                <a:spcPts val="1000"/>
+              </a:spcAft>
+              <a:defRPr sz="2000" b="0">
+                <a:solidFill>
+                  <a:srgbClr val="333333"/>
+                </a:solidFill>
+                <a:latin typeface="Calibri"/>
+              </a:defRPr>
+            </a:pPr>
+            <a:r>
+              <a:t>• No type parameters or interfaces (those are 1800)</a:t>
             </a:r>
           </a:p>
         </p:txBody>
@@ -5737,7 +7377,7 @@
               </a:defRPr>
             </a:pPr>
             <a:r>
-              <a:t>5. Signed Types (2001)</a:t>
+              <a:t>2. ANSI-Style Port Declarations (2001)</a:t>
             </a:r>
           </a:p>
         </p:txBody>
@@ -5779,7 +7419,7 @@
               </a:defRPr>
             </a:pPr>
             <a:r>
-              <a:t>• signed: Affects arithmetic and comparison in</a:t>
+              <a:t>• input wire: Default for input; can omit `wire` (e.g.</a:t>
             </a:r>
           </a:p>
           <a:p>
@@ -5798,7 +7438,7 @@
               </a:defRPr>
             </a:pPr>
             <a:r>
-              <a:t>      expressions involving that net/reg.</a:t>
+              <a:t>      `input [7:0] a`).</a:t>
             </a:r>
           </a:p>
           <a:p>
@@ -5817,7 +7457,7 @@
               </a:defRPr>
             </a:pPr>
             <a:r>
-              <a:t>• Unsigned (default): No sign extension; values 0 to</a:t>
+              <a:t>• output reg: Required when the output is driven in</a:t>
             </a:r>
           </a:p>
           <a:p>
@@ -5836,7 +7476,83 @@
               </a:defRPr>
             </a:pPr>
             <a:r>
-              <a:t>      2^N-1.</a:t>
+              <a:t>      `always`/`initial`.</a:t>
+            </a:r>
+          </a:p>
+          <a:p>
+            <a:pPr>
+              <a:lnSpc>
+                <a:spcPts val="2200"/>
+              </a:lnSpc>
+              <a:spcAft>
+                <a:spcPts val="1000"/>
+              </a:spcAft>
+              <a:defRPr sz="2000" b="0">
+                <a:solidFill>
+                  <a:srgbClr val="333333"/>
+                </a:solidFill>
+                <a:latin typeface="Calibri"/>
+              </a:defRPr>
+            </a:pPr>
+            <a:r>
+              <a:t>• output wire: When the output is driven only by</a:t>
+            </a:r>
+          </a:p>
+          <a:p>
+            <a:pPr>
+              <a:lnSpc>
+                <a:spcPts val="2200"/>
+              </a:lnSpc>
+              <a:spcAft>
+                <a:spcPts val="1000"/>
+              </a:spcAft>
+              <a:defRPr sz="2000" b="0">
+                <a:solidFill>
+                  <a:srgbClr val="333333"/>
+                </a:solidFill>
+                <a:latin typeface="Calibri"/>
+              </a:defRPr>
+            </a:pPr>
+            <a:r>
+              <a:t>      `assign` or submodule.</a:t>
+            </a:r>
+          </a:p>
+          <a:p>
+            <a:pPr>
+              <a:lnSpc>
+                <a:spcPts val="2200"/>
+              </a:lnSpc>
+              <a:spcAft>
+                <a:spcPts val="1000"/>
+              </a:spcAft>
+              <a:defRPr sz="2000" b="0">
+                <a:solidFill>
+                  <a:srgbClr val="333333"/>
+                </a:solidFill>
+                <a:latin typeface="Calibri"/>
+              </a:defRPr>
+            </a:pPr>
+            <a:r>
+              <a:t>• Same behavior; 2001 is more concise and keeps port</a:t>
+            </a:r>
+          </a:p>
+          <a:p>
+            <a:pPr>
+              <a:lnSpc>
+                <a:spcPts val="2200"/>
+              </a:lnSpc>
+              <a:spcAft>
+                <a:spcPts val="1000"/>
+              </a:spcAft>
+              <a:defRPr sz="2000" b="0">
+                <a:solidFill>
+                  <a:srgbClr val="333333"/>
+                </a:solidFill>
+                <a:latin typeface="Calibri"/>
+              </a:defRPr>
+            </a:pPr>
+            <a:r>
+              <a:t>      and type in one place.</a:t>
             </a:r>
           </a:p>
         </p:txBody>
@@ -5932,7 +7648,7 @@
               </a:defRPr>
             </a:pPr>
             <a:r>
-              <a:t>6. Multi-Dimensional Arrays (2001)</a:t>
+              <a:t>3. Implicit Sensitivity: always @* (2001)</a:t>
             </a:r>
           </a:p>
         </p:txBody>
@@ -5974,7 +7690,7 @@
               </a:defRPr>
             </a:pPr>
             <a:r>
-              <a:t>• Packed (left): `[7:0]` — contiguous bits, can be</a:t>
+              <a:t>• **`@*` (or `@(*)`**): Sensitive to every signal read</a:t>
             </a:r>
           </a:p>
           <a:p>
@@ -5993,7 +7709,7 @@
               </a:defRPr>
             </a:pPr>
             <a:r>
-              <a:t>      used as a single vector.</a:t>
+              <a:t>      in the block (RHS and conditions).</a:t>
             </a:r>
           </a:p>
           <a:p>
@@ -6012,7 +7728,7 @@
               </a:defRPr>
             </a:pPr>
             <a:r>
-              <a:t>• Unpacked (right): `[0:255]` — array of elements;</a:t>
+              <a:t>• Use for combinational logic only; do not use for</a:t>
             </a:r>
           </a:p>
           <a:p>
@@ -6031,7 +7747,83 @@
               </a:defRPr>
             </a:pPr>
             <a:r>
-              <a:t>      select with one index at a time in 2001.</a:t>
+              <a:t>      sequential (use `always @(posedge clk)`).</a:t>
+            </a:r>
+          </a:p>
+          <a:p>
+            <a:pPr>
+              <a:lnSpc>
+                <a:spcPts val="2200"/>
+              </a:lnSpc>
+              <a:spcAft>
+                <a:spcPts val="1000"/>
+              </a:spcAft>
+              <a:defRPr sz="2000" b="0">
+                <a:solidFill>
+                  <a:srgbClr val="333333"/>
+                </a:solidFill>
+                <a:latin typeface="Calibri"/>
+              </a:defRPr>
+            </a:pPr>
+            <a:r>
+              <a:t>• **Prefer `@*`**: For combinational blocks; fewer</a:t>
+            </a:r>
+          </a:p>
+          <a:p>
+            <a:pPr>
+              <a:lnSpc>
+                <a:spcPts val="2200"/>
+              </a:lnSpc>
+              <a:spcAft>
+                <a:spcPts val="1000"/>
+              </a:spcAft>
+              <a:defRPr sz="2000" b="0">
+                <a:solidFill>
+                  <a:srgbClr val="333333"/>
+                </a:solidFill>
+                <a:latin typeface="Calibri"/>
+              </a:defRPr>
+            </a:pPr>
+            <a:r>
+              <a:t>      errors, easier to maintain.</a:t>
+            </a:r>
+          </a:p>
+          <a:p>
+            <a:pPr>
+              <a:lnSpc>
+                <a:spcPts val="2200"/>
+              </a:lnSpc>
+              <a:spcAft>
+                <a:spcPts val="1000"/>
+              </a:spcAft>
+              <a:defRPr sz="2000" b="0">
+                <a:solidFill>
+                  <a:srgbClr val="333333"/>
+                </a:solidFill>
+                <a:latin typeface="Calibri"/>
+              </a:defRPr>
+            </a:pPr>
+            <a:r>
+              <a:t>• Explicit list: When targeting strict 1995</a:t>
+            </a:r>
+          </a:p>
+          <a:p>
+            <a:pPr>
+              <a:lnSpc>
+                <a:spcPts val="2200"/>
+              </a:lnSpc>
+              <a:spcAft>
+                <a:spcPts val="1000"/>
+              </a:spcAft>
+              <a:defRPr sz="2000" b="0">
+                <a:solidFill>
+                  <a:srgbClr val="333333"/>
+                </a:solidFill>
+                <a:latin typeface="Calibri"/>
+              </a:defRPr>
+            </a:pPr>
+            <a:r>
+              <a:t>      compatibility or when a tool does not support `@*`.</a:t>
             </a:r>
           </a:p>
         </p:txBody>
@@ -6127,7 +7919,7 @@
               </a:defRPr>
             </a:pPr>
             <a:r>
-              <a:t>7. localparam (2001)</a:t>
+              <a:t>4. Generate (2001)</a:t>
             </a:r>
           </a:p>
         </p:txBody>
@@ -6169,7 +7961,7 @@
               </a:defRPr>
             </a:pPr>
             <a:r>
-              <a:t>• parameter: Can be overridden: `#(.WIDTH(16))`.</a:t>
+              <a:t>• genvar: Loop variable for generate loops; not a</a:t>
             </a:r>
           </a:p>
           <a:p>
@@ -6188,7 +7980,7 @@
               </a:defRPr>
             </a:pPr>
             <a:r>
-              <a:t>• localparam: Cannot be overridden; often derived from</a:t>
+              <a:t>      runtime variable.</a:t>
             </a:r>
           </a:p>
           <a:p>
@@ -6207,7 +7999,64 @@
               </a:defRPr>
             </a:pPr>
             <a:r>
-              <a:t>      parameters or fixed.</a:t>
+              <a:t>• generate for: Replicates logic/instances; index must</a:t>
+            </a:r>
+          </a:p>
+          <a:p>
+            <a:pPr>
+              <a:lnSpc>
+                <a:spcPts val="2200"/>
+              </a:lnSpc>
+              <a:spcAft>
+                <a:spcPts val="1000"/>
+              </a:spcAft>
+              <a:defRPr sz="2000" b="0">
+                <a:solidFill>
+                  <a:srgbClr val="333333"/>
+                </a:solidFill>
+                <a:latin typeface="Calibri"/>
+              </a:defRPr>
+            </a:pPr>
+            <a:r>
+              <a:t>      be constant at elaboration.</a:t>
+            </a:r>
+          </a:p>
+          <a:p>
+            <a:pPr>
+              <a:lnSpc>
+                <a:spcPts val="2200"/>
+              </a:lnSpc>
+              <a:spcAft>
+                <a:spcPts val="1000"/>
+              </a:spcAft>
+              <a:defRPr sz="2000" b="0">
+                <a:solidFill>
+                  <a:srgbClr val="333333"/>
+                </a:solidFill>
+                <a:latin typeface="Calibri"/>
+              </a:defRPr>
+            </a:pPr>
+            <a:r>
+              <a:t>• generate if / else: Choose one of several</a:t>
+            </a:r>
+          </a:p>
+          <a:p>
+            <a:pPr>
+              <a:lnSpc>
+                <a:spcPts val="2200"/>
+              </a:lnSpc>
+              <a:spcAft>
+                <a:spcPts val="1000"/>
+              </a:spcAft>
+              <a:defRPr sz="2000" b="0">
+                <a:solidFill>
+                  <a:srgbClr val="333333"/>
+                </a:solidFill>
+                <a:latin typeface="Calibri"/>
+              </a:defRPr>
+            </a:pPr>
+            <a:r>
+              <a:t>      implementations at elaboration.</a:t>
             </a:r>
           </a:p>
         </p:txBody>
@@ -6303,7 +8152,7 @@
               </a:defRPr>
             </a:pPr>
             <a:r>
-              <a:t>8. ANSI-Style Tasks and Functions (2001)</a:t>
+              <a:t>5. Signed Types (2001)</a:t>
             </a:r>
           </a:p>
         </p:txBody>
@@ -6345,7 +8194,7 @@
               </a:defRPr>
             </a:pPr>
             <a:r>
-              <a:t>• automatic: Optional; gives automatic storage (re-</a:t>
+              <a:t>• signed: Affects arithmetic and comparison in</a:t>
             </a:r>
           </a:p>
           <a:p>
@@ -6364,7 +8213,7 @@
               </a:defRPr>
             </a:pPr>
             <a:r>
-              <a:t>      entrant). Useful for recursive or concurrent calls.</a:t>
+              <a:t>      expressions involving that net/reg.</a:t>
             </a:r>
           </a:p>
           <a:p>
@@ -6383,7 +8232,7 @@
               </a:defRPr>
             </a:pPr>
             <a:r>
-              <a:t>• input/output in header: Cleaner than 1995 style;</a:t>
+              <a:t>• Unsigned (default): No sign extension; values 0 to</a:t>
             </a:r>
           </a:p>
           <a:p>
@@ -6402,45 +8251,7 @@
               </a:defRPr>
             </a:pPr>
             <a:r>
-              <a:t>      avoids duplicate declarations.</a:t>
-            </a:r>
-          </a:p>
-          <a:p>
-            <a:pPr>
-              <a:lnSpc>
-                <a:spcPts val="2200"/>
-              </a:lnSpc>
-              <a:spcAft>
-                <a:spcPts val="1000"/>
-              </a:spcAft>
-              <a:defRPr sz="2000" b="0">
-                <a:solidFill>
-                  <a:srgbClr val="333333"/>
-                </a:solidFill>
-                <a:latin typeface="Calibri"/>
-              </a:defRPr>
-            </a:pPr>
-            <a:r>
-              <a:t>• Note: In 1364-2001 use `output reg` (not `output</a:t>
-            </a:r>
-          </a:p>
-          <a:p>
-            <a:pPr>
-              <a:lnSpc>
-                <a:spcPts val="2200"/>
-              </a:lnSpc>
-              <a:spcAft>
-                <a:spcPts val="1000"/>
-              </a:spcAft>
-              <a:defRPr sz="2000" b="0">
-                <a:solidFill>
-                  <a:srgbClr val="333333"/>
-                </a:solidFill>
-                <a:latin typeface="Calibri"/>
-              </a:defRPr>
-            </a:pPr>
-            <a:r>
-              <a:t>      logic`; `logic` is SystemVerilog).</a:t>
+              <a:t>      2^N-1.</a:t>
             </a:r>
           </a:p>
         </p:txBody>
@@ -6510,8 +8321,8 @@
         </p:nvSpPr>
         <p:spPr>
           <a:xfrm>
-            <a:off x="548640" y="2743200"/>
-            <a:ext cx="11064240" cy="1371600"/>
+            <a:off x="548640" y="411480"/>
+            <a:ext cx="11064240" cy="777240"/>
           </a:xfrm>
           <a:prstGeom prst="rect">
             <a:avLst/>
@@ -6524,11 +8335,11 @@
           </a:bodyPr>
           <a:lstStyle/>
           <a:p>
-            <a:pPr algn="ctr">
-              <a:lnSpc>
-                <a:spcPts val="2200"/>
-              </a:lnSpc>
-              <a:defRPr sz="3600" b="1">
+            <a:pPr>
+              <a:lnSpc>
+                <a:spcPts val="2200"/>
+              </a:lnSpc>
+              <a:defRPr sz="2800" b="1">
                 <a:solidFill>
                   <a:srgbClr val="1A1A2E"/>
                 </a:solidFill>
@@ -6536,7 +8347,7 @@
               </a:defRPr>
             </a:pPr>
             <a:r>
-              <a:t>Hands-on examples</a:t>
+              <a:t>6. Multi-Dimensional Arrays (2001)</a:t>
             </a:r>
           </a:p>
         </p:txBody>
@@ -6544,6 +8355,105 @@
       <p:sp>
         <p:nvSpPr>
           <p:cNvPr id="3" name="TextBox 2"/>
+          <p:cNvSpPr txBox="1"/>
+          <p:nvPr/>
+        </p:nvSpPr>
+        <p:spPr>
+          <a:xfrm>
+            <a:off x="548640" y="1234440"/>
+            <a:ext cx="11064240" cy="4937760"/>
+          </a:xfrm>
+          <a:prstGeom prst="rect">
+            <a:avLst/>
+          </a:prstGeom>
+          <a:noFill/>
+        </p:spPr>
+        <p:txBody>
+          <a:bodyPr wrap="square">
+            <a:noAutofit/>
+          </a:bodyPr>
+          <a:lstStyle/>
+          <a:p>
+            <a:pPr>
+              <a:lnSpc>
+                <a:spcPts val="2200"/>
+              </a:lnSpc>
+              <a:spcAft>
+                <a:spcPts val="1000"/>
+              </a:spcAft>
+              <a:defRPr sz="2000" b="0">
+                <a:solidFill>
+                  <a:srgbClr val="333333"/>
+                </a:solidFill>
+                <a:latin typeface="Calibri"/>
+              </a:defRPr>
+            </a:pPr>
+            <a:r>
+              <a:t>• Packed (left): `[7:0]` — contiguous bits, can be</a:t>
+            </a:r>
+          </a:p>
+          <a:p>
+            <a:pPr>
+              <a:lnSpc>
+                <a:spcPts val="2200"/>
+              </a:lnSpc>
+              <a:spcAft>
+                <a:spcPts val="1000"/>
+              </a:spcAft>
+              <a:defRPr sz="2000" b="0">
+                <a:solidFill>
+                  <a:srgbClr val="333333"/>
+                </a:solidFill>
+                <a:latin typeface="Calibri"/>
+              </a:defRPr>
+            </a:pPr>
+            <a:r>
+              <a:t>      used as a single vector.</a:t>
+            </a:r>
+          </a:p>
+          <a:p>
+            <a:pPr>
+              <a:lnSpc>
+                <a:spcPts val="2200"/>
+              </a:lnSpc>
+              <a:spcAft>
+                <a:spcPts val="1000"/>
+              </a:spcAft>
+              <a:defRPr sz="2000" b="0">
+                <a:solidFill>
+                  <a:srgbClr val="333333"/>
+                </a:solidFill>
+                <a:latin typeface="Calibri"/>
+              </a:defRPr>
+            </a:pPr>
+            <a:r>
+              <a:t>• Unpacked (right): `[0:255]` — array of elements;</a:t>
+            </a:r>
+          </a:p>
+          <a:p>
+            <a:pPr>
+              <a:lnSpc>
+                <a:spcPts val="2200"/>
+              </a:lnSpc>
+              <a:spcAft>
+                <a:spcPts val="1000"/>
+              </a:spcAft>
+              <a:defRPr sz="2000" b="0">
+                <a:solidFill>
+                  <a:srgbClr val="333333"/>
+                </a:solidFill>
+                <a:latin typeface="Calibri"/>
+              </a:defRPr>
+            </a:pPr>
+            <a:r>
+              <a:t>      select with one index at a time in 2001.</a:t>
+            </a:r>
+          </a:p>
+        </p:txBody>
+      </p:sp>
+      <p:sp>
+        <p:nvSpPr>
+          <p:cNvPr id="4" name="TextBox 3"/>
           <p:cNvSpPr txBox="1"/>
           <p:nvPr/>
         </p:nvSpPr>
@@ -6632,7 +8542,7 @@
               </a:defRPr>
             </a:pPr>
             <a:r>
-              <a:t>Module 2 toolchain check</a:t>
+              <a:t>7. localparam (2001)</a:t>
             </a:r>
           </a:p>
         </p:txBody>
@@ -6645,15 +8555,13 @@
         </p:nvSpPr>
         <p:spPr>
           <a:xfrm>
-            <a:off x="548640" y="1051560"/>
-            <a:ext cx="11064240" cy="914400"/>
-          </a:xfrm>
-          <a:prstGeom prst="rect">
-            <a:avLst/>
-          </a:prstGeom>
-          <a:solidFill>
-            <a:srgbClr val="F4F4F4"/>
-          </a:solidFill>
+            <a:off x="548640" y="1234440"/>
+            <a:ext cx="11064240" cy="4937760"/>
+          </a:xfrm>
+          <a:prstGeom prst="rect">
+            <a:avLst/>
+          </a:prstGeom>
+          <a:noFill/>
         </p:spPr>
         <p:txBody>
           <a:bodyPr wrap="square">
@@ -6666,67 +8574,62 @@
                 <a:spcPts val="2200"/>
               </a:lnSpc>
               <a:spcAft>
-                <a:spcPts val="200"/>
-              </a:spcAft>
-              <a:defRPr sz="2000" b="0">
-                <a:solidFill>
-                  <a:srgbClr val="333333"/>
-                </a:solidFill>
-                <a:latin typeface="Consolas"/>
-              </a:defRPr>
-            </a:pPr>
-            <a:r>
-              <a:t>$ command -v iverilog &gt;/dev/null &amp;&amp; echo "Toolchain ready: $(iverilog</a:t>
-            </a:r>
-          </a:p>
-          <a:p>
-            <a:pPr>
-              <a:lnSpc>
-                <a:spcPts val="2200"/>
-              </a:lnSpc>
-              <a:spcAft>
-                <a:spcPts val="200"/>
-              </a:spcAft>
-              <a:defRPr sz="2000" b="0">
-                <a:solidFill>
-                  <a:srgbClr val="333333"/>
-                </a:solidFill>
-                <a:latin typeface="Consolas"/>
-              </a:defRPr>
-            </a:pPr>
-            <a:r>
-              <a:t>      -V 2&gt;&amp;1 | head -1)"</a:t>
-            </a:r>
-          </a:p>
-        </p:txBody>
-      </p:sp>
-      <p:pic>
-        <p:nvPicPr>
-          <p:cNvPr id="4" name="Picture 3" descr="module2_check.png"/>
-          <p:cNvPicPr>
-            <a:picLocks noChangeAspect="1"/>
-          </p:cNvPicPr>
-          <p:nvPr/>
-        </p:nvPicPr>
-        <p:blipFill>
-          <a:blip r:embed="rId2"/>
-          <a:stretch>
-            <a:fillRect/>
-          </a:stretch>
-        </p:blipFill>
-        <p:spPr>
-          <a:xfrm>
-            <a:off x="548640" y="1965960"/>
-            <a:ext cx="7071358" cy="3977639"/>
-          </a:xfrm>
-          <a:prstGeom prst="rect">
-            <a:avLst/>
-          </a:prstGeom>
-        </p:spPr>
-      </p:pic>
-      <p:sp>
-        <p:nvSpPr>
-          <p:cNvPr id="5" name="TextBox 4"/>
+                <a:spcPts val="1000"/>
+              </a:spcAft>
+              <a:defRPr sz="2000" b="0">
+                <a:solidFill>
+                  <a:srgbClr val="333333"/>
+                </a:solidFill>
+                <a:latin typeface="Calibri"/>
+              </a:defRPr>
+            </a:pPr>
+            <a:r>
+              <a:t>• parameter: Can be overridden: `#(.WIDTH(16))`.</a:t>
+            </a:r>
+          </a:p>
+          <a:p>
+            <a:pPr>
+              <a:lnSpc>
+                <a:spcPts val="2200"/>
+              </a:lnSpc>
+              <a:spcAft>
+                <a:spcPts val="1000"/>
+              </a:spcAft>
+              <a:defRPr sz="2000" b="0">
+                <a:solidFill>
+                  <a:srgbClr val="333333"/>
+                </a:solidFill>
+                <a:latin typeface="Calibri"/>
+              </a:defRPr>
+            </a:pPr>
+            <a:r>
+              <a:t>• localparam: Cannot be overridden; often derived from</a:t>
+            </a:r>
+          </a:p>
+          <a:p>
+            <a:pPr>
+              <a:lnSpc>
+                <a:spcPts val="2200"/>
+              </a:lnSpc>
+              <a:spcAft>
+                <a:spcPts val="1000"/>
+              </a:spcAft>
+              <a:defRPr sz="2000" b="0">
+                <a:solidFill>
+                  <a:srgbClr val="333333"/>
+                </a:solidFill>
+                <a:latin typeface="Calibri"/>
+              </a:defRPr>
+            </a:pPr>
+            <a:r>
+              <a:t>      parameters or fixed.</a:t>
+            </a:r>
+          </a:p>
+        </p:txBody>
+      </p:sp>
+      <p:sp>
+        <p:nvSpPr>
+          <p:cNvPr id="4" name="TextBox 3"/>
           <p:cNvSpPr txBox="1"/>
           <p:nvPr/>
         </p:nvSpPr>
@@ -6815,7 +8718,7 @@
               </a:defRPr>
             </a:pPr>
             <a:r>
-              <a:t>Demo: ANSI Ports</a:t>
+              <a:t>8. ANSI-Style Tasks and Functions (2001)</a:t>
             </a:r>
           </a:p>
         </p:txBody>
@@ -6828,15 +8731,13 @@
         </p:nvSpPr>
         <p:spPr>
           <a:xfrm>
-            <a:off x="548640" y="1051560"/>
-            <a:ext cx="11064240" cy="914400"/>
-          </a:xfrm>
-          <a:prstGeom prst="rect">
-            <a:avLst/>
-          </a:prstGeom>
-          <a:solidFill>
-            <a:srgbClr val="F4F4F4"/>
-          </a:solidFill>
+            <a:off x="548640" y="1234440"/>
+            <a:ext cx="11064240" cy="4937760"/>
+          </a:xfrm>
+          <a:prstGeom prst="rect">
+            <a:avLst/>
+          </a:prstGeom>
+          <a:noFill/>
         </p:spPr>
         <p:txBody>
           <a:bodyPr wrap="square">
@@ -6849,48 +8750,119 @@
                 <a:spcPts val="2200"/>
               </a:lnSpc>
               <a:spcAft>
-                <a:spcPts val="200"/>
-              </a:spcAft>
-              <a:defRPr sz="2000" b="0">
-                <a:solidFill>
-                  <a:srgbClr val="333333"/>
-                </a:solidFill>
-                <a:latin typeface="Consolas"/>
-              </a:defRPr>
-            </a:pPr>
-            <a:r>
-              <a:t>$ cd module2/examples/ansi_ports &amp;&amp; make clean &amp;&amp; make run</a:t>
-            </a:r>
-          </a:p>
-        </p:txBody>
-      </p:sp>
-      <p:pic>
-        <p:nvPicPr>
-          <p:cNvPr id="4" name="Picture 3" descr="ex01_ansi_ports.png"/>
-          <p:cNvPicPr>
-            <a:picLocks noChangeAspect="1"/>
-          </p:cNvPicPr>
-          <p:nvPr/>
-        </p:nvPicPr>
-        <p:blipFill>
-          <a:blip r:embed="rId2"/>
-          <a:stretch>
-            <a:fillRect/>
-          </a:stretch>
-        </p:blipFill>
-        <p:spPr>
-          <a:xfrm>
-            <a:off x="548640" y="1965960"/>
-            <a:ext cx="7071358" cy="3977639"/>
-          </a:xfrm>
-          <a:prstGeom prst="rect">
-            <a:avLst/>
-          </a:prstGeom>
-        </p:spPr>
-      </p:pic>
-      <p:sp>
-        <p:nvSpPr>
-          <p:cNvPr id="5" name="TextBox 4"/>
+                <a:spcPts val="1000"/>
+              </a:spcAft>
+              <a:defRPr sz="2000" b="0">
+                <a:solidFill>
+                  <a:srgbClr val="333333"/>
+                </a:solidFill>
+                <a:latin typeface="Calibri"/>
+              </a:defRPr>
+            </a:pPr>
+            <a:r>
+              <a:t>• automatic: Optional; gives automatic storage (re-</a:t>
+            </a:r>
+          </a:p>
+          <a:p>
+            <a:pPr>
+              <a:lnSpc>
+                <a:spcPts val="2200"/>
+              </a:lnSpc>
+              <a:spcAft>
+                <a:spcPts val="1000"/>
+              </a:spcAft>
+              <a:defRPr sz="2000" b="0">
+                <a:solidFill>
+                  <a:srgbClr val="333333"/>
+                </a:solidFill>
+                <a:latin typeface="Calibri"/>
+              </a:defRPr>
+            </a:pPr>
+            <a:r>
+              <a:t>      entrant). Useful for recursive or concurrent calls.</a:t>
+            </a:r>
+          </a:p>
+          <a:p>
+            <a:pPr>
+              <a:lnSpc>
+                <a:spcPts val="2200"/>
+              </a:lnSpc>
+              <a:spcAft>
+                <a:spcPts val="1000"/>
+              </a:spcAft>
+              <a:defRPr sz="2000" b="0">
+                <a:solidFill>
+                  <a:srgbClr val="333333"/>
+                </a:solidFill>
+                <a:latin typeface="Calibri"/>
+              </a:defRPr>
+            </a:pPr>
+            <a:r>
+              <a:t>• input/output in header: Cleaner than 1995 style;</a:t>
+            </a:r>
+          </a:p>
+          <a:p>
+            <a:pPr>
+              <a:lnSpc>
+                <a:spcPts val="2200"/>
+              </a:lnSpc>
+              <a:spcAft>
+                <a:spcPts val="1000"/>
+              </a:spcAft>
+              <a:defRPr sz="2000" b="0">
+                <a:solidFill>
+                  <a:srgbClr val="333333"/>
+                </a:solidFill>
+                <a:latin typeface="Calibri"/>
+              </a:defRPr>
+            </a:pPr>
+            <a:r>
+              <a:t>      avoids duplicate declarations.</a:t>
+            </a:r>
+          </a:p>
+          <a:p>
+            <a:pPr>
+              <a:lnSpc>
+                <a:spcPts val="2200"/>
+              </a:lnSpc>
+              <a:spcAft>
+                <a:spcPts val="1000"/>
+              </a:spcAft>
+              <a:defRPr sz="2000" b="0">
+                <a:solidFill>
+                  <a:srgbClr val="333333"/>
+                </a:solidFill>
+                <a:latin typeface="Calibri"/>
+              </a:defRPr>
+            </a:pPr>
+            <a:r>
+              <a:t>• Note: In 1364-2001 use `output reg` (not `output</a:t>
+            </a:r>
+          </a:p>
+          <a:p>
+            <a:pPr>
+              <a:lnSpc>
+                <a:spcPts val="2200"/>
+              </a:lnSpc>
+              <a:spcAft>
+                <a:spcPts val="1000"/>
+              </a:spcAft>
+              <a:defRPr sz="2000" b="0">
+                <a:solidFill>
+                  <a:srgbClr val="333333"/>
+                </a:solidFill>
+                <a:latin typeface="Calibri"/>
+              </a:defRPr>
+            </a:pPr>
+            <a:r>
+              <a:t>      logic`; `logic` is SystemVerilog).</a:t>
+            </a:r>
+          </a:p>
+        </p:txBody>
+      </p:sp>
+      <p:sp>
+        <p:nvSpPr>
+          <p:cNvPr id="4" name="TextBox 3"/>
           <p:cNvSpPr txBox="1"/>
           <p:nvPr/>
         </p:nvSpPr>
@@ -6953,8 +8925,8 @@
         </p:nvSpPr>
         <p:spPr>
           <a:xfrm>
-            <a:off x="548640" y="411480"/>
-            <a:ext cx="11064240" cy="777240"/>
+            <a:off x="548640" y="2743200"/>
+            <a:ext cx="11064240" cy="1371600"/>
           </a:xfrm>
           <a:prstGeom prst="rect">
             <a:avLst/>
@@ -6967,11 +8939,11 @@
           </a:bodyPr>
           <a:lstStyle/>
           <a:p>
-            <a:pPr>
-              <a:lnSpc>
-                <a:spcPts val="2200"/>
-              </a:lnSpc>
-              <a:defRPr sz="2800" b="1">
+            <a:pPr algn="ctr">
+              <a:lnSpc>
+                <a:spcPts val="2200"/>
+              </a:lnSpc>
+              <a:defRPr sz="3600" b="1">
                 <a:solidFill>
                   <a:srgbClr val="1A1A2E"/>
                 </a:solidFill>
@@ -6979,7 +8951,7 @@
               </a:defRPr>
             </a:pPr>
             <a:r>
-              <a:t>Demo: always @*</a:t>
+              <a:t>Hands-on examples</a:t>
             </a:r>
           </a:p>
         </p:txBody>
@@ -6987,74 +8959,6 @@
       <p:sp>
         <p:nvSpPr>
           <p:cNvPr id="3" name="TextBox 2"/>
-          <p:cNvSpPr txBox="1"/>
-          <p:nvPr/>
-        </p:nvSpPr>
-        <p:spPr>
-          <a:xfrm>
-            <a:off x="548640" y="1051560"/>
-            <a:ext cx="11064240" cy="914400"/>
-          </a:xfrm>
-          <a:prstGeom prst="rect">
-            <a:avLst/>
-          </a:prstGeom>
-          <a:solidFill>
-            <a:srgbClr val="F4F4F4"/>
-          </a:solidFill>
-        </p:spPr>
-        <p:txBody>
-          <a:bodyPr wrap="square">
-            <a:noAutofit/>
-          </a:bodyPr>
-          <a:lstStyle/>
-          <a:p>
-            <a:pPr>
-              <a:lnSpc>
-                <a:spcPts val="2200"/>
-              </a:lnSpc>
-              <a:spcAft>
-                <a:spcPts val="200"/>
-              </a:spcAft>
-              <a:defRPr sz="2000" b="0">
-                <a:solidFill>
-                  <a:srgbClr val="333333"/>
-                </a:solidFill>
-                <a:latin typeface="Consolas"/>
-              </a:defRPr>
-            </a:pPr>
-            <a:r>
-              <a:t>$ cd module2/examples/procedural &amp;&amp; make clean &amp;&amp; make run</a:t>
-            </a:r>
-          </a:p>
-        </p:txBody>
-      </p:sp>
-      <p:pic>
-        <p:nvPicPr>
-          <p:cNvPr id="4" name="Picture 3" descr="ex02_procedural.png"/>
-          <p:cNvPicPr>
-            <a:picLocks noChangeAspect="1"/>
-          </p:cNvPicPr>
-          <p:nvPr/>
-        </p:nvPicPr>
-        <p:blipFill>
-          <a:blip r:embed="rId2"/>
-          <a:stretch>
-            <a:fillRect/>
-          </a:stretch>
-        </p:blipFill>
-        <p:spPr>
-          <a:xfrm>
-            <a:off x="548640" y="1965960"/>
-            <a:ext cx="7071358" cy="3977639"/>
-          </a:xfrm>
-          <a:prstGeom prst="rect">
-            <a:avLst/>
-          </a:prstGeom>
-        </p:spPr>
-      </p:pic>
-      <p:sp>
-        <p:nvSpPr>
-          <p:cNvPr id="5" name="TextBox 4"/>
           <p:cNvSpPr txBox="1"/>
           <p:nvPr/>
         </p:nvSpPr>
@@ -7300,7 +9204,7 @@
               </a:defRPr>
             </a:pPr>
             <a:r>
-              <a:t>Demo: Generate</a:t>
+              <a:t>Module 2 toolchain check</a:t>
             </a:r>
           </a:p>
         </p:txBody>
@@ -7344,14 +9248,33 @@
               </a:defRPr>
             </a:pPr>
             <a:r>
-              <a:t>$ cd module2/examples/generate &amp;&amp; make clean &amp;&amp; make run</a:t>
+              <a:t>$ command -v iverilog &gt;/dev/null &amp;&amp; echo "Toolchain ready: $(iverilog</a:t>
+            </a:r>
+          </a:p>
+          <a:p>
+            <a:pPr>
+              <a:lnSpc>
+                <a:spcPts val="2200"/>
+              </a:lnSpc>
+              <a:spcAft>
+                <a:spcPts val="200"/>
+              </a:spcAft>
+              <a:defRPr sz="2000" b="0">
+                <a:solidFill>
+                  <a:srgbClr val="333333"/>
+                </a:solidFill>
+                <a:latin typeface="Consolas"/>
+              </a:defRPr>
+            </a:pPr>
+            <a:r>
+              <a:t>      -V 2&gt;&amp;1 | head -1)"</a:t>
             </a:r>
           </a:p>
         </p:txBody>
       </p:sp>
       <p:pic>
         <p:nvPicPr>
-          <p:cNvPr id="4" name="Picture 3" descr="ex03_generate.png"/>
+          <p:cNvPr id="4" name="Picture 3" descr="module2_check.png"/>
           <p:cNvPicPr>
             <a:picLocks noChangeAspect="1"/>
           </p:cNvPicPr>
@@ -7464,7 +9387,7 @@
               </a:defRPr>
             </a:pPr>
             <a:r>
-              <a:t>Demo: Generate if/else</a:t>
+              <a:t>Example 1: ANSI Ports</a:t>
             </a:r>
           </a:p>
         </p:txBody>
@@ -7477,15 +9400,13 @@
         </p:nvSpPr>
         <p:spPr>
           <a:xfrm>
-            <a:off x="548640" y="1051560"/>
-            <a:ext cx="11064240" cy="914400"/>
-          </a:xfrm>
-          <a:prstGeom prst="rect">
-            <a:avLst/>
-          </a:prstGeom>
-          <a:solidFill>
-            <a:srgbClr val="F4F4F4"/>
-          </a:solidFill>
+            <a:off x="548640" y="1234440"/>
+            <a:ext cx="11064240" cy="4937760"/>
+          </a:xfrm>
+          <a:prstGeom prst="rect">
+            <a:avLst/>
+          </a:prstGeom>
+          <a:noFill/>
         </p:spPr>
         <p:txBody>
           <a:bodyPr wrap="square">
@@ -7498,48 +9419,43 @@
                 <a:spcPts val="2200"/>
               </a:lnSpc>
               <a:spcAft>
-                <a:spcPts val="200"/>
-              </a:spcAft>
-              <a:defRPr sz="2000" b="0">
-                <a:solidFill>
-                  <a:srgbClr val="333333"/>
-                </a:solidFill>
-                <a:latin typeface="Consolas"/>
-              </a:defRPr>
-            </a:pPr>
-            <a:r>
-              <a:t>$ cd module2/examples/generate_if &amp;&amp; make clean &amp;&amp; make run</a:t>
-            </a:r>
-          </a:p>
-        </p:txBody>
-      </p:sp>
-      <p:pic>
-        <p:nvPicPr>
-          <p:cNvPr id="4" name="Picture 3" descr="ex04_generate_if.png"/>
-          <p:cNvPicPr>
-            <a:picLocks noChangeAspect="1"/>
-          </p:cNvPicPr>
-          <p:nvPr/>
-        </p:nvPicPr>
-        <p:blipFill>
-          <a:blip r:embed="rId2"/>
-          <a:stretch>
-            <a:fillRect/>
-          </a:stretch>
-        </p:blipFill>
-        <p:spPr>
-          <a:xfrm>
-            <a:off x="548640" y="1965960"/>
-            <a:ext cx="7071358" cy="3977639"/>
-          </a:xfrm>
-          <a:prstGeom prst="rect">
-            <a:avLst/>
-          </a:prstGeom>
-        </p:spPr>
-      </p:pic>
-      <p:sp>
-        <p:nvSpPr>
-          <p:cNvPr id="5" name="TextBox 4"/>
+                <a:spcPts val="1000"/>
+              </a:spcAft>
+              <a:defRPr sz="2000" b="0">
+                <a:solidFill>
+                  <a:srgbClr val="333333"/>
+                </a:solidFill>
+                <a:latin typeface="Calibri"/>
+              </a:defRPr>
+            </a:pPr>
+            <a:r>
+              <a:t>• Module and instantiation with ANSI-style ports</a:t>
+            </a:r>
+          </a:p>
+          <a:p>
+            <a:pPr>
+              <a:lnSpc>
+                <a:spcPts val="2200"/>
+              </a:lnSpc>
+              <a:spcAft>
+                <a:spcPts val="1000"/>
+              </a:spcAft>
+              <a:defRPr sz="2000" b="0">
+                <a:solidFill>
+                  <a:srgbClr val="333333"/>
+                </a:solidFill>
+                <a:latin typeface="Calibri"/>
+              </a:defRPr>
+            </a:pPr>
+            <a:r>
+              <a:t>• Port direction and type in port list</a:t>
+            </a:r>
+          </a:p>
+        </p:txBody>
+      </p:sp>
+      <p:sp>
+        <p:nvSpPr>
+          <p:cNvPr id="4" name="TextBox 3"/>
           <p:cNvSpPr txBox="1"/>
           <p:nvPr/>
         </p:nvSpPr>
@@ -7628,7 +9544,7 @@
               </a:defRPr>
             </a:pPr>
             <a:r>
-              <a:t>Demo: Generate Ripple Adder</a:t>
+              <a:t>Demo: ANSI Ports</a:t>
             </a:r>
           </a:p>
         </p:txBody>
@@ -7672,14 +9588,14 @@
               </a:defRPr>
             </a:pPr>
             <a:r>
-              <a:t>$ cd module2/examples/generate_ripple_adder &amp;&amp; make clean &amp;&amp; make run</a:t>
+              <a:t>$ cd module2/examples/ansi_ports &amp;&amp; make clean &amp;&amp; make run</a:t>
             </a:r>
           </a:p>
         </p:txBody>
       </p:sp>
       <p:pic>
         <p:nvPicPr>
-          <p:cNvPr id="4" name="Picture 3" descr="ex05_generate_ripple_adder.png"/>
+          <p:cNvPr id="4" name="Picture 3" descr="ex01_ansi_ports.png"/>
           <p:cNvPicPr>
             <a:picLocks noChangeAspect="1"/>
           </p:cNvPicPr>
@@ -7792,7 +9708,7 @@
               </a:defRPr>
             </a:pPr>
             <a:r>
-              <a:t>Demo: Signed</a:t>
+              <a:t>Example 2: always @*</a:t>
             </a:r>
           </a:p>
         </p:txBody>
@@ -7805,15 +9721,13 @@
         </p:nvSpPr>
         <p:spPr>
           <a:xfrm>
-            <a:off x="548640" y="1051560"/>
-            <a:ext cx="11064240" cy="914400"/>
-          </a:xfrm>
-          <a:prstGeom prst="rect">
-            <a:avLst/>
-          </a:prstGeom>
-          <a:solidFill>
-            <a:srgbClr val="F4F4F4"/>
-          </a:solidFill>
+            <a:off x="548640" y="1234440"/>
+            <a:ext cx="11064240" cy="4937760"/>
+          </a:xfrm>
+          <a:prstGeom prst="rect">
+            <a:avLst/>
+          </a:prstGeom>
+          <a:noFill/>
         </p:spPr>
         <p:txBody>
           <a:bodyPr wrap="square">
@@ -7826,48 +9740,43 @@
                 <a:spcPts val="2200"/>
               </a:lnSpc>
               <a:spcAft>
-                <a:spcPts val="200"/>
-              </a:spcAft>
-              <a:defRPr sz="2000" b="0">
-                <a:solidFill>
-                  <a:srgbClr val="333333"/>
-                </a:solidFill>
-                <a:latin typeface="Consolas"/>
-              </a:defRPr>
-            </a:pPr>
-            <a:r>
-              <a:t>$ cd module2/examples/signed &amp;&amp; make clean &amp;&amp; make run</a:t>
-            </a:r>
-          </a:p>
-        </p:txBody>
-      </p:sp>
-      <p:pic>
-        <p:nvPicPr>
-          <p:cNvPr id="4" name="Picture 3" descr="ex06_signed.png"/>
-          <p:cNvPicPr>
-            <a:picLocks noChangeAspect="1"/>
-          </p:cNvPicPr>
-          <p:nvPr/>
-        </p:nvPicPr>
-        <p:blipFill>
-          <a:blip r:embed="rId2"/>
-          <a:stretch>
-            <a:fillRect/>
-          </a:stretch>
-        </p:blipFill>
-        <p:spPr>
-          <a:xfrm>
-            <a:off x="548640" y="1965960"/>
-            <a:ext cx="7071358" cy="3977639"/>
-          </a:xfrm>
-          <a:prstGeom prst="rect">
-            <a:avLst/>
-          </a:prstGeom>
-        </p:spPr>
-      </p:pic>
-      <p:sp>
-        <p:nvSpPr>
-          <p:cNvPr id="5" name="TextBox 4"/>
+                <a:spcPts val="1000"/>
+              </a:spcAft>
+              <a:defRPr sz="2000" b="0">
+                <a:solidFill>
+                  <a:srgbClr val="333333"/>
+                </a:solidFill>
+                <a:latin typeface="Calibri"/>
+              </a:defRPr>
+            </a:pPr>
+            <a:r>
+              <a:t>• Combinational blocks with implicit sensitivity</a:t>
+            </a:r>
+          </a:p>
+          <a:p>
+            <a:pPr>
+              <a:lnSpc>
+                <a:spcPts val="2200"/>
+              </a:lnSpc>
+              <a:spcAft>
+                <a:spcPts val="1000"/>
+              </a:spcAft>
+              <a:defRPr sz="2000" b="0">
+                <a:solidFill>
+                  <a:srgbClr val="333333"/>
+                </a:solidFill>
+                <a:latin typeface="Calibri"/>
+              </a:defRPr>
+            </a:pPr>
+            <a:r>
+              <a:t>• No manual sensitivity list; tool infers from RHS</a:t>
+            </a:r>
+          </a:p>
+        </p:txBody>
+      </p:sp>
+      <p:sp>
+        <p:nvSpPr>
+          <p:cNvPr id="4" name="TextBox 3"/>
           <p:cNvSpPr txBox="1"/>
           <p:nvPr/>
         </p:nvSpPr>
@@ -7956,7 +9865,7 @@
               </a:defRPr>
             </a:pPr>
             <a:r>
-              <a:t>Demo: Signed vs Unsigned Comparison</a:t>
+              <a:t>Demo: always @*</a:t>
             </a:r>
           </a:p>
         </p:txBody>
@@ -8000,14 +9909,14 @@
               </a:defRPr>
             </a:pPr>
             <a:r>
-              <a:t>$ cd module2/examples/signed_compare &amp;&amp; make clean &amp;&amp; make run</a:t>
+              <a:t>$ cd module2/examples/procedural &amp;&amp; make clean &amp;&amp; make run</a:t>
             </a:r>
           </a:p>
         </p:txBody>
       </p:sp>
       <p:pic>
         <p:nvPicPr>
-          <p:cNvPr id="4" name="Picture 3" descr="ex07_signed_compare.png"/>
+          <p:cNvPr id="4" name="Picture 3" descr="ex02_procedural.png"/>
           <p:cNvPicPr>
             <a:picLocks noChangeAspect="1"/>
           </p:cNvPicPr>
@@ -8120,7 +10029,7 @@
               </a:defRPr>
             </a:pPr>
             <a:r>
-              <a:t>Demo: Decoder</a:t>
+              <a:t>Example 3: Generate</a:t>
             </a:r>
           </a:p>
         </p:txBody>
@@ -8133,15 +10042,13 @@
         </p:nvSpPr>
         <p:spPr>
           <a:xfrm>
-            <a:off x="548640" y="1051560"/>
-            <a:ext cx="11064240" cy="914400"/>
-          </a:xfrm>
-          <a:prstGeom prst="rect">
-            <a:avLst/>
-          </a:prstGeom>
-          <a:solidFill>
-            <a:srgbClr val="F4F4F4"/>
-          </a:solidFill>
+            <a:off x="548640" y="1234440"/>
+            <a:ext cx="11064240" cy="4937760"/>
+          </a:xfrm>
+          <a:prstGeom prst="rect">
+            <a:avLst/>
+          </a:prstGeom>
+          <a:noFill/>
         </p:spPr>
         <p:txBody>
           <a:bodyPr wrap="square">
@@ -8154,48 +10061,43 @@
                 <a:spcPts val="2200"/>
               </a:lnSpc>
               <a:spcAft>
-                <a:spcPts val="200"/>
-              </a:spcAft>
-              <a:defRPr sz="2000" b="0">
-                <a:solidFill>
-                  <a:srgbClr val="333333"/>
-                </a:solidFill>
-                <a:latin typeface="Consolas"/>
-              </a:defRPr>
-            </a:pPr>
-            <a:r>
-              <a:t>$ cd module2/examples/decoder &amp;&amp; make clean &amp;&amp; make run</a:t>
-            </a:r>
-          </a:p>
-        </p:txBody>
-      </p:sp>
-      <p:pic>
-        <p:nvPicPr>
-          <p:cNvPr id="4" name="Picture 3" descr="ex08_decoder.png"/>
-          <p:cNvPicPr>
-            <a:picLocks noChangeAspect="1"/>
-          </p:cNvPicPr>
-          <p:nvPr/>
-        </p:nvPicPr>
-        <p:blipFill>
-          <a:blip r:embed="rId2"/>
-          <a:stretch>
-            <a:fillRect/>
-          </a:stretch>
-        </p:blipFill>
-        <p:spPr>
-          <a:xfrm>
-            <a:off x="548640" y="1965960"/>
-            <a:ext cx="7071358" cy="3977639"/>
-          </a:xfrm>
-          <a:prstGeom prst="rect">
-            <a:avLst/>
-          </a:prstGeom>
-        </p:spPr>
-      </p:pic>
-      <p:sp>
-        <p:nvSpPr>
-          <p:cNvPr id="5" name="TextBox 4"/>
+                <a:spcPts val="1000"/>
+              </a:spcAft>
+              <a:defRPr sz="2000" b="0">
+                <a:solidFill>
+                  <a:srgbClr val="333333"/>
+                </a:solidFill>
+                <a:latin typeface="Calibri"/>
+              </a:defRPr>
+            </a:pPr>
+            <a:r>
+              <a:t>• Parameterized mux; generate-style parameterization</a:t>
+            </a:r>
+          </a:p>
+          <a:p>
+            <a:pPr>
+              <a:lnSpc>
+                <a:spcPts val="2200"/>
+              </a:lnSpc>
+              <a:spcAft>
+                <a:spcPts val="1000"/>
+              </a:spcAft>
+              <a:defRPr sz="2000" b="0">
+                <a:solidFill>
+                  <a:srgbClr val="333333"/>
+                </a:solidFill>
+                <a:latin typeface="Calibri"/>
+              </a:defRPr>
+            </a:pPr>
+            <a:r>
+              <a:t>• genvar, elaboration-time logic</a:t>
+            </a:r>
+          </a:p>
+        </p:txBody>
+      </p:sp>
+      <p:sp>
+        <p:nvSpPr>
+          <p:cNvPr id="4" name="TextBox 3"/>
           <p:cNvSpPr txBox="1"/>
           <p:nvPr/>
         </p:nvSpPr>
@@ -8284,7 +10186,7 @@
               </a:defRPr>
             </a:pPr>
             <a:r>
-              <a:t>Demo: Multi-Dimensional Arrays</a:t>
+              <a:t>Demo: Generate</a:t>
             </a:r>
           </a:p>
         </p:txBody>
@@ -8328,14 +10230,14 @@
               </a:defRPr>
             </a:pPr>
             <a:r>
-              <a:t>$ cd module2/examples/arrays &amp;&amp; make clean &amp;&amp; make run</a:t>
+              <a:t>$ cd module2/examples/generate &amp;&amp; make clean &amp;&amp; make run</a:t>
             </a:r>
           </a:p>
         </p:txBody>
       </p:sp>
       <p:pic>
         <p:nvPicPr>
-          <p:cNvPr id="4" name="Picture 3" descr="ex09_arrays.png"/>
+          <p:cNvPr id="4" name="Picture 3" descr="ex03_generate.png"/>
           <p:cNvPicPr>
             <a:picLocks noChangeAspect="1"/>
           </p:cNvPicPr>
@@ -8448,7 +10350,7 @@
               </a:defRPr>
             </a:pPr>
             <a:r>
-              <a:t>Demo: Multi-Dim Style</a:t>
+              <a:t>Example 4: Generate if/else</a:t>
             </a:r>
           </a:p>
         </p:txBody>
@@ -8461,15 +10363,13 @@
         </p:nvSpPr>
         <p:spPr>
           <a:xfrm>
-            <a:off x="548640" y="1051560"/>
-            <a:ext cx="11064240" cy="914400"/>
-          </a:xfrm>
-          <a:prstGeom prst="rect">
-            <a:avLst/>
-          </a:prstGeom>
-          <a:solidFill>
-            <a:srgbClr val="F4F4F4"/>
-          </a:solidFill>
+            <a:off x="548640" y="1234440"/>
+            <a:ext cx="11064240" cy="4937760"/>
+          </a:xfrm>
+          <a:prstGeom prst="rect">
+            <a:avLst/>
+          </a:prstGeom>
+          <a:noFill/>
         </p:spPr>
         <p:txBody>
           <a:bodyPr wrap="square">
@@ -8482,48 +10382,62 @@
                 <a:spcPts val="2200"/>
               </a:lnSpc>
               <a:spcAft>
-                <a:spcPts val="200"/>
-              </a:spcAft>
-              <a:defRPr sz="2000" b="0">
-                <a:solidFill>
-                  <a:srgbClr val="333333"/>
-                </a:solidFill>
-                <a:latin typeface="Consolas"/>
-              </a:defRPr>
-            </a:pPr>
-            <a:r>
-              <a:t>$ cd module2/examples/multi_dim_arrays &amp;&amp; make clean &amp;&amp; make run</a:t>
-            </a:r>
-          </a:p>
-        </p:txBody>
-      </p:sp>
-      <p:pic>
-        <p:nvPicPr>
-          <p:cNvPr id="4" name="Picture 3" descr="ex10_multi_dim_arrays.png"/>
-          <p:cNvPicPr>
-            <a:picLocks noChangeAspect="1"/>
-          </p:cNvPicPr>
-          <p:nvPr/>
-        </p:nvPicPr>
-        <p:blipFill>
-          <a:blip r:embed="rId2"/>
-          <a:stretch>
-            <a:fillRect/>
-          </a:stretch>
-        </p:blipFill>
-        <p:spPr>
-          <a:xfrm>
-            <a:off x="548640" y="1965960"/>
-            <a:ext cx="7071358" cy="3977639"/>
-          </a:xfrm>
-          <a:prstGeom prst="rect">
-            <a:avLst/>
-          </a:prstGeom>
-        </p:spPr>
-      </p:pic>
-      <p:sp>
-        <p:nvSpPr>
-          <p:cNvPr id="5" name="TextBox 4"/>
+                <a:spcPts val="1000"/>
+              </a:spcAft>
+              <a:defRPr sz="2000" b="0">
+                <a:solidFill>
+                  <a:srgbClr val="333333"/>
+                </a:solidFill>
+                <a:latin typeface="Calibri"/>
+              </a:defRPr>
+            </a:pPr>
+            <a:r>
+              <a:t>• Conditional implementation by parameter (e.g.</a:t>
+            </a:r>
+          </a:p>
+          <a:p>
+            <a:pPr>
+              <a:lnSpc>
+                <a:spcPts val="2200"/>
+              </a:lnSpc>
+              <a:spcAft>
+                <a:spcPts val="1000"/>
+              </a:spcAft>
+              <a:defRPr sz="2000" b="0">
+                <a:solidFill>
+                  <a:srgbClr val="333333"/>
+                </a:solidFill>
+                <a:latin typeface="Calibri"/>
+              </a:defRPr>
+            </a:pPr>
+            <a:r>
+              <a:t>      USE_CLIP wrap vs saturate)</a:t>
+            </a:r>
+          </a:p>
+          <a:p>
+            <a:pPr>
+              <a:lnSpc>
+                <a:spcPts val="2200"/>
+              </a:lnSpc>
+              <a:spcAft>
+                <a:spcPts val="1000"/>
+              </a:spcAft>
+              <a:defRPr sz="2000" b="0">
+                <a:solidFill>
+                  <a:srgbClr val="333333"/>
+                </a:solidFill>
+                <a:latin typeface="Calibri"/>
+              </a:defRPr>
+            </a:pPr>
+            <a:r>
+              <a:t>• generate if/else at elaboration</a:t>
+            </a:r>
+          </a:p>
+        </p:txBody>
+      </p:sp>
+      <p:sp>
+        <p:nvSpPr>
+          <p:cNvPr id="4" name="TextBox 3"/>
           <p:cNvSpPr txBox="1"/>
           <p:nvPr/>
         </p:nvSpPr>
@@ -8612,7 +10526,7 @@
               </a:defRPr>
             </a:pPr>
             <a:r>
-              <a:t>Demo: Parameters and localparam</a:t>
+              <a:t>Demo: Generate if/else</a:t>
             </a:r>
           </a:p>
         </p:txBody>
@@ -8656,14 +10570,14 @@
               </a:defRPr>
             </a:pPr>
             <a:r>
-              <a:t>$ cd module2/examples/parameters &amp;&amp; make clean &amp;&amp; make run</a:t>
+              <a:t>$ cd module2/examples/generate_if &amp;&amp; make clean &amp;&amp; make run</a:t>
             </a:r>
           </a:p>
         </p:txBody>
       </p:sp>
       <p:pic>
         <p:nvPicPr>
-          <p:cNvPr id="4" name="Picture 3" descr="ex11_parameters.png"/>
+          <p:cNvPr id="4" name="Picture 3" descr="ex04_generate_if.png"/>
           <p:cNvPicPr>
             <a:picLocks noChangeAspect="1"/>
           </p:cNvPicPr>
@@ -8776,7 +10690,7 @@
               </a:defRPr>
             </a:pPr>
             <a:r>
-              <a:t>Demo: ANSI Task/Function</a:t>
+              <a:t>Example 5: Generate Ripple Adder</a:t>
             </a:r>
           </a:p>
         </p:txBody>
@@ -8789,15 +10703,13 @@
         </p:nvSpPr>
         <p:spPr>
           <a:xfrm>
-            <a:off x="548640" y="1051560"/>
-            <a:ext cx="11064240" cy="914400"/>
-          </a:xfrm>
-          <a:prstGeom prst="rect">
-            <a:avLst/>
-          </a:prstGeom>
-          <a:solidFill>
-            <a:srgbClr val="F4F4F4"/>
-          </a:solidFill>
+            <a:off x="548640" y="1234440"/>
+            <a:ext cx="11064240" cy="4937760"/>
+          </a:xfrm>
+          <a:prstGeom prst="rect">
+            <a:avLst/>
+          </a:prstGeom>
+          <a:noFill/>
         </p:spPr>
         <p:txBody>
           <a:bodyPr wrap="square">
@@ -8810,48 +10722,62 @@
                 <a:spcPts val="2200"/>
               </a:lnSpc>
               <a:spcAft>
-                <a:spcPts val="200"/>
-              </a:spcAft>
-              <a:defRPr sz="2000" b="0">
-                <a:solidFill>
-                  <a:srgbClr val="333333"/>
-                </a:solidFill>
-                <a:latin typeface="Consolas"/>
-              </a:defRPr>
-            </a:pPr>
-            <a:r>
-              <a:t>$ cd module2/examples/tasks_functions &amp;&amp; make clean &amp;&amp; make run</a:t>
-            </a:r>
-          </a:p>
-        </p:txBody>
-      </p:sp>
-      <p:pic>
-        <p:nvPicPr>
-          <p:cNvPr id="4" name="Picture 3" descr="ex12_tasks_functions.png"/>
-          <p:cNvPicPr>
-            <a:picLocks noChangeAspect="1"/>
-          </p:cNvPicPr>
-          <p:nvPr/>
-        </p:nvPicPr>
-        <p:blipFill>
-          <a:blip r:embed="rId2"/>
-          <a:stretch>
-            <a:fillRect/>
-          </a:stretch>
-        </p:blipFill>
-        <p:spPr>
-          <a:xfrm>
-            <a:off x="548640" y="1965960"/>
-            <a:ext cx="7071358" cy="3977639"/>
-          </a:xfrm>
-          <a:prstGeom prst="rect">
-            <a:avLst/>
-          </a:prstGeom>
-        </p:spPr>
-      </p:pic>
-      <p:sp>
-        <p:nvSpPr>
-          <p:cNvPr id="5" name="TextBox 4"/>
+                <a:spcPts val="1000"/>
+              </a:spcAft>
+              <a:defRPr sz="2000" b="0">
+                <a:solidFill>
+                  <a:srgbClr val="333333"/>
+                </a:solidFill>
+                <a:latin typeface="Calibri"/>
+              </a:defRPr>
+            </a:pPr>
+            <a:r>
+              <a:t>• N-bit ripple-carry adder using generate for</a:t>
+            </a:r>
+          </a:p>
+          <a:p>
+            <a:pPr>
+              <a:lnSpc>
+                <a:spcPts val="2200"/>
+              </a:lnSpc>
+              <a:spcAft>
+                <a:spcPts val="1000"/>
+              </a:spcAft>
+              <a:defRPr sz="2000" b="0">
+                <a:solidFill>
+                  <a:srgbClr val="333333"/>
+                </a:solidFill>
+                <a:latin typeface="Calibri"/>
+              </a:defRPr>
+            </a:pPr>
+            <a:r>
+              <a:t>      (full_adder instances)</a:t>
+            </a:r>
+          </a:p>
+          <a:p>
+            <a:pPr>
+              <a:lnSpc>
+                <a:spcPts val="2200"/>
+              </a:lnSpc>
+              <a:spcAft>
+                <a:spcPts val="1000"/>
+              </a:spcAft>
+              <a:defRPr sz="2000" b="0">
+                <a:solidFill>
+                  <a:srgbClr val="333333"/>
+                </a:solidFill>
+                <a:latin typeface="Calibri"/>
+              </a:defRPr>
+            </a:pPr>
+            <a:r>
+              <a:t>• genvar loop, replicated hierarchy</a:t>
+            </a:r>
+          </a:p>
+        </p:txBody>
+      </p:sp>
+      <p:sp>
+        <p:nvSpPr>
+          <p:cNvPr id="4" name="TextBox 3"/>
           <p:cNvSpPr txBox="1"/>
           <p:nvPr/>
         </p:nvSpPr>
@@ -9078,7 +11004,7 @@
               </a:defRPr>
             </a:pPr>
             <a:r>
-              <a:t>Demo: ANSI Task with Output</a:t>
+              <a:t>Demo: Generate Ripple Adder</a:t>
             </a:r>
           </a:p>
         </p:txBody>
@@ -9122,14 +11048,14 @@
               </a:defRPr>
             </a:pPr>
             <a:r>
-              <a:t>$ cd module2/examples/task_ansi &amp;&amp; make clean &amp;&amp; make run</a:t>
+              <a:t>$ cd module2/examples/generate_ripple_adder &amp;&amp; make clean &amp;&amp; make run</a:t>
             </a:r>
           </a:p>
         </p:txBody>
       </p:sp>
       <p:pic>
         <p:nvPicPr>
-          <p:cNvPr id="4" name="Picture 3" descr="ex13_task_ansi.png"/>
+          <p:cNvPr id="4" name="Picture 3" descr="ex05_generate_ripple_adder.png"/>
           <p:cNvPicPr>
             <a:picLocks noChangeAspect="1"/>
           </p:cNvPicPr>
@@ -9216,8 +11142,8 @@
         </p:nvSpPr>
         <p:spPr>
           <a:xfrm>
-            <a:off x="548640" y="2743200"/>
-            <a:ext cx="11064240" cy="1371600"/>
+            <a:off x="548640" y="411480"/>
+            <a:ext cx="11064240" cy="777240"/>
           </a:xfrm>
           <a:prstGeom prst="rect">
             <a:avLst/>
@@ -9230,11 +11156,11 @@
           </a:bodyPr>
           <a:lstStyle/>
           <a:p>
-            <a:pPr algn="ctr">
-              <a:lnSpc>
-                <a:spcPts val="2200"/>
-              </a:lnSpc>
-              <a:defRPr sz="3600" b="1">
+            <a:pPr>
+              <a:lnSpc>
+                <a:spcPts val="2200"/>
+              </a:lnSpc>
+              <a:defRPr sz="2800" b="1">
                 <a:solidFill>
                   <a:srgbClr val="1A1A2E"/>
                 </a:solidFill>
@@ -9242,7 +11168,7 @@
               </a:defRPr>
             </a:pPr>
             <a:r>
-              <a:t>Practice &amp; assessment</a:t>
+              <a:t>Example 6: Signed</a:t>
             </a:r>
           </a:p>
         </p:txBody>
@@ -9250,6 +11176,67 @@
       <p:sp>
         <p:nvSpPr>
           <p:cNvPr id="3" name="TextBox 2"/>
+          <p:cNvSpPr txBox="1"/>
+          <p:nvPr/>
+        </p:nvSpPr>
+        <p:spPr>
+          <a:xfrm>
+            <a:off x="548640" y="1234440"/>
+            <a:ext cx="11064240" cy="4937760"/>
+          </a:xfrm>
+          <a:prstGeom prst="rect">
+            <a:avLst/>
+          </a:prstGeom>
+          <a:noFill/>
+        </p:spPr>
+        <p:txBody>
+          <a:bodyPr wrap="square">
+            <a:noAutofit/>
+          </a:bodyPr>
+          <a:lstStyle/>
+          <a:p>
+            <a:pPr>
+              <a:lnSpc>
+                <a:spcPts val="2200"/>
+              </a:lnSpc>
+              <a:spcAft>
+                <a:spcPts val="1000"/>
+              </a:spcAft>
+              <a:defRPr sz="2000" b="0">
+                <a:solidFill>
+                  <a:srgbClr val="333333"/>
+                </a:solidFill>
+                <a:latin typeface="Calibri"/>
+              </a:defRPr>
+            </a:pPr>
+            <a:r>
+              <a:t>• signed reg/wire, $signed/$unsigned</a:t>
+            </a:r>
+          </a:p>
+          <a:p>
+            <a:pPr>
+              <a:lnSpc>
+                <a:spcPts val="2200"/>
+              </a:lnSpc>
+              <a:spcAft>
+                <a:spcPts val="1000"/>
+              </a:spcAft>
+              <a:defRPr sz="2000" b="0">
+                <a:solidFill>
+                  <a:srgbClr val="333333"/>
+                </a:solidFill>
+                <a:latin typeface="Calibri"/>
+              </a:defRPr>
+            </a:pPr>
+            <a:r>
+              <a:t>• Two's complement arithmetic in RTL</a:t>
+            </a:r>
+          </a:p>
+        </p:txBody>
+      </p:sp>
+      <p:sp>
+        <p:nvSpPr>
+          <p:cNvPr id="4" name="TextBox 3"/>
           <p:cNvSpPr txBox="1"/>
           <p:nvPr/>
         </p:nvSpPr>
@@ -9338,7 +11325,7 @@
               </a:defRPr>
             </a:pPr>
             <a:r>
-              <a:t>Exercises</a:t>
+              <a:t>Demo: Signed</a:t>
             </a:r>
           </a:p>
         </p:txBody>
@@ -9351,13 +11338,15 @@
         </p:nvSpPr>
         <p:spPr>
           <a:xfrm>
-            <a:off x="548640" y="1234440"/>
-            <a:ext cx="11064240" cy="4937760"/>
-          </a:xfrm>
-          <a:prstGeom prst="rect">
-            <a:avLst/>
-          </a:prstGeom>
-          <a:noFill/>
+            <a:off x="548640" y="1051560"/>
+            <a:ext cx="11064240" cy="914400"/>
+          </a:xfrm>
+          <a:prstGeom prst="rect">
+            <a:avLst/>
+          </a:prstGeom>
+          <a:solidFill>
+            <a:srgbClr val="F4F4F4"/>
+          </a:solidFill>
         </p:spPr>
         <p:txBody>
           <a:bodyPr wrap="square">
@@ -9370,100 +11359,48 @@
                 <a:spcPts val="2200"/>
               </a:lnSpc>
               <a:spcAft>
-                <a:spcPts val="1000"/>
-              </a:spcAft>
-              <a:defRPr sz="2000" b="0">
-                <a:solidFill>
-                  <a:srgbClr val="333333"/>
-                </a:solidFill>
-                <a:latin typeface="Calibri"/>
-              </a:defRPr>
-            </a:pPr>
-            <a:r>
-              <a:t>• ANSI Ports</a:t>
-            </a:r>
-          </a:p>
-          <a:p>
-            <a:pPr>
-              <a:lnSpc>
-                <a:spcPts val="2200"/>
-              </a:lnSpc>
-              <a:spcAft>
-                <a:spcPts val="1000"/>
-              </a:spcAft>
-              <a:defRPr sz="2000" b="0">
-                <a:solidFill>
-                  <a:srgbClr val="333333"/>
-                </a:solidFill>
-                <a:latin typeface="Calibri"/>
-              </a:defRPr>
-            </a:pPr>
-            <a:r>
-              <a:t>• always @</a:t>
-            </a:r>
-          </a:p>
-          <a:p>
-            <a:pPr>
-              <a:lnSpc>
-                <a:spcPts val="2200"/>
-              </a:lnSpc>
-              <a:spcAft>
-                <a:spcPts val="1000"/>
-              </a:spcAft>
-              <a:defRPr sz="2000" b="0">
-                <a:solidFill>
-                  <a:srgbClr val="333333"/>
-                </a:solidFill>
-                <a:latin typeface="Calibri"/>
-              </a:defRPr>
-            </a:pPr>
-            <a:r>
-              <a:t>• Generate</a:t>
-            </a:r>
-          </a:p>
-          <a:p>
-            <a:pPr>
-              <a:lnSpc>
-                <a:spcPts val="2200"/>
-              </a:lnSpc>
-              <a:spcAft>
-                <a:spcPts val="1000"/>
-              </a:spcAft>
-              <a:defRPr sz="2000" b="0">
-                <a:solidFill>
-                  <a:srgbClr val="333333"/>
-                </a:solidFill>
-                <a:latin typeface="Calibri"/>
-              </a:defRPr>
-            </a:pPr>
-            <a:r>
-              <a:t>• Signed</a:t>
-            </a:r>
-          </a:p>
-          <a:p>
-            <a:pPr>
-              <a:lnSpc>
-                <a:spcPts val="2200"/>
-              </a:lnSpc>
-              <a:spcAft>
-                <a:spcPts val="1000"/>
-              </a:spcAft>
-              <a:defRPr sz="2000" b="0">
-                <a:solidFill>
-                  <a:srgbClr val="333333"/>
-                </a:solidFill>
-                <a:latin typeface="Calibri"/>
-              </a:defRPr>
-            </a:pPr>
-            <a:r>
-              <a:t>• Arrays and localparam</a:t>
-            </a:r>
-          </a:p>
-        </p:txBody>
-      </p:sp>
-      <p:sp>
-        <p:nvSpPr>
-          <p:cNvPr id="4" name="TextBox 3"/>
+                <a:spcPts val="200"/>
+              </a:spcAft>
+              <a:defRPr sz="2000" b="0">
+                <a:solidFill>
+                  <a:srgbClr val="333333"/>
+                </a:solidFill>
+                <a:latin typeface="Consolas"/>
+              </a:defRPr>
+            </a:pPr>
+            <a:r>
+              <a:t>$ cd module2/examples/signed &amp;&amp; make clean &amp;&amp; make run</a:t>
+            </a:r>
+          </a:p>
+        </p:txBody>
+      </p:sp>
+      <p:pic>
+        <p:nvPicPr>
+          <p:cNvPr id="4" name="Picture 3" descr="ex06_signed.png"/>
+          <p:cNvPicPr>
+            <a:picLocks noChangeAspect="1"/>
+          </p:cNvPicPr>
+          <p:nvPr/>
+        </p:nvPicPr>
+        <p:blipFill>
+          <a:blip r:embed="rId2"/>
+          <a:stretch>
+            <a:fillRect/>
+          </a:stretch>
+        </p:blipFill>
+        <p:spPr>
+          <a:xfrm>
+            <a:off x="548640" y="1965960"/>
+            <a:ext cx="7071358" cy="3977639"/>
+          </a:xfrm>
+          <a:prstGeom prst="rect">
+            <a:avLst/>
+          </a:prstGeom>
+        </p:spPr>
+      </p:pic>
+      <p:sp>
+        <p:nvSpPr>
+          <p:cNvPr id="5" name="TextBox 4"/>
           <p:cNvSpPr txBox="1"/>
           <p:nvPr/>
         </p:nvSpPr>
@@ -9552,7 +11489,7 @@
               </a:defRPr>
             </a:pPr>
             <a:r>
-              <a:t>Exercises</a:t>
+              <a:t>Example 7: Signed vs Unsigned Comparison</a:t>
             </a:r>
           </a:p>
         </p:txBody>
@@ -9594,7 +11531,7 @@
               </a:defRPr>
             </a:pPr>
             <a:r>
-              <a:t>• Using always @* for Sequential Logic</a:t>
+              <a:t>• $signed() in expressions; a &amp;lt; b unsigned vs</a:t>
             </a:r>
           </a:p>
           <a:p>
@@ -9613,7 +11550,7 @@
               </a:defRPr>
             </a:pPr>
             <a:r>
-              <a:t>• genvar in Normal Code</a:t>
+              <a:t>      signed</a:t>
             </a:r>
           </a:p>
           <a:p>
@@ -9632,45 +11569,7 @@
               </a:defRPr>
             </a:pPr>
             <a:r>
-              <a:t>• Overriding localparam</a:t>
-            </a:r>
-          </a:p>
-          <a:p>
-            <a:pPr>
-              <a:lnSpc>
-                <a:spcPts val="2200"/>
-              </a:lnSpc>
-              <a:spcAft>
-                <a:spcPts val="1000"/>
-              </a:spcAft>
-              <a:defRPr sz="2000" b="0">
-                <a:solidFill>
-                  <a:srgbClr val="333333"/>
-                </a:solidFill>
-                <a:latin typeface="Calibri"/>
-              </a:defRPr>
-            </a:pPr>
-            <a:r>
-              <a:t>• Signed vs Unsigned Mix</a:t>
-            </a:r>
-          </a:p>
-          <a:p>
-            <a:pPr>
-              <a:lnSpc>
-                <a:spcPts val="2200"/>
-              </a:lnSpc>
-              <a:spcAft>
-                <a:spcPts val="1000"/>
-              </a:spcAft>
-              <a:defRPr sz="2000" b="0">
-                <a:solidFill>
-                  <a:srgbClr val="333333"/>
-                </a:solidFill>
-                <a:latin typeface="Calibri"/>
-              </a:defRPr>
-            </a:pPr>
-            <a:r>
-              <a:t>• Generate Block Scope</a:t>
+              <a:t>• Cast in expressions without changing declaration</a:t>
             </a:r>
           </a:p>
         </p:txBody>
@@ -9766,7 +11665,7 @@
               </a:defRPr>
             </a:pPr>
             <a:r>
-              <a:t>Summary &amp; next steps</a:t>
+              <a:t>Demo: Signed vs Unsigned Comparison</a:t>
             </a:r>
           </a:p>
         </p:txBody>
@@ -9779,13 +11678,15 @@
         </p:nvSpPr>
         <p:spPr>
           <a:xfrm>
-            <a:off x="548640" y="1234440"/>
-            <a:ext cx="11064240" cy="4937760"/>
-          </a:xfrm>
-          <a:prstGeom prst="rect">
-            <a:avLst/>
-          </a:prstGeom>
-          <a:noFill/>
+            <a:off x="548640" y="1051560"/>
+            <a:ext cx="11064240" cy="914400"/>
+          </a:xfrm>
+          <a:prstGeom prst="rect">
+            <a:avLst/>
+          </a:prstGeom>
+          <a:solidFill>
+            <a:srgbClr val="F4F4F4"/>
+          </a:solidFill>
         </p:spPr>
         <p:txBody>
           <a:bodyPr wrap="square">
@@ -9798,6 +11699,168 @@
                 <a:spcPts val="2200"/>
               </a:lnSpc>
               <a:spcAft>
+                <a:spcPts val="200"/>
+              </a:spcAft>
+              <a:defRPr sz="2000" b="0">
+                <a:solidFill>
+                  <a:srgbClr val="333333"/>
+                </a:solidFill>
+                <a:latin typeface="Consolas"/>
+              </a:defRPr>
+            </a:pPr>
+            <a:r>
+              <a:t>$ cd module2/examples/signed_compare &amp;&amp; make clean &amp;&amp; make run</a:t>
+            </a:r>
+          </a:p>
+        </p:txBody>
+      </p:sp>
+      <p:pic>
+        <p:nvPicPr>
+          <p:cNvPr id="4" name="Picture 3" descr="ex07_signed_compare.png"/>
+          <p:cNvPicPr>
+            <a:picLocks noChangeAspect="1"/>
+          </p:cNvPicPr>
+          <p:nvPr/>
+        </p:nvPicPr>
+        <p:blipFill>
+          <a:blip r:embed="rId2"/>
+          <a:stretch>
+            <a:fillRect/>
+          </a:stretch>
+        </p:blipFill>
+        <p:spPr>
+          <a:xfrm>
+            <a:off x="548640" y="1965960"/>
+            <a:ext cx="7071358" cy="3977639"/>
+          </a:xfrm>
+          <a:prstGeom prst="rect">
+            <a:avLst/>
+          </a:prstGeom>
+        </p:spPr>
+      </p:pic>
+      <p:sp>
+        <p:nvSpPr>
+          <p:cNvPr id="5" name="TextBox 4"/>
+          <p:cNvSpPr txBox="1"/>
+          <p:nvPr/>
+        </p:nvSpPr>
+        <p:spPr>
+          <a:xfrm>
+            <a:off x="548640" y="6355080"/>
+            <a:ext cx="11064240" cy="320040"/>
+          </a:xfrm>
+          <a:prstGeom prst="rect">
+            <a:avLst/>
+          </a:prstGeom>
+          <a:noFill/>
+        </p:spPr>
+        <p:txBody>
+          <a:bodyPr wrap="square">
+            <a:noAutofit/>
+          </a:bodyPr>
+          <a:lstStyle/>
+          <a:p>
+            <a:pPr algn="r">
+              <a:lnSpc>
+                <a:spcPts val="2200"/>
+              </a:lnSpc>
+              <a:defRPr sz="1000" b="0">
+                <a:solidFill>
+                  <a:srgbClr val="666666"/>
+                </a:solidFill>
+                <a:latin typeface="Calibri"/>
+              </a:defRPr>
+            </a:pPr>
+            <a:r>
+              <a:t>learn_verilog_systemverilog / Module 2</a:t>
+            </a:r>
+          </a:p>
+        </p:txBody>
+      </p:sp>
+    </p:spTree>
+  </p:cSld>
+  <p:clrMapOvr>
+    <a:masterClrMapping/>
+  </p:clrMapOvr>
+</p:sld>
+</file>
+
+<file path=ppt/slides/slide35.xml><?xml version="1.0" encoding="utf-8"?>
+<p:sld xmlns:a="http://schemas.openxmlformats.org/drawingml/2006/main" xmlns:p="http://schemas.openxmlformats.org/presentationml/2006/main" xmlns:r="http://schemas.openxmlformats.org/officeDocument/2006/relationships">
+  <p:cSld>
+    <p:spTree>
+      <p:nvGrpSpPr>
+        <p:cNvPr id="1" name=""/>
+        <p:cNvGrpSpPr/>
+        <p:nvPr/>
+      </p:nvGrpSpPr>
+      <p:grpSpPr/>
+      <p:sp>
+        <p:nvSpPr>
+          <p:cNvPr id="2" name="TextBox 1"/>
+          <p:cNvSpPr txBox="1"/>
+          <p:nvPr/>
+        </p:nvSpPr>
+        <p:spPr>
+          <a:xfrm>
+            <a:off x="548640" y="411480"/>
+            <a:ext cx="11064240" cy="777240"/>
+          </a:xfrm>
+          <a:prstGeom prst="rect">
+            <a:avLst/>
+          </a:prstGeom>
+          <a:noFill/>
+        </p:spPr>
+        <p:txBody>
+          <a:bodyPr wrap="square">
+            <a:noAutofit/>
+          </a:bodyPr>
+          <a:lstStyle/>
+          <a:p>
+            <a:pPr>
+              <a:lnSpc>
+                <a:spcPts val="2200"/>
+              </a:lnSpc>
+              <a:defRPr sz="2800" b="1">
+                <a:solidFill>
+                  <a:srgbClr val="1A1A2E"/>
+                </a:solidFill>
+                <a:latin typeface="Calibri"/>
+              </a:defRPr>
+            </a:pPr>
+            <a:r>
+              <a:t>Example 8: Decoder</a:t>
+            </a:r>
+          </a:p>
+        </p:txBody>
+      </p:sp>
+      <p:sp>
+        <p:nvSpPr>
+          <p:cNvPr id="3" name="TextBox 2"/>
+          <p:cNvSpPr txBox="1"/>
+          <p:nvPr/>
+        </p:nvSpPr>
+        <p:spPr>
+          <a:xfrm>
+            <a:off x="548640" y="1234440"/>
+            <a:ext cx="11064240" cy="4937760"/>
+          </a:xfrm>
+          <a:prstGeom prst="rect">
+            <a:avLst/>
+          </a:prstGeom>
+          <a:noFill/>
+        </p:spPr>
+        <p:txBody>
+          <a:bodyPr wrap="square">
+            <a:noAutofit/>
+          </a:bodyPr>
+          <a:lstStyle/>
+          <a:p>
+            <a:pPr>
+              <a:lnSpc>
+                <a:spcPts val="2200"/>
+              </a:lnSpc>
+              <a:spcAft>
                 <a:spcPts val="1000"/>
               </a:spcAft>
               <a:defRPr sz="2000" b="0">
@@ -9808,7 +11871,7 @@
               </a:defRPr>
             </a:pPr>
             <a:r>
-              <a:t>• Master the major Verilog update (IEEE 1364-2001) and</a:t>
+              <a:t>• 2:4 decoder with ANSI ports and always @* (case)</a:t>
             </a:r>
           </a:p>
           <a:p>
@@ -9827,9 +11890,292 @@
               </a:defRPr>
             </a:pPr>
             <a:r>
-              <a:t>      its additions over 1364-1995: ANSI ports, impl…</a:t>
-            </a:r>
-          </a:p>
+              <a:t>• Combinational case; one-hot output</a:t>
+            </a:r>
+          </a:p>
+        </p:txBody>
+      </p:sp>
+      <p:sp>
+        <p:nvSpPr>
+          <p:cNvPr id="4" name="TextBox 3"/>
+          <p:cNvSpPr txBox="1"/>
+          <p:nvPr/>
+        </p:nvSpPr>
+        <p:spPr>
+          <a:xfrm>
+            <a:off x="548640" y="6355080"/>
+            <a:ext cx="11064240" cy="320040"/>
+          </a:xfrm>
+          <a:prstGeom prst="rect">
+            <a:avLst/>
+          </a:prstGeom>
+          <a:noFill/>
+        </p:spPr>
+        <p:txBody>
+          <a:bodyPr wrap="square">
+            <a:noAutofit/>
+          </a:bodyPr>
+          <a:lstStyle/>
+          <a:p>
+            <a:pPr algn="r">
+              <a:lnSpc>
+                <a:spcPts val="2200"/>
+              </a:lnSpc>
+              <a:defRPr sz="1000" b="0">
+                <a:solidFill>
+                  <a:srgbClr val="666666"/>
+                </a:solidFill>
+                <a:latin typeface="Calibri"/>
+              </a:defRPr>
+            </a:pPr>
+            <a:r>
+              <a:t>learn_verilog_systemverilog / Module 2</a:t>
+            </a:r>
+          </a:p>
+        </p:txBody>
+      </p:sp>
+    </p:spTree>
+  </p:cSld>
+  <p:clrMapOvr>
+    <a:masterClrMapping/>
+  </p:clrMapOvr>
+</p:sld>
+</file>
+
+<file path=ppt/slides/slide36.xml><?xml version="1.0" encoding="utf-8"?>
+<p:sld xmlns:a="http://schemas.openxmlformats.org/drawingml/2006/main" xmlns:p="http://schemas.openxmlformats.org/presentationml/2006/main" xmlns:r="http://schemas.openxmlformats.org/officeDocument/2006/relationships">
+  <p:cSld>
+    <p:spTree>
+      <p:nvGrpSpPr>
+        <p:cNvPr id="1" name=""/>
+        <p:cNvGrpSpPr/>
+        <p:nvPr/>
+      </p:nvGrpSpPr>
+      <p:grpSpPr/>
+      <p:sp>
+        <p:nvSpPr>
+          <p:cNvPr id="2" name="TextBox 1"/>
+          <p:cNvSpPr txBox="1"/>
+          <p:nvPr/>
+        </p:nvSpPr>
+        <p:spPr>
+          <a:xfrm>
+            <a:off x="548640" y="411480"/>
+            <a:ext cx="11064240" cy="777240"/>
+          </a:xfrm>
+          <a:prstGeom prst="rect">
+            <a:avLst/>
+          </a:prstGeom>
+          <a:noFill/>
+        </p:spPr>
+        <p:txBody>
+          <a:bodyPr wrap="square">
+            <a:noAutofit/>
+          </a:bodyPr>
+          <a:lstStyle/>
+          <a:p>
+            <a:pPr>
+              <a:lnSpc>
+                <a:spcPts val="2200"/>
+              </a:lnSpc>
+              <a:defRPr sz="2800" b="1">
+                <a:solidFill>
+                  <a:srgbClr val="1A1A2E"/>
+                </a:solidFill>
+                <a:latin typeface="Calibri"/>
+              </a:defRPr>
+            </a:pPr>
+            <a:r>
+              <a:t>Demo: Decoder</a:t>
+            </a:r>
+          </a:p>
+        </p:txBody>
+      </p:sp>
+      <p:sp>
+        <p:nvSpPr>
+          <p:cNvPr id="3" name="TextBox 2"/>
+          <p:cNvSpPr txBox="1"/>
+          <p:nvPr/>
+        </p:nvSpPr>
+        <p:spPr>
+          <a:xfrm>
+            <a:off x="548640" y="1051560"/>
+            <a:ext cx="11064240" cy="914400"/>
+          </a:xfrm>
+          <a:prstGeom prst="rect">
+            <a:avLst/>
+          </a:prstGeom>
+          <a:solidFill>
+            <a:srgbClr val="F4F4F4"/>
+          </a:solidFill>
+        </p:spPr>
+        <p:txBody>
+          <a:bodyPr wrap="square">
+            <a:noAutofit/>
+          </a:bodyPr>
+          <a:lstStyle/>
+          <a:p>
+            <a:pPr>
+              <a:lnSpc>
+                <a:spcPts val="2200"/>
+              </a:lnSpc>
+              <a:spcAft>
+                <a:spcPts val="200"/>
+              </a:spcAft>
+              <a:defRPr sz="2000" b="0">
+                <a:solidFill>
+                  <a:srgbClr val="333333"/>
+                </a:solidFill>
+                <a:latin typeface="Consolas"/>
+              </a:defRPr>
+            </a:pPr>
+            <a:r>
+              <a:t>$ cd module2/examples/decoder &amp;&amp; make clean &amp;&amp; make run</a:t>
+            </a:r>
+          </a:p>
+        </p:txBody>
+      </p:sp>
+      <p:pic>
+        <p:nvPicPr>
+          <p:cNvPr id="4" name="Picture 3" descr="ex08_decoder.png"/>
+          <p:cNvPicPr>
+            <a:picLocks noChangeAspect="1"/>
+          </p:cNvPicPr>
+          <p:nvPr/>
+        </p:nvPicPr>
+        <p:blipFill>
+          <a:blip r:embed="rId2"/>
+          <a:stretch>
+            <a:fillRect/>
+          </a:stretch>
+        </p:blipFill>
+        <p:spPr>
+          <a:xfrm>
+            <a:off x="548640" y="1965960"/>
+            <a:ext cx="7071358" cy="3977639"/>
+          </a:xfrm>
+          <a:prstGeom prst="rect">
+            <a:avLst/>
+          </a:prstGeom>
+        </p:spPr>
+      </p:pic>
+      <p:sp>
+        <p:nvSpPr>
+          <p:cNvPr id="5" name="TextBox 4"/>
+          <p:cNvSpPr txBox="1"/>
+          <p:nvPr/>
+        </p:nvSpPr>
+        <p:spPr>
+          <a:xfrm>
+            <a:off x="548640" y="6355080"/>
+            <a:ext cx="11064240" cy="320040"/>
+          </a:xfrm>
+          <a:prstGeom prst="rect">
+            <a:avLst/>
+          </a:prstGeom>
+          <a:noFill/>
+        </p:spPr>
+        <p:txBody>
+          <a:bodyPr wrap="square">
+            <a:noAutofit/>
+          </a:bodyPr>
+          <a:lstStyle/>
+          <a:p>
+            <a:pPr algn="r">
+              <a:lnSpc>
+                <a:spcPts val="2200"/>
+              </a:lnSpc>
+              <a:defRPr sz="1000" b="0">
+                <a:solidFill>
+                  <a:srgbClr val="666666"/>
+                </a:solidFill>
+                <a:latin typeface="Calibri"/>
+              </a:defRPr>
+            </a:pPr>
+            <a:r>
+              <a:t>learn_verilog_systemverilog / Module 2</a:t>
+            </a:r>
+          </a:p>
+        </p:txBody>
+      </p:sp>
+    </p:spTree>
+  </p:cSld>
+  <p:clrMapOvr>
+    <a:masterClrMapping/>
+  </p:clrMapOvr>
+</p:sld>
+</file>
+
+<file path=ppt/slides/slide37.xml><?xml version="1.0" encoding="utf-8"?>
+<p:sld xmlns:a="http://schemas.openxmlformats.org/drawingml/2006/main" xmlns:p="http://schemas.openxmlformats.org/presentationml/2006/main" xmlns:r="http://schemas.openxmlformats.org/officeDocument/2006/relationships">
+  <p:cSld>
+    <p:spTree>
+      <p:nvGrpSpPr>
+        <p:cNvPr id="1" name=""/>
+        <p:cNvGrpSpPr/>
+        <p:nvPr/>
+      </p:nvGrpSpPr>
+      <p:grpSpPr/>
+      <p:sp>
+        <p:nvSpPr>
+          <p:cNvPr id="2" name="TextBox 1"/>
+          <p:cNvSpPr txBox="1"/>
+          <p:nvPr/>
+        </p:nvSpPr>
+        <p:spPr>
+          <a:xfrm>
+            <a:off x="548640" y="411480"/>
+            <a:ext cx="11064240" cy="777240"/>
+          </a:xfrm>
+          <a:prstGeom prst="rect">
+            <a:avLst/>
+          </a:prstGeom>
+          <a:noFill/>
+        </p:spPr>
+        <p:txBody>
+          <a:bodyPr wrap="square">
+            <a:noAutofit/>
+          </a:bodyPr>
+          <a:lstStyle/>
+          <a:p>
+            <a:pPr>
+              <a:lnSpc>
+                <a:spcPts val="2200"/>
+              </a:lnSpc>
+              <a:defRPr sz="2800" b="1">
+                <a:solidFill>
+                  <a:srgbClr val="1A1A2E"/>
+                </a:solidFill>
+                <a:latin typeface="Calibri"/>
+              </a:defRPr>
+            </a:pPr>
+            <a:r>
+              <a:t>Example 9: Multi-Dimensional Arrays</a:t>
+            </a:r>
+          </a:p>
+        </p:txBody>
+      </p:sp>
+      <p:sp>
+        <p:nvSpPr>
+          <p:cNvPr id="3" name="TextBox 2"/>
+          <p:cNvSpPr txBox="1"/>
+          <p:nvPr/>
+        </p:nvSpPr>
+        <p:spPr>
+          <a:xfrm>
+            <a:off x="548640" y="1234440"/>
+            <a:ext cx="11064240" cy="4937760"/>
+          </a:xfrm>
+          <a:prstGeom prst="rect">
+            <a:avLst/>
+          </a:prstGeom>
+          <a:noFill/>
+        </p:spPr>
+        <p:txBody>
+          <a:bodyPr wrap="square">
+            <a:noAutofit/>
+          </a:bodyPr>
+          <a:lstStyle/>
           <a:p>
             <a:pPr>
               <a:lnSpc>
@@ -9846,7 +12192,7 @@
               </a:defRPr>
             </a:pPr>
             <a:r>
-              <a:t>• Complete module2/CHECKLIST.md</a:t>
+              <a:t>• Memory-style arrays (reg [7:0] mem [0:255]),</a:t>
             </a:r>
           </a:p>
           <a:p>
@@ -9865,7 +12211,7 @@
               </a:defRPr>
             </a:pPr>
             <a:r>
-              <a:t>• Run ./scripts/module2.sh --check</a:t>
+              <a:t>      indexing</a:t>
             </a:r>
           </a:p>
           <a:p>
@@ -9884,7 +12230,328 @@
               </a:defRPr>
             </a:pPr>
             <a:r>
-              <a:t>• Next: Next module in course</a:t>
+              <a:t>• Packed vs unpacked; array indexing rules in 2001</a:t>
+            </a:r>
+          </a:p>
+        </p:txBody>
+      </p:sp>
+      <p:sp>
+        <p:nvSpPr>
+          <p:cNvPr id="4" name="TextBox 3"/>
+          <p:cNvSpPr txBox="1"/>
+          <p:nvPr/>
+        </p:nvSpPr>
+        <p:spPr>
+          <a:xfrm>
+            <a:off x="548640" y="6355080"/>
+            <a:ext cx="11064240" cy="320040"/>
+          </a:xfrm>
+          <a:prstGeom prst="rect">
+            <a:avLst/>
+          </a:prstGeom>
+          <a:noFill/>
+        </p:spPr>
+        <p:txBody>
+          <a:bodyPr wrap="square">
+            <a:noAutofit/>
+          </a:bodyPr>
+          <a:lstStyle/>
+          <a:p>
+            <a:pPr algn="r">
+              <a:lnSpc>
+                <a:spcPts val="2200"/>
+              </a:lnSpc>
+              <a:defRPr sz="1000" b="0">
+                <a:solidFill>
+                  <a:srgbClr val="666666"/>
+                </a:solidFill>
+                <a:latin typeface="Calibri"/>
+              </a:defRPr>
+            </a:pPr>
+            <a:r>
+              <a:t>learn_verilog_systemverilog / Module 2</a:t>
+            </a:r>
+          </a:p>
+        </p:txBody>
+      </p:sp>
+    </p:spTree>
+  </p:cSld>
+  <p:clrMapOvr>
+    <a:masterClrMapping/>
+  </p:clrMapOvr>
+</p:sld>
+</file>
+
+<file path=ppt/slides/slide38.xml><?xml version="1.0" encoding="utf-8"?>
+<p:sld xmlns:a="http://schemas.openxmlformats.org/drawingml/2006/main" xmlns:p="http://schemas.openxmlformats.org/presentationml/2006/main" xmlns:r="http://schemas.openxmlformats.org/officeDocument/2006/relationships">
+  <p:cSld>
+    <p:spTree>
+      <p:nvGrpSpPr>
+        <p:cNvPr id="1" name=""/>
+        <p:cNvGrpSpPr/>
+        <p:nvPr/>
+      </p:nvGrpSpPr>
+      <p:grpSpPr/>
+      <p:sp>
+        <p:nvSpPr>
+          <p:cNvPr id="2" name="TextBox 1"/>
+          <p:cNvSpPr txBox="1"/>
+          <p:nvPr/>
+        </p:nvSpPr>
+        <p:spPr>
+          <a:xfrm>
+            <a:off x="548640" y="411480"/>
+            <a:ext cx="11064240" cy="777240"/>
+          </a:xfrm>
+          <a:prstGeom prst="rect">
+            <a:avLst/>
+          </a:prstGeom>
+          <a:noFill/>
+        </p:spPr>
+        <p:txBody>
+          <a:bodyPr wrap="square">
+            <a:noAutofit/>
+          </a:bodyPr>
+          <a:lstStyle/>
+          <a:p>
+            <a:pPr>
+              <a:lnSpc>
+                <a:spcPts val="2200"/>
+              </a:lnSpc>
+              <a:defRPr sz="2800" b="1">
+                <a:solidFill>
+                  <a:srgbClr val="1A1A2E"/>
+                </a:solidFill>
+                <a:latin typeface="Calibri"/>
+              </a:defRPr>
+            </a:pPr>
+            <a:r>
+              <a:t>Demo: Multi-Dimensional Arrays</a:t>
+            </a:r>
+          </a:p>
+        </p:txBody>
+      </p:sp>
+      <p:sp>
+        <p:nvSpPr>
+          <p:cNvPr id="3" name="TextBox 2"/>
+          <p:cNvSpPr txBox="1"/>
+          <p:nvPr/>
+        </p:nvSpPr>
+        <p:spPr>
+          <a:xfrm>
+            <a:off x="548640" y="1051560"/>
+            <a:ext cx="11064240" cy="914400"/>
+          </a:xfrm>
+          <a:prstGeom prst="rect">
+            <a:avLst/>
+          </a:prstGeom>
+          <a:solidFill>
+            <a:srgbClr val="F4F4F4"/>
+          </a:solidFill>
+        </p:spPr>
+        <p:txBody>
+          <a:bodyPr wrap="square">
+            <a:noAutofit/>
+          </a:bodyPr>
+          <a:lstStyle/>
+          <a:p>
+            <a:pPr>
+              <a:lnSpc>
+                <a:spcPts val="2200"/>
+              </a:lnSpc>
+              <a:spcAft>
+                <a:spcPts val="200"/>
+              </a:spcAft>
+              <a:defRPr sz="2000" b="0">
+                <a:solidFill>
+                  <a:srgbClr val="333333"/>
+                </a:solidFill>
+                <a:latin typeface="Consolas"/>
+              </a:defRPr>
+            </a:pPr>
+            <a:r>
+              <a:t>$ cd module2/examples/arrays &amp;&amp; make clean &amp;&amp; make run</a:t>
+            </a:r>
+          </a:p>
+        </p:txBody>
+      </p:sp>
+      <p:pic>
+        <p:nvPicPr>
+          <p:cNvPr id="4" name="Picture 3" descr="ex09_arrays.png"/>
+          <p:cNvPicPr>
+            <a:picLocks noChangeAspect="1"/>
+          </p:cNvPicPr>
+          <p:nvPr/>
+        </p:nvPicPr>
+        <p:blipFill>
+          <a:blip r:embed="rId2"/>
+          <a:stretch>
+            <a:fillRect/>
+          </a:stretch>
+        </p:blipFill>
+        <p:spPr>
+          <a:xfrm>
+            <a:off x="548640" y="1965960"/>
+            <a:ext cx="7071358" cy="3977639"/>
+          </a:xfrm>
+          <a:prstGeom prst="rect">
+            <a:avLst/>
+          </a:prstGeom>
+        </p:spPr>
+      </p:pic>
+      <p:sp>
+        <p:nvSpPr>
+          <p:cNvPr id="5" name="TextBox 4"/>
+          <p:cNvSpPr txBox="1"/>
+          <p:nvPr/>
+        </p:nvSpPr>
+        <p:spPr>
+          <a:xfrm>
+            <a:off x="548640" y="6355080"/>
+            <a:ext cx="11064240" cy="320040"/>
+          </a:xfrm>
+          <a:prstGeom prst="rect">
+            <a:avLst/>
+          </a:prstGeom>
+          <a:noFill/>
+        </p:spPr>
+        <p:txBody>
+          <a:bodyPr wrap="square">
+            <a:noAutofit/>
+          </a:bodyPr>
+          <a:lstStyle/>
+          <a:p>
+            <a:pPr algn="r">
+              <a:lnSpc>
+                <a:spcPts val="2200"/>
+              </a:lnSpc>
+              <a:defRPr sz="1000" b="0">
+                <a:solidFill>
+                  <a:srgbClr val="666666"/>
+                </a:solidFill>
+                <a:latin typeface="Calibri"/>
+              </a:defRPr>
+            </a:pPr>
+            <a:r>
+              <a:t>learn_verilog_systemverilog / Module 2</a:t>
+            </a:r>
+          </a:p>
+        </p:txBody>
+      </p:sp>
+    </p:spTree>
+  </p:cSld>
+  <p:clrMapOvr>
+    <a:masterClrMapping/>
+  </p:clrMapOvr>
+</p:sld>
+</file>
+
+<file path=ppt/slides/slide39.xml><?xml version="1.0" encoding="utf-8"?>
+<p:sld xmlns:a="http://schemas.openxmlformats.org/drawingml/2006/main" xmlns:p="http://schemas.openxmlformats.org/presentationml/2006/main" xmlns:r="http://schemas.openxmlformats.org/officeDocument/2006/relationships">
+  <p:cSld>
+    <p:spTree>
+      <p:nvGrpSpPr>
+        <p:cNvPr id="1" name=""/>
+        <p:cNvGrpSpPr/>
+        <p:nvPr/>
+      </p:nvGrpSpPr>
+      <p:grpSpPr/>
+      <p:sp>
+        <p:nvSpPr>
+          <p:cNvPr id="2" name="TextBox 1"/>
+          <p:cNvSpPr txBox="1"/>
+          <p:nvPr/>
+        </p:nvSpPr>
+        <p:spPr>
+          <a:xfrm>
+            <a:off x="548640" y="411480"/>
+            <a:ext cx="11064240" cy="777240"/>
+          </a:xfrm>
+          <a:prstGeom prst="rect">
+            <a:avLst/>
+          </a:prstGeom>
+          <a:noFill/>
+        </p:spPr>
+        <p:txBody>
+          <a:bodyPr wrap="square">
+            <a:noAutofit/>
+          </a:bodyPr>
+          <a:lstStyle/>
+          <a:p>
+            <a:pPr>
+              <a:lnSpc>
+                <a:spcPts val="2200"/>
+              </a:lnSpc>
+              <a:defRPr sz="2800" b="1">
+                <a:solidFill>
+                  <a:srgbClr val="1A1A2E"/>
+                </a:solidFill>
+                <a:latin typeface="Calibri"/>
+              </a:defRPr>
+            </a:pPr>
+            <a:r>
+              <a:t>Example 10: Multi-Dim Style</a:t>
+            </a:r>
+          </a:p>
+        </p:txBody>
+      </p:sp>
+      <p:sp>
+        <p:nvSpPr>
+          <p:cNvPr id="3" name="TextBox 2"/>
+          <p:cNvSpPr txBox="1"/>
+          <p:nvPr/>
+        </p:nvSpPr>
+        <p:spPr>
+          <a:xfrm>
+            <a:off x="548640" y="1234440"/>
+            <a:ext cx="11064240" cy="4937760"/>
+          </a:xfrm>
+          <a:prstGeom prst="rect">
+            <a:avLst/>
+          </a:prstGeom>
+          <a:noFill/>
+        </p:spPr>
+        <p:txBody>
+          <a:bodyPr wrap="square">
+            <a:noAutofit/>
+          </a:bodyPr>
+          <a:lstStyle/>
+          <a:p>
+            <a:pPr>
+              <a:lnSpc>
+                <a:spcPts val="2200"/>
+              </a:lnSpc>
+              <a:spcAft>
+                <a:spcPts val="1000"/>
+              </a:spcAft>
+              <a:defRPr sz="2000" b="0">
+                <a:solidFill>
+                  <a:srgbClr val="333333"/>
+                </a:solidFill>
+                <a:latin typeface="Calibri"/>
+              </a:defRPr>
+            </a:pPr>
+            <a:r>
+              <a:t>• 2x4 buffer using 1D array indexed as row*4+col</a:t>
+            </a:r>
+          </a:p>
+          <a:p>
+            <a:pPr>
+              <a:lnSpc>
+                <a:spcPts val="2200"/>
+              </a:lnSpc>
+              <a:spcAft>
+                <a:spcPts val="1000"/>
+              </a:spcAft>
+              <a:defRPr sz="2000" b="0">
+                <a:solidFill>
+                  <a:srgbClr val="333333"/>
+                </a:solidFill>
+                <a:latin typeface="Calibri"/>
+              </a:defRPr>
+            </a:pPr>
+            <a:r>
+              <a:t>• Emulating 2D with 1D array; index expression</a:t>
             </a:r>
           </a:p>
         </p:txBody>
@@ -10095,6 +12762,1771 @@
 </p:sld>
 </file>
 
+<file path=ppt/slides/slide40.xml><?xml version="1.0" encoding="utf-8"?>
+<p:sld xmlns:a="http://schemas.openxmlformats.org/drawingml/2006/main" xmlns:p="http://schemas.openxmlformats.org/presentationml/2006/main" xmlns:r="http://schemas.openxmlformats.org/officeDocument/2006/relationships">
+  <p:cSld>
+    <p:spTree>
+      <p:nvGrpSpPr>
+        <p:cNvPr id="1" name=""/>
+        <p:cNvGrpSpPr/>
+        <p:nvPr/>
+      </p:nvGrpSpPr>
+      <p:grpSpPr/>
+      <p:sp>
+        <p:nvSpPr>
+          <p:cNvPr id="2" name="TextBox 1"/>
+          <p:cNvSpPr txBox="1"/>
+          <p:nvPr/>
+        </p:nvSpPr>
+        <p:spPr>
+          <a:xfrm>
+            <a:off x="548640" y="411480"/>
+            <a:ext cx="11064240" cy="777240"/>
+          </a:xfrm>
+          <a:prstGeom prst="rect">
+            <a:avLst/>
+          </a:prstGeom>
+          <a:noFill/>
+        </p:spPr>
+        <p:txBody>
+          <a:bodyPr wrap="square">
+            <a:noAutofit/>
+          </a:bodyPr>
+          <a:lstStyle/>
+          <a:p>
+            <a:pPr>
+              <a:lnSpc>
+                <a:spcPts val="2200"/>
+              </a:lnSpc>
+              <a:defRPr sz="2800" b="1">
+                <a:solidFill>
+                  <a:srgbClr val="1A1A2E"/>
+                </a:solidFill>
+                <a:latin typeface="Calibri"/>
+              </a:defRPr>
+            </a:pPr>
+            <a:r>
+              <a:t>Demo: Multi-Dim Style</a:t>
+            </a:r>
+          </a:p>
+        </p:txBody>
+      </p:sp>
+      <p:sp>
+        <p:nvSpPr>
+          <p:cNvPr id="3" name="TextBox 2"/>
+          <p:cNvSpPr txBox="1"/>
+          <p:nvPr/>
+        </p:nvSpPr>
+        <p:spPr>
+          <a:xfrm>
+            <a:off x="548640" y="1051560"/>
+            <a:ext cx="11064240" cy="914400"/>
+          </a:xfrm>
+          <a:prstGeom prst="rect">
+            <a:avLst/>
+          </a:prstGeom>
+          <a:solidFill>
+            <a:srgbClr val="F4F4F4"/>
+          </a:solidFill>
+        </p:spPr>
+        <p:txBody>
+          <a:bodyPr wrap="square">
+            <a:noAutofit/>
+          </a:bodyPr>
+          <a:lstStyle/>
+          <a:p>
+            <a:pPr>
+              <a:lnSpc>
+                <a:spcPts val="2200"/>
+              </a:lnSpc>
+              <a:spcAft>
+                <a:spcPts val="200"/>
+              </a:spcAft>
+              <a:defRPr sz="2000" b="0">
+                <a:solidFill>
+                  <a:srgbClr val="333333"/>
+                </a:solidFill>
+                <a:latin typeface="Consolas"/>
+              </a:defRPr>
+            </a:pPr>
+            <a:r>
+              <a:t>$ cd module2/examples/multi_dim_arrays &amp;&amp; make clean &amp;&amp; make run</a:t>
+            </a:r>
+          </a:p>
+        </p:txBody>
+      </p:sp>
+      <p:pic>
+        <p:nvPicPr>
+          <p:cNvPr id="4" name="Picture 3" descr="ex10_multi_dim_arrays.png"/>
+          <p:cNvPicPr>
+            <a:picLocks noChangeAspect="1"/>
+          </p:cNvPicPr>
+          <p:nvPr/>
+        </p:nvPicPr>
+        <p:blipFill>
+          <a:blip r:embed="rId2"/>
+          <a:stretch>
+            <a:fillRect/>
+          </a:stretch>
+        </p:blipFill>
+        <p:spPr>
+          <a:xfrm>
+            <a:off x="548640" y="1965960"/>
+            <a:ext cx="7071358" cy="3977639"/>
+          </a:xfrm>
+          <a:prstGeom prst="rect">
+            <a:avLst/>
+          </a:prstGeom>
+        </p:spPr>
+      </p:pic>
+      <p:sp>
+        <p:nvSpPr>
+          <p:cNvPr id="5" name="TextBox 4"/>
+          <p:cNvSpPr txBox="1"/>
+          <p:nvPr/>
+        </p:nvSpPr>
+        <p:spPr>
+          <a:xfrm>
+            <a:off x="548640" y="6355080"/>
+            <a:ext cx="11064240" cy="320040"/>
+          </a:xfrm>
+          <a:prstGeom prst="rect">
+            <a:avLst/>
+          </a:prstGeom>
+          <a:noFill/>
+        </p:spPr>
+        <p:txBody>
+          <a:bodyPr wrap="square">
+            <a:noAutofit/>
+          </a:bodyPr>
+          <a:lstStyle/>
+          <a:p>
+            <a:pPr algn="r">
+              <a:lnSpc>
+                <a:spcPts val="2200"/>
+              </a:lnSpc>
+              <a:defRPr sz="1000" b="0">
+                <a:solidFill>
+                  <a:srgbClr val="666666"/>
+                </a:solidFill>
+                <a:latin typeface="Calibri"/>
+              </a:defRPr>
+            </a:pPr>
+            <a:r>
+              <a:t>learn_verilog_systemverilog / Module 2</a:t>
+            </a:r>
+          </a:p>
+        </p:txBody>
+      </p:sp>
+    </p:spTree>
+  </p:cSld>
+  <p:clrMapOvr>
+    <a:masterClrMapping/>
+  </p:clrMapOvr>
+</p:sld>
+</file>
+
+<file path=ppt/slides/slide41.xml><?xml version="1.0" encoding="utf-8"?>
+<p:sld xmlns:a="http://schemas.openxmlformats.org/drawingml/2006/main" xmlns:p="http://schemas.openxmlformats.org/presentationml/2006/main" xmlns:r="http://schemas.openxmlformats.org/officeDocument/2006/relationships">
+  <p:cSld>
+    <p:spTree>
+      <p:nvGrpSpPr>
+        <p:cNvPr id="1" name=""/>
+        <p:cNvGrpSpPr/>
+        <p:nvPr/>
+      </p:nvGrpSpPr>
+      <p:grpSpPr/>
+      <p:sp>
+        <p:nvSpPr>
+          <p:cNvPr id="2" name="TextBox 1"/>
+          <p:cNvSpPr txBox="1"/>
+          <p:nvPr/>
+        </p:nvSpPr>
+        <p:spPr>
+          <a:xfrm>
+            <a:off x="548640" y="411480"/>
+            <a:ext cx="11064240" cy="777240"/>
+          </a:xfrm>
+          <a:prstGeom prst="rect">
+            <a:avLst/>
+          </a:prstGeom>
+          <a:noFill/>
+        </p:spPr>
+        <p:txBody>
+          <a:bodyPr wrap="square">
+            <a:noAutofit/>
+          </a:bodyPr>
+          <a:lstStyle/>
+          <a:p>
+            <a:pPr>
+              <a:lnSpc>
+                <a:spcPts val="2200"/>
+              </a:lnSpc>
+              <a:defRPr sz="2800" b="1">
+                <a:solidFill>
+                  <a:srgbClr val="1A1A2E"/>
+                </a:solidFill>
+                <a:latin typeface="Calibri"/>
+              </a:defRPr>
+            </a:pPr>
+            <a:r>
+              <a:t>Example 11: Parameters and localparam</a:t>
+            </a:r>
+          </a:p>
+        </p:txBody>
+      </p:sp>
+      <p:sp>
+        <p:nvSpPr>
+          <p:cNvPr id="3" name="TextBox 2"/>
+          <p:cNvSpPr txBox="1"/>
+          <p:nvPr/>
+        </p:nvSpPr>
+        <p:spPr>
+          <a:xfrm>
+            <a:off x="548640" y="1234440"/>
+            <a:ext cx="11064240" cy="4937760"/>
+          </a:xfrm>
+          <a:prstGeom prst="rect">
+            <a:avLst/>
+          </a:prstGeom>
+          <a:noFill/>
+        </p:spPr>
+        <p:txBody>
+          <a:bodyPr wrap="square">
+            <a:noAutofit/>
+          </a:bodyPr>
+          <a:lstStyle/>
+          <a:p>
+            <a:pPr>
+              <a:lnSpc>
+                <a:spcPts val="2200"/>
+              </a:lnSpc>
+              <a:spcAft>
+                <a:spcPts val="1000"/>
+              </a:spcAft>
+              <a:defRPr sz="2000" b="0">
+                <a:solidFill>
+                  <a:srgbClr val="333333"/>
+                </a:solidFill>
+                <a:latin typeface="Calibri"/>
+              </a:defRPr>
+            </a:pPr>
+            <a:r>
+              <a:t>• Parameter override, localparam for derived constants</a:t>
+            </a:r>
+          </a:p>
+          <a:p>
+            <a:pPr>
+              <a:lnSpc>
+                <a:spcPts val="2200"/>
+              </a:lnSpc>
+              <a:spcAft>
+                <a:spcPts val="1000"/>
+              </a:spcAft>
+              <a:defRPr sz="2000" b="0">
+                <a:solidFill>
+                  <a:srgbClr val="333333"/>
+                </a:solidFill>
+                <a:latin typeface="Calibri"/>
+              </a:defRPr>
+            </a:pPr>
+            <a:r>
+              <a:t>• When to use parameter vs localparam</a:t>
+            </a:r>
+          </a:p>
+        </p:txBody>
+      </p:sp>
+      <p:sp>
+        <p:nvSpPr>
+          <p:cNvPr id="4" name="TextBox 3"/>
+          <p:cNvSpPr txBox="1"/>
+          <p:nvPr/>
+        </p:nvSpPr>
+        <p:spPr>
+          <a:xfrm>
+            <a:off x="548640" y="6355080"/>
+            <a:ext cx="11064240" cy="320040"/>
+          </a:xfrm>
+          <a:prstGeom prst="rect">
+            <a:avLst/>
+          </a:prstGeom>
+          <a:noFill/>
+        </p:spPr>
+        <p:txBody>
+          <a:bodyPr wrap="square">
+            <a:noAutofit/>
+          </a:bodyPr>
+          <a:lstStyle/>
+          <a:p>
+            <a:pPr algn="r">
+              <a:lnSpc>
+                <a:spcPts val="2200"/>
+              </a:lnSpc>
+              <a:defRPr sz="1000" b="0">
+                <a:solidFill>
+                  <a:srgbClr val="666666"/>
+                </a:solidFill>
+                <a:latin typeface="Calibri"/>
+              </a:defRPr>
+            </a:pPr>
+            <a:r>
+              <a:t>learn_verilog_systemverilog / Module 2</a:t>
+            </a:r>
+          </a:p>
+        </p:txBody>
+      </p:sp>
+    </p:spTree>
+  </p:cSld>
+  <p:clrMapOvr>
+    <a:masterClrMapping/>
+  </p:clrMapOvr>
+</p:sld>
+</file>
+
+<file path=ppt/slides/slide42.xml><?xml version="1.0" encoding="utf-8"?>
+<p:sld xmlns:a="http://schemas.openxmlformats.org/drawingml/2006/main" xmlns:p="http://schemas.openxmlformats.org/presentationml/2006/main" xmlns:r="http://schemas.openxmlformats.org/officeDocument/2006/relationships">
+  <p:cSld>
+    <p:spTree>
+      <p:nvGrpSpPr>
+        <p:cNvPr id="1" name=""/>
+        <p:cNvGrpSpPr/>
+        <p:nvPr/>
+      </p:nvGrpSpPr>
+      <p:grpSpPr/>
+      <p:sp>
+        <p:nvSpPr>
+          <p:cNvPr id="2" name="TextBox 1"/>
+          <p:cNvSpPr txBox="1"/>
+          <p:nvPr/>
+        </p:nvSpPr>
+        <p:spPr>
+          <a:xfrm>
+            <a:off x="548640" y="411480"/>
+            <a:ext cx="11064240" cy="777240"/>
+          </a:xfrm>
+          <a:prstGeom prst="rect">
+            <a:avLst/>
+          </a:prstGeom>
+          <a:noFill/>
+        </p:spPr>
+        <p:txBody>
+          <a:bodyPr wrap="square">
+            <a:noAutofit/>
+          </a:bodyPr>
+          <a:lstStyle/>
+          <a:p>
+            <a:pPr>
+              <a:lnSpc>
+                <a:spcPts val="2200"/>
+              </a:lnSpc>
+              <a:defRPr sz="2800" b="1">
+                <a:solidFill>
+                  <a:srgbClr val="1A1A2E"/>
+                </a:solidFill>
+                <a:latin typeface="Calibri"/>
+              </a:defRPr>
+            </a:pPr>
+            <a:r>
+              <a:t>Demo: Parameters and localparam</a:t>
+            </a:r>
+          </a:p>
+        </p:txBody>
+      </p:sp>
+      <p:sp>
+        <p:nvSpPr>
+          <p:cNvPr id="3" name="TextBox 2"/>
+          <p:cNvSpPr txBox="1"/>
+          <p:nvPr/>
+        </p:nvSpPr>
+        <p:spPr>
+          <a:xfrm>
+            <a:off x="548640" y="1051560"/>
+            <a:ext cx="11064240" cy="914400"/>
+          </a:xfrm>
+          <a:prstGeom prst="rect">
+            <a:avLst/>
+          </a:prstGeom>
+          <a:solidFill>
+            <a:srgbClr val="F4F4F4"/>
+          </a:solidFill>
+        </p:spPr>
+        <p:txBody>
+          <a:bodyPr wrap="square">
+            <a:noAutofit/>
+          </a:bodyPr>
+          <a:lstStyle/>
+          <a:p>
+            <a:pPr>
+              <a:lnSpc>
+                <a:spcPts val="2200"/>
+              </a:lnSpc>
+              <a:spcAft>
+                <a:spcPts val="200"/>
+              </a:spcAft>
+              <a:defRPr sz="2000" b="0">
+                <a:solidFill>
+                  <a:srgbClr val="333333"/>
+                </a:solidFill>
+                <a:latin typeface="Consolas"/>
+              </a:defRPr>
+            </a:pPr>
+            <a:r>
+              <a:t>$ cd module2/examples/parameters &amp;&amp; make clean &amp;&amp; make run</a:t>
+            </a:r>
+          </a:p>
+        </p:txBody>
+      </p:sp>
+      <p:pic>
+        <p:nvPicPr>
+          <p:cNvPr id="4" name="Picture 3" descr="ex11_parameters.png"/>
+          <p:cNvPicPr>
+            <a:picLocks noChangeAspect="1"/>
+          </p:cNvPicPr>
+          <p:nvPr/>
+        </p:nvPicPr>
+        <p:blipFill>
+          <a:blip r:embed="rId2"/>
+          <a:stretch>
+            <a:fillRect/>
+          </a:stretch>
+        </p:blipFill>
+        <p:spPr>
+          <a:xfrm>
+            <a:off x="548640" y="1965960"/>
+            <a:ext cx="7071358" cy="3977639"/>
+          </a:xfrm>
+          <a:prstGeom prst="rect">
+            <a:avLst/>
+          </a:prstGeom>
+        </p:spPr>
+      </p:pic>
+      <p:sp>
+        <p:nvSpPr>
+          <p:cNvPr id="5" name="TextBox 4"/>
+          <p:cNvSpPr txBox="1"/>
+          <p:nvPr/>
+        </p:nvSpPr>
+        <p:spPr>
+          <a:xfrm>
+            <a:off x="548640" y="6355080"/>
+            <a:ext cx="11064240" cy="320040"/>
+          </a:xfrm>
+          <a:prstGeom prst="rect">
+            <a:avLst/>
+          </a:prstGeom>
+          <a:noFill/>
+        </p:spPr>
+        <p:txBody>
+          <a:bodyPr wrap="square">
+            <a:noAutofit/>
+          </a:bodyPr>
+          <a:lstStyle/>
+          <a:p>
+            <a:pPr algn="r">
+              <a:lnSpc>
+                <a:spcPts val="2200"/>
+              </a:lnSpc>
+              <a:defRPr sz="1000" b="0">
+                <a:solidFill>
+                  <a:srgbClr val="666666"/>
+                </a:solidFill>
+                <a:latin typeface="Calibri"/>
+              </a:defRPr>
+            </a:pPr>
+            <a:r>
+              <a:t>learn_verilog_systemverilog / Module 2</a:t>
+            </a:r>
+          </a:p>
+        </p:txBody>
+      </p:sp>
+    </p:spTree>
+  </p:cSld>
+  <p:clrMapOvr>
+    <a:masterClrMapping/>
+  </p:clrMapOvr>
+</p:sld>
+</file>
+
+<file path=ppt/slides/slide43.xml><?xml version="1.0" encoding="utf-8"?>
+<p:sld xmlns:a="http://schemas.openxmlformats.org/drawingml/2006/main" xmlns:p="http://schemas.openxmlformats.org/presentationml/2006/main" xmlns:r="http://schemas.openxmlformats.org/officeDocument/2006/relationships">
+  <p:cSld>
+    <p:spTree>
+      <p:nvGrpSpPr>
+        <p:cNvPr id="1" name=""/>
+        <p:cNvGrpSpPr/>
+        <p:nvPr/>
+      </p:nvGrpSpPr>
+      <p:grpSpPr/>
+      <p:sp>
+        <p:nvSpPr>
+          <p:cNvPr id="2" name="TextBox 1"/>
+          <p:cNvSpPr txBox="1"/>
+          <p:nvPr/>
+        </p:nvSpPr>
+        <p:spPr>
+          <a:xfrm>
+            <a:off x="548640" y="411480"/>
+            <a:ext cx="11064240" cy="777240"/>
+          </a:xfrm>
+          <a:prstGeom prst="rect">
+            <a:avLst/>
+          </a:prstGeom>
+          <a:noFill/>
+        </p:spPr>
+        <p:txBody>
+          <a:bodyPr wrap="square">
+            <a:noAutofit/>
+          </a:bodyPr>
+          <a:lstStyle/>
+          <a:p>
+            <a:pPr>
+              <a:lnSpc>
+                <a:spcPts val="2200"/>
+              </a:lnSpc>
+              <a:defRPr sz="2800" b="1">
+                <a:solidFill>
+                  <a:srgbClr val="1A1A2E"/>
+                </a:solidFill>
+                <a:latin typeface="Calibri"/>
+              </a:defRPr>
+            </a:pPr>
+            <a:r>
+              <a:t>Example 12: ANSI Task/Function</a:t>
+            </a:r>
+          </a:p>
+        </p:txBody>
+      </p:sp>
+      <p:sp>
+        <p:nvSpPr>
+          <p:cNvPr id="3" name="TextBox 2"/>
+          <p:cNvSpPr txBox="1"/>
+          <p:nvPr/>
+        </p:nvSpPr>
+        <p:spPr>
+          <a:xfrm>
+            <a:off x="548640" y="1234440"/>
+            <a:ext cx="11064240" cy="4937760"/>
+          </a:xfrm>
+          <a:prstGeom prst="rect">
+            <a:avLst/>
+          </a:prstGeom>
+          <a:noFill/>
+        </p:spPr>
+        <p:txBody>
+          <a:bodyPr wrap="square">
+            <a:noAutofit/>
+          </a:bodyPr>
+          <a:lstStyle/>
+          <a:p>
+            <a:pPr>
+              <a:lnSpc>
+                <a:spcPts val="2200"/>
+              </a:lnSpc>
+              <a:spcAft>
+                <a:spcPts val="1000"/>
+              </a:spcAft>
+              <a:defRPr sz="2000" b="0">
+                <a:solidFill>
+                  <a:srgbClr val="333333"/>
+                </a:solidFill>
+                <a:latin typeface="Calibri"/>
+              </a:defRPr>
+            </a:pPr>
+            <a:r>
+              <a:t>• Input/output in header, automatic functions</a:t>
+            </a:r>
+          </a:p>
+          <a:p>
+            <a:pPr>
+              <a:lnSpc>
+                <a:spcPts val="2200"/>
+              </a:lnSpc>
+              <a:spcAft>
+                <a:spcPts val="1000"/>
+              </a:spcAft>
+              <a:defRPr sz="2000" b="0">
+                <a:solidFill>
+                  <a:srgbClr val="333333"/>
+                </a:solidFill>
+                <a:latin typeface="Calibri"/>
+              </a:defRPr>
+            </a:pPr>
+            <a:r>
+              <a:t>• 2001 style vs 1995 style</a:t>
+            </a:r>
+          </a:p>
+        </p:txBody>
+      </p:sp>
+      <p:sp>
+        <p:nvSpPr>
+          <p:cNvPr id="4" name="TextBox 3"/>
+          <p:cNvSpPr txBox="1"/>
+          <p:nvPr/>
+        </p:nvSpPr>
+        <p:spPr>
+          <a:xfrm>
+            <a:off x="548640" y="6355080"/>
+            <a:ext cx="11064240" cy="320040"/>
+          </a:xfrm>
+          <a:prstGeom prst="rect">
+            <a:avLst/>
+          </a:prstGeom>
+          <a:noFill/>
+        </p:spPr>
+        <p:txBody>
+          <a:bodyPr wrap="square">
+            <a:noAutofit/>
+          </a:bodyPr>
+          <a:lstStyle/>
+          <a:p>
+            <a:pPr algn="r">
+              <a:lnSpc>
+                <a:spcPts val="2200"/>
+              </a:lnSpc>
+              <a:defRPr sz="1000" b="0">
+                <a:solidFill>
+                  <a:srgbClr val="666666"/>
+                </a:solidFill>
+                <a:latin typeface="Calibri"/>
+              </a:defRPr>
+            </a:pPr>
+            <a:r>
+              <a:t>learn_verilog_systemverilog / Module 2</a:t>
+            </a:r>
+          </a:p>
+        </p:txBody>
+      </p:sp>
+    </p:spTree>
+  </p:cSld>
+  <p:clrMapOvr>
+    <a:masterClrMapping/>
+  </p:clrMapOvr>
+</p:sld>
+</file>
+
+<file path=ppt/slides/slide44.xml><?xml version="1.0" encoding="utf-8"?>
+<p:sld xmlns:a="http://schemas.openxmlformats.org/drawingml/2006/main" xmlns:p="http://schemas.openxmlformats.org/presentationml/2006/main" xmlns:r="http://schemas.openxmlformats.org/officeDocument/2006/relationships">
+  <p:cSld>
+    <p:spTree>
+      <p:nvGrpSpPr>
+        <p:cNvPr id="1" name=""/>
+        <p:cNvGrpSpPr/>
+        <p:nvPr/>
+      </p:nvGrpSpPr>
+      <p:grpSpPr/>
+      <p:sp>
+        <p:nvSpPr>
+          <p:cNvPr id="2" name="TextBox 1"/>
+          <p:cNvSpPr txBox="1"/>
+          <p:nvPr/>
+        </p:nvSpPr>
+        <p:spPr>
+          <a:xfrm>
+            <a:off x="548640" y="411480"/>
+            <a:ext cx="11064240" cy="777240"/>
+          </a:xfrm>
+          <a:prstGeom prst="rect">
+            <a:avLst/>
+          </a:prstGeom>
+          <a:noFill/>
+        </p:spPr>
+        <p:txBody>
+          <a:bodyPr wrap="square">
+            <a:noAutofit/>
+          </a:bodyPr>
+          <a:lstStyle/>
+          <a:p>
+            <a:pPr>
+              <a:lnSpc>
+                <a:spcPts val="2200"/>
+              </a:lnSpc>
+              <a:defRPr sz="2800" b="1">
+                <a:solidFill>
+                  <a:srgbClr val="1A1A2E"/>
+                </a:solidFill>
+                <a:latin typeface="Calibri"/>
+              </a:defRPr>
+            </a:pPr>
+            <a:r>
+              <a:t>Demo: ANSI Task/Function</a:t>
+            </a:r>
+          </a:p>
+        </p:txBody>
+      </p:sp>
+      <p:sp>
+        <p:nvSpPr>
+          <p:cNvPr id="3" name="TextBox 2"/>
+          <p:cNvSpPr txBox="1"/>
+          <p:nvPr/>
+        </p:nvSpPr>
+        <p:spPr>
+          <a:xfrm>
+            <a:off x="548640" y="1051560"/>
+            <a:ext cx="11064240" cy="914400"/>
+          </a:xfrm>
+          <a:prstGeom prst="rect">
+            <a:avLst/>
+          </a:prstGeom>
+          <a:solidFill>
+            <a:srgbClr val="F4F4F4"/>
+          </a:solidFill>
+        </p:spPr>
+        <p:txBody>
+          <a:bodyPr wrap="square">
+            <a:noAutofit/>
+          </a:bodyPr>
+          <a:lstStyle/>
+          <a:p>
+            <a:pPr>
+              <a:lnSpc>
+                <a:spcPts val="2200"/>
+              </a:lnSpc>
+              <a:spcAft>
+                <a:spcPts val="200"/>
+              </a:spcAft>
+              <a:defRPr sz="2000" b="0">
+                <a:solidFill>
+                  <a:srgbClr val="333333"/>
+                </a:solidFill>
+                <a:latin typeface="Consolas"/>
+              </a:defRPr>
+            </a:pPr>
+            <a:r>
+              <a:t>$ cd module2/examples/tasks_functions &amp;&amp; make clean &amp;&amp; make run</a:t>
+            </a:r>
+          </a:p>
+        </p:txBody>
+      </p:sp>
+      <p:pic>
+        <p:nvPicPr>
+          <p:cNvPr id="4" name="Picture 3" descr="ex12_tasks_functions.png"/>
+          <p:cNvPicPr>
+            <a:picLocks noChangeAspect="1"/>
+          </p:cNvPicPr>
+          <p:nvPr/>
+        </p:nvPicPr>
+        <p:blipFill>
+          <a:blip r:embed="rId2"/>
+          <a:stretch>
+            <a:fillRect/>
+          </a:stretch>
+        </p:blipFill>
+        <p:spPr>
+          <a:xfrm>
+            <a:off x="548640" y="1965960"/>
+            <a:ext cx="7071358" cy="3977639"/>
+          </a:xfrm>
+          <a:prstGeom prst="rect">
+            <a:avLst/>
+          </a:prstGeom>
+        </p:spPr>
+      </p:pic>
+      <p:sp>
+        <p:nvSpPr>
+          <p:cNvPr id="5" name="TextBox 4"/>
+          <p:cNvSpPr txBox="1"/>
+          <p:nvPr/>
+        </p:nvSpPr>
+        <p:spPr>
+          <a:xfrm>
+            <a:off x="548640" y="6355080"/>
+            <a:ext cx="11064240" cy="320040"/>
+          </a:xfrm>
+          <a:prstGeom prst="rect">
+            <a:avLst/>
+          </a:prstGeom>
+          <a:noFill/>
+        </p:spPr>
+        <p:txBody>
+          <a:bodyPr wrap="square">
+            <a:noAutofit/>
+          </a:bodyPr>
+          <a:lstStyle/>
+          <a:p>
+            <a:pPr algn="r">
+              <a:lnSpc>
+                <a:spcPts val="2200"/>
+              </a:lnSpc>
+              <a:defRPr sz="1000" b="0">
+                <a:solidFill>
+                  <a:srgbClr val="666666"/>
+                </a:solidFill>
+                <a:latin typeface="Calibri"/>
+              </a:defRPr>
+            </a:pPr>
+            <a:r>
+              <a:t>learn_verilog_systemverilog / Module 2</a:t>
+            </a:r>
+          </a:p>
+        </p:txBody>
+      </p:sp>
+    </p:spTree>
+  </p:cSld>
+  <p:clrMapOvr>
+    <a:masterClrMapping/>
+  </p:clrMapOvr>
+</p:sld>
+</file>
+
+<file path=ppt/slides/slide45.xml><?xml version="1.0" encoding="utf-8"?>
+<p:sld xmlns:a="http://schemas.openxmlformats.org/drawingml/2006/main" xmlns:p="http://schemas.openxmlformats.org/presentationml/2006/main" xmlns:r="http://schemas.openxmlformats.org/officeDocument/2006/relationships">
+  <p:cSld>
+    <p:spTree>
+      <p:nvGrpSpPr>
+        <p:cNvPr id="1" name=""/>
+        <p:cNvGrpSpPr/>
+        <p:nvPr/>
+      </p:nvGrpSpPr>
+      <p:grpSpPr/>
+      <p:sp>
+        <p:nvSpPr>
+          <p:cNvPr id="2" name="TextBox 1"/>
+          <p:cNvSpPr txBox="1"/>
+          <p:nvPr/>
+        </p:nvSpPr>
+        <p:spPr>
+          <a:xfrm>
+            <a:off x="548640" y="411480"/>
+            <a:ext cx="11064240" cy="777240"/>
+          </a:xfrm>
+          <a:prstGeom prst="rect">
+            <a:avLst/>
+          </a:prstGeom>
+          <a:noFill/>
+        </p:spPr>
+        <p:txBody>
+          <a:bodyPr wrap="square">
+            <a:noAutofit/>
+          </a:bodyPr>
+          <a:lstStyle/>
+          <a:p>
+            <a:pPr>
+              <a:lnSpc>
+                <a:spcPts val="2200"/>
+              </a:lnSpc>
+              <a:defRPr sz="2800" b="1">
+                <a:solidFill>
+                  <a:srgbClr val="1A1A2E"/>
+                </a:solidFill>
+                <a:latin typeface="Calibri"/>
+              </a:defRPr>
+            </a:pPr>
+            <a:r>
+              <a:t>Example 13: ANSI Task with Output</a:t>
+            </a:r>
+          </a:p>
+        </p:txBody>
+      </p:sp>
+      <p:sp>
+        <p:nvSpPr>
+          <p:cNvPr id="3" name="TextBox 2"/>
+          <p:cNvSpPr txBox="1"/>
+          <p:nvPr/>
+        </p:nvSpPr>
+        <p:spPr>
+          <a:xfrm>
+            <a:off x="548640" y="1234440"/>
+            <a:ext cx="11064240" cy="4937760"/>
+          </a:xfrm>
+          <a:prstGeom prst="rect">
+            <a:avLst/>
+          </a:prstGeom>
+          <a:noFill/>
+        </p:spPr>
+        <p:txBody>
+          <a:bodyPr wrap="square">
+            <a:noAutofit/>
+          </a:bodyPr>
+          <a:lstStyle/>
+          <a:p>
+            <a:pPr>
+              <a:lnSpc>
+                <a:spcPts val="2200"/>
+              </a:lnSpc>
+              <a:spcAft>
+                <a:spcPts val="1000"/>
+              </a:spcAft>
+              <a:defRPr sz="2000" b="0">
+                <a:solidFill>
+                  <a:srgbClr val="333333"/>
+                </a:solidFill>
+                <a:latin typeface="Calibri"/>
+              </a:defRPr>
+            </a:pPr>
+            <a:r>
+              <a:t>• task automatic apply_reset(output reg rn); begin/end</a:t>
+            </a:r>
+          </a:p>
+          <a:p>
+            <a:pPr>
+              <a:lnSpc>
+                <a:spcPts val="2200"/>
+              </a:lnSpc>
+              <a:spcAft>
+                <a:spcPts val="1000"/>
+              </a:spcAft>
+              <a:defRPr sz="2000" b="0">
+                <a:solidFill>
+                  <a:srgbClr val="333333"/>
+                </a:solidFill>
+                <a:latin typeface="Calibri"/>
+              </a:defRPr>
+            </a:pPr>
+            <a:r>
+              <a:t>      body</a:t>
+            </a:r>
+          </a:p>
+          <a:p>
+            <a:pPr>
+              <a:lnSpc>
+                <a:spcPts val="2200"/>
+              </a:lnSpc>
+              <a:spcAft>
+                <a:spcPts val="1000"/>
+              </a:spcAft>
+              <a:defRPr sz="2000" b="0">
+                <a:solidFill>
+                  <a:srgbClr val="333333"/>
+                </a:solidFill>
+                <a:latin typeface="Calibri"/>
+              </a:defRPr>
+            </a:pPr>
+            <a:r>
+              <a:t>• Task with output argument; testbench reset pattern</a:t>
+            </a:r>
+          </a:p>
+        </p:txBody>
+      </p:sp>
+      <p:sp>
+        <p:nvSpPr>
+          <p:cNvPr id="4" name="TextBox 3"/>
+          <p:cNvSpPr txBox="1"/>
+          <p:nvPr/>
+        </p:nvSpPr>
+        <p:spPr>
+          <a:xfrm>
+            <a:off x="548640" y="6355080"/>
+            <a:ext cx="11064240" cy="320040"/>
+          </a:xfrm>
+          <a:prstGeom prst="rect">
+            <a:avLst/>
+          </a:prstGeom>
+          <a:noFill/>
+        </p:spPr>
+        <p:txBody>
+          <a:bodyPr wrap="square">
+            <a:noAutofit/>
+          </a:bodyPr>
+          <a:lstStyle/>
+          <a:p>
+            <a:pPr algn="r">
+              <a:lnSpc>
+                <a:spcPts val="2200"/>
+              </a:lnSpc>
+              <a:defRPr sz="1000" b="0">
+                <a:solidFill>
+                  <a:srgbClr val="666666"/>
+                </a:solidFill>
+                <a:latin typeface="Calibri"/>
+              </a:defRPr>
+            </a:pPr>
+            <a:r>
+              <a:t>learn_verilog_systemverilog / Module 2</a:t>
+            </a:r>
+          </a:p>
+        </p:txBody>
+      </p:sp>
+    </p:spTree>
+  </p:cSld>
+  <p:clrMapOvr>
+    <a:masterClrMapping/>
+  </p:clrMapOvr>
+</p:sld>
+</file>
+
+<file path=ppt/slides/slide46.xml><?xml version="1.0" encoding="utf-8"?>
+<p:sld xmlns:a="http://schemas.openxmlformats.org/drawingml/2006/main" xmlns:p="http://schemas.openxmlformats.org/presentationml/2006/main" xmlns:r="http://schemas.openxmlformats.org/officeDocument/2006/relationships">
+  <p:cSld>
+    <p:spTree>
+      <p:nvGrpSpPr>
+        <p:cNvPr id="1" name=""/>
+        <p:cNvGrpSpPr/>
+        <p:nvPr/>
+      </p:nvGrpSpPr>
+      <p:grpSpPr/>
+      <p:sp>
+        <p:nvSpPr>
+          <p:cNvPr id="2" name="TextBox 1"/>
+          <p:cNvSpPr txBox="1"/>
+          <p:nvPr/>
+        </p:nvSpPr>
+        <p:spPr>
+          <a:xfrm>
+            <a:off x="548640" y="411480"/>
+            <a:ext cx="11064240" cy="777240"/>
+          </a:xfrm>
+          <a:prstGeom prst="rect">
+            <a:avLst/>
+          </a:prstGeom>
+          <a:noFill/>
+        </p:spPr>
+        <p:txBody>
+          <a:bodyPr wrap="square">
+            <a:noAutofit/>
+          </a:bodyPr>
+          <a:lstStyle/>
+          <a:p>
+            <a:pPr>
+              <a:lnSpc>
+                <a:spcPts val="2200"/>
+              </a:lnSpc>
+              <a:defRPr sz="2800" b="1">
+                <a:solidFill>
+                  <a:srgbClr val="1A1A2E"/>
+                </a:solidFill>
+                <a:latin typeface="Calibri"/>
+              </a:defRPr>
+            </a:pPr>
+            <a:r>
+              <a:t>Demo: ANSI Task with Output</a:t>
+            </a:r>
+          </a:p>
+        </p:txBody>
+      </p:sp>
+      <p:sp>
+        <p:nvSpPr>
+          <p:cNvPr id="3" name="TextBox 2"/>
+          <p:cNvSpPr txBox="1"/>
+          <p:nvPr/>
+        </p:nvSpPr>
+        <p:spPr>
+          <a:xfrm>
+            <a:off x="548640" y="1051560"/>
+            <a:ext cx="11064240" cy="914400"/>
+          </a:xfrm>
+          <a:prstGeom prst="rect">
+            <a:avLst/>
+          </a:prstGeom>
+          <a:solidFill>
+            <a:srgbClr val="F4F4F4"/>
+          </a:solidFill>
+        </p:spPr>
+        <p:txBody>
+          <a:bodyPr wrap="square">
+            <a:noAutofit/>
+          </a:bodyPr>
+          <a:lstStyle/>
+          <a:p>
+            <a:pPr>
+              <a:lnSpc>
+                <a:spcPts val="2200"/>
+              </a:lnSpc>
+              <a:spcAft>
+                <a:spcPts val="200"/>
+              </a:spcAft>
+              <a:defRPr sz="2000" b="0">
+                <a:solidFill>
+                  <a:srgbClr val="333333"/>
+                </a:solidFill>
+                <a:latin typeface="Consolas"/>
+              </a:defRPr>
+            </a:pPr>
+            <a:r>
+              <a:t>$ cd module2/examples/task_ansi &amp;&amp; make clean &amp;&amp; make run</a:t>
+            </a:r>
+          </a:p>
+        </p:txBody>
+      </p:sp>
+      <p:pic>
+        <p:nvPicPr>
+          <p:cNvPr id="4" name="Picture 3" descr="ex13_task_ansi.png"/>
+          <p:cNvPicPr>
+            <a:picLocks noChangeAspect="1"/>
+          </p:cNvPicPr>
+          <p:nvPr/>
+        </p:nvPicPr>
+        <p:blipFill>
+          <a:blip r:embed="rId2"/>
+          <a:stretch>
+            <a:fillRect/>
+          </a:stretch>
+        </p:blipFill>
+        <p:spPr>
+          <a:xfrm>
+            <a:off x="548640" y="1965960"/>
+            <a:ext cx="7071358" cy="3977639"/>
+          </a:xfrm>
+          <a:prstGeom prst="rect">
+            <a:avLst/>
+          </a:prstGeom>
+        </p:spPr>
+      </p:pic>
+      <p:sp>
+        <p:nvSpPr>
+          <p:cNvPr id="5" name="TextBox 4"/>
+          <p:cNvSpPr txBox="1"/>
+          <p:nvPr/>
+        </p:nvSpPr>
+        <p:spPr>
+          <a:xfrm>
+            <a:off x="548640" y="6355080"/>
+            <a:ext cx="11064240" cy="320040"/>
+          </a:xfrm>
+          <a:prstGeom prst="rect">
+            <a:avLst/>
+          </a:prstGeom>
+          <a:noFill/>
+        </p:spPr>
+        <p:txBody>
+          <a:bodyPr wrap="square">
+            <a:noAutofit/>
+          </a:bodyPr>
+          <a:lstStyle/>
+          <a:p>
+            <a:pPr algn="r">
+              <a:lnSpc>
+                <a:spcPts val="2200"/>
+              </a:lnSpc>
+              <a:defRPr sz="1000" b="0">
+                <a:solidFill>
+                  <a:srgbClr val="666666"/>
+                </a:solidFill>
+                <a:latin typeface="Calibri"/>
+              </a:defRPr>
+            </a:pPr>
+            <a:r>
+              <a:t>learn_verilog_systemverilog / Module 2</a:t>
+            </a:r>
+          </a:p>
+        </p:txBody>
+      </p:sp>
+    </p:spTree>
+  </p:cSld>
+  <p:clrMapOvr>
+    <a:masterClrMapping/>
+  </p:clrMapOvr>
+</p:sld>
+</file>
+
+<file path=ppt/slides/slide47.xml><?xml version="1.0" encoding="utf-8"?>
+<p:sld xmlns:a="http://schemas.openxmlformats.org/drawingml/2006/main" xmlns:p="http://schemas.openxmlformats.org/presentationml/2006/main" xmlns:r="http://schemas.openxmlformats.org/officeDocument/2006/relationships">
+  <p:cSld>
+    <p:spTree>
+      <p:nvGrpSpPr>
+        <p:cNvPr id="1" name=""/>
+        <p:cNvGrpSpPr/>
+        <p:nvPr/>
+      </p:nvGrpSpPr>
+      <p:grpSpPr/>
+      <p:sp>
+        <p:nvSpPr>
+          <p:cNvPr id="2" name="TextBox 1"/>
+          <p:cNvSpPr txBox="1"/>
+          <p:nvPr/>
+        </p:nvSpPr>
+        <p:spPr>
+          <a:xfrm>
+            <a:off x="548640" y="2743200"/>
+            <a:ext cx="11064240" cy="1371600"/>
+          </a:xfrm>
+          <a:prstGeom prst="rect">
+            <a:avLst/>
+          </a:prstGeom>
+          <a:noFill/>
+        </p:spPr>
+        <p:txBody>
+          <a:bodyPr wrap="square">
+            <a:noAutofit/>
+          </a:bodyPr>
+          <a:lstStyle/>
+          <a:p>
+            <a:pPr algn="ctr">
+              <a:lnSpc>
+                <a:spcPts val="2200"/>
+              </a:lnSpc>
+              <a:defRPr sz="3600" b="1">
+                <a:solidFill>
+                  <a:srgbClr val="1A1A2E"/>
+                </a:solidFill>
+                <a:latin typeface="Calibri"/>
+              </a:defRPr>
+            </a:pPr>
+            <a:r>
+              <a:t>Common pitfalls</a:t>
+            </a:r>
+          </a:p>
+        </p:txBody>
+      </p:sp>
+      <p:sp>
+        <p:nvSpPr>
+          <p:cNvPr id="3" name="TextBox 2"/>
+          <p:cNvSpPr txBox="1"/>
+          <p:nvPr/>
+        </p:nvSpPr>
+        <p:spPr>
+          <a:xfrm>
+            <a:off x="548640" y="6355080"/>
+            <a:ext cx="11064240" cy="320040"/>
+          </a:xfrm>
+          <a:prstGeom prst="rect">
+            <a:avLst/>
+          </a:prstGeom>
+          <a:noFill/>
+        </p:spPr>
+        <p:txBody>
+          <a:bodyPr wrap="square">
+            <a:noAutofit/>
+          </a:bodyPr>
+          <a:lstStyle/>
+          <a:p>
+            <a:pPr algn="r">
+              <a:lnSpc>
+                <a:spcPts val="2200"/>
+              </a:lnSpc>
+              <a:defRPr sz="1000" b="0">
+                <a:solidFill>
+                  <a:srgbClr val="666666"/>
+                </a:solidFill>
+                <a:latin typeface="Calibri"/>
+              </a:defRPr>
+            </a:pPr>
+            <a:r>
+              <a:t>learn_verilog_systemverilog / Module 2</a:t>
+            </a:r>
+          </a:p>
+        </p:txBody>
+      </p:sp>
+    </p:spTree>
+  </p:cSld>
+  <p:clrMapOvr>
+    <a:masterClrMapping/>
+  </p:clrMapOvr>
+</p:sld>
+</file>
+
+<file path=ppt/slides/slide48.xml><?xml version="1.0" encoding="utf-8"?>
+<p:sld xmlns:a="http://schemas.openxmlformats.org/drawingml/2006/main" xmlns:p="http://schemas.openxmlformats.org/presentationml/2006/main" xmlns:r="http://schemas.openxmlformats.org/officeDocument/2006/relationships">
+  <p:cSld>
+    <p:spTree>
+      <p:nvGrpSpPr>
+        <p:cNvPr id="1" name=""/>
+        <p:cNvGrpSpPr/>
+        <p:nvPr/>
+      </p:nvGrpSpPr>
+      <p:grpSpPr/>
+      <p:sp>
+        <p:nvSpPr>
+          <p:cNvPr id="2" name="TextBox 1"/>
+          <p:cNvSpPr txBox="1"/>
+          <p:nvPr/>
+        </p:nvSpPr>
+        <p:spPr>
+          <a:xfrm>
+            <a:off x="548640" y="411480"/>
+            <a:ext cx="11064240" cy="777240"/>
+          </a:xfrm>
+          <a:prstGeom prst="rect">
+            <a:avLst/>
+          </a:prstGeom>
+          <a:noFill/>
+        </p:spPr>
+        <p:txBody>
+          <a:bodyPr wrap="square">
+            <a:noAutofit/>
+          </a:bodyPr>
+          <a:lstStyle/>
+          <a:p>
+            <a:pPr>
+              <a:lnSpc>
+                <a:spcPts val="2200"/>
+              </a:lnSpc>
+              <a:defRPr sz="2800" b="1">
+                <a:solidFill>
+                  <a:srgbClr val="1A1A2E"/>
+                </a:solidFill>
+                <a:latin typeface="Calibri"/>
+              </a:defRPr>
+            </a:pPr>
+            <a:r>
+              <a:t>Using always @* for Sequential Logic</a:t>
+            </a:r>
+          </a:p>
+        </p:txBody>
+      </p:sp>
+      <p:sp>
+        <p:nvSpPr>
+          <p:cNvPr id="3" name="TextBox 2"/>
+          <p:cNvSpPr txBox="1"/>
+          <p:nvPr/>
+        </p:nvSpPr>
+        <p:spPr>
+          <a:xfrm>
+            <a:off x="548640" y="1234440"/>
+            <a:ext cx="11064240" cy="4937760"/>
+          </a:xfrm>
+          <a:prstGeom prst="rect">
+            <a:avLst/>
+          </a:prstGeom>
+          <a:noFill/>
+        </p:spPr>
+        <p:txBody>
+          <a:bodyPr wrap="square">
+            <a:noAutofit/>
+          </a:bodyPr>
+          <a:lstStyle/>
+          <a:p>
+            <a:pPr>
+              <a:lnSpc>
+                <a:spcPts val="2200"/>
+              </a:lnSpc>
+              <a:spcAft>
+                <a:spcPts val="1000"/>
+              </a:spcAft>
+              <a:defRPr sz="2000" b="0">
+                <a:solidFill>
+                  <a:srgbClr val="333333"/>
+                </a:solidFill>
+                <a:latin typeface="Calibri"/>
+              </a:defRPr>
+            </a:pPr>
+            <a:r>
+              <a:t>• Mistake: `always @* q &lt;= d;` intending a flip-flop.</a:t>
+            </a:r>
+          </a:p>
+          <a:p>
+            <a:pPr>
+              <a:lnSpc>
+                <a:spcPts val="2200"/>
+              </a:lnSpc>
+              <a:spcAft>
+                <a:spcPts val="1000"/>
+              </a:spcAft>
+              <a:defRPr sz="2000" b="0">
+                <a:solidFill>
+                  <a:srgbClr val="333333"/>
+                </a:solidFill>
+                <a:latin typeface="Calibri"/>
+              </a:defRPr>
+            </a:pPr>
+            <a:r>
+              <a:t>• Reality: `@*` is for combinational logic; it does</a:t>
+            </a:r>
+          </a:p>
+          <a:p>
+            <a:pPr>
+              <a:lnSpc>
+                <a:spcPts val="2200"/>
+              </a:lnSpc>
+              <a:spcAft>
+                <a:spcPts val="1000"/>
+              </a:spcAft>
+              <a:defRPr sz="2000" b="0">
+                <a:solidFill>
+                  <a:srgbClr val="333333"/>
+                </a:solidFill>
+                <a:latin typeface="Calibri"/>
+              </a:defRPr>
+            </a:pPr>
+            <a:r>
+              <a:t>      not create a clock edge.</a:t>
+            </a:r>
+          </a:p>
+          <a:p>
+            <a:pPr>
+              <a:lnSpc>
+                <a:spcPts val="2200"/>
+              </a:lnSpc>
+              <a:spcAft>
+                <a:spcPts val="1000"/>
+              </a:spcAft>
+              <a:defRPr sz="2000" b="0">
+                <a:solidFill>
+                  <a:srgbClr val="333333"/>
+                </a:solidFill>
+                <a:latin typeface="Calibri"/>
+              </a:defRPr>
+            </a:pPr>
+            <a:r>
+              <a:t>• Correct: Use `always @(posedge clk)` (and `&lt;=`) for</a:t>
+            </a:r>
+          </a:p>
+          <a:p>
+            <a:pPr>
+              <a:lnSpc>
+                <a:spcPts val="2200"/>
+              </a:lnSpc>
+              <a:spcAft>
+                <a:spcPts val="1000"/>
+              </a:spcAft>
+              <a:defRPr sz="2000" b="0">
+                <a:solidFill>
+                  <a:srgbClr val="333333"/>
+                </a:solidFill>
+                <a:latin typeface="Calibri"/>
+              </a:defRPr>
+            </a:pPr>
+            <a:r>
+              <a:t>      sequential logic.</a:t>
+            </a:r>
+          </a:p>
+          <a:p>
+            <a:pPr>
+              <a:lnSpc>
+                <a:spcPts val="2200"/>
+              </a:lnSpc>
+              <a:spcAft>
+                <a:spcPts val="1000"/>
+              </a:spcAft>
+              <a:defRPr sz="2000" b="0">
+                <a:solidFill>
+                  <a:srgbClr val="333333"/>
+                </a:solidFill>
+                <a:latin typeface="Calibri"/>
+              </a:defRPr>
+            </a:pPr>
+            <a:r>
+              <a:t>• Why: Mixing the two causes simulation/synthesis</a:t>
+            </a:r>
+          </a:p>
+          <a:p>
+            <a:pPr>
+              <a:lnSpc>
+                <a:spcPts val="2200"/>
+              </a:lnSpc>
+              <a:spcAft>
+                <a:spcPts val="1000"/>
+              </a:spcAft>
+              <a:defRPr sz="2000" b="0">
+                <a:solidFill>
+                  <a:srgbClr val="333333"/>
+                </a:solidFill>
+                <a:latin typeface="Calibri"/>
+              </a:defRPr>
+            </a:pPr>
+            <a:r>
+              <a:t>      mismatches and unintended latches.</a:t>
+            </a:r>
+          </a:p>
+        </p:txBody>
+      </p:sp>
+      <p:sp>
+        <p:nvSpPr>
+          <p:cNvPr id="4" name="TextBox 3"/>
+          <p:cNvSpPr txBox="1"/>
+          <p:nvPr/>
+        </p:nvSpPr>
+        <p:spPr>
+          <a:xfrm>
+            <a:off x="548640" y="6355080"/>
+            <a:ext cx="11064240" cy="320040"/>
+          </a:xfrm>
+          <a:prstGeom prst="rect">
+            <a:avLst/>
+          </a:prstGeom>
+          <a:noFill/>
+        </p:spPr>
+        <p:txBody>
+          <a:bodyPr wrap="square">
+            <a:noAutofit/>
+          </a:bodyPr>
+          <a:lstStyle/>
+          <a:p>
+            <a:pPr algn="r">
+              <a:lnSpc>
+                <a:spcPts val="2200"/>
+              </a:lnSpc>
+              <a:defRPr sz="1000" b="0">
+                <a:solidFill>
+                  <a:srgbClr val="666666"/>
+                </a:solidFill>
+                <a:latin typeface="Calibri"/>
+              </a:defRPr>
+            </a:pPr>
+            <a:r>
+              <a:t>learn_verilog_systemverilog / Module 2</a:t>
+            </a:r>
+          </a:p>
+        </p:txBody>
+      </p:sp>
+    </p:spTree>
+  </p:cSld>
+  <p:clrMapOvr>
+    <a:masterClrMapping/>
+  </p:clrMapOvr>
+</p:sld>
+</file>
+
+<file path=ppt/slides/slide49.xml><?xml version="1.0" encoding="utf-8"?>
+<p:sld xmlns:a="http://schemas.openxmlformats.org/drawingml/2006/main" xmlns:p="http://schemas.openxmlformats.org/presentationml/2006/main" xmlns:r="http://schemas.openxmlformats.org/officeDocument/2006/relationships">
+  <p:cSld>
+    <p:spTree>
+      <p:nvGrpSpPr>
+        <p:cNvPr id="1" name=""/>
+        <p:cNvGrpSpPr/>
+        <p:nvPr/>
+      </p:nvGrpSpPr>
+      <p:grpSpPr/>
+      <p:sp>
+        <p:nvSpPr>
+          <p:cNvPr id="2" name="TextBox 1"/>
+          <p:cNvSpPr txBox="1"/>
+          <p:nvPr/>
+        </p:nvSpPr>
+        <p:spPr>
+          <a:xfrm>
+            <a:off x="548640" y="411480"/>
+            <a:ext cx="11064240" cy="777240"/>
+          </a:xfrm>
+          <a:prstGeom prst="rect">
+            <a:avLst/>
+          </a:prstGeom>
+          <a:noFill/>
+        </p:spPr>
+        <p:txBody>
+          <a:bodyPr wrap="square">
+            <a:noAutofit/>
+          </a:bodyPr>
+          <a:lstStyle/>
+          <a:p>
+            <a:pPr>
+              <a:lnSpc>
+                <a:spcPts val="2200"/>
+              </a:lnSpc>
+              <a:defRPr sz="2800" b="1">
+                <a:solidFill>
+                  <a:srgbClr val="1A1A2E"/>
+                </a:solidFill>
+                <a:latin typeface="Calibri"/>
+              </a:defRPr>
+            </a:pPr>
+            <a:r>
+              <a:t>genvar in Normal Code</a:t>
+            </a:r>
+          </a:p>
+        </p:txBody>
+      </p:sp>
+      <p:sp>
+        <p:nvSpPr>
+          <p:cNvPr id="3" name="TextBox 2"/>
+          <p:cNvSpPr txBox="1"/>
+          <p:nvPr/>
+        </p:nvSpPr>
+        <p:spPr>
+          <a:xfrm>
+            <a:off x="548640" y="1234440"/>
+            <a:ext cx="11064240" cy="4937760"/>
+          </a:xfrm>
+          <a:prstGeom prst="rect">
+            <a:avLst/>
+          </a:prstGeom>
+          <a:noFill/>
+        </p:spPr>
+        <p:txBody>
+          <a:bodyPr wrap="square">
+            <a:noAutofit/>
+          </a:bodyPr>
+          <a:lstStyle/>
+          <a:p>
+            <a:pPr>
+              <a:lnSpc>
+                <a:spcPts val="2200"/>
+              </a:lnSpc>
+              <a:spcAft>
+                <a:spcPts val="1000"/>
+              </a:spcAft>
+              <a:defRPr sz="2000" b="0">
+                <a:solidFill>
+                  <a:srgbClr val="333333"/>
+                </a:solidFill>
+                <a:latin typeface="Calibri"/>
+              </a:defRPr>
+            </a:pPr>
+            <a:r>
+              <a:t>• Mistake: Using genvar in an always block or initial</a:t>
+            </a:r>
+          </a:p>
+          <a:p>
+            <a:pPr>
+              <a:lnSpc>
+                <a:spcPts val="2200"/>
+              </a:lnSpc>
+              <a:spcAft>
+                <a:spcPts val="1000"/>
+              </a:spcAft>
+              <a:defRPr sz="2000" b="0">
+                <a:solidFill>
+                  <a:srgbClr val="333333"/>
+                </a:solidFill>
+                <a:latin typeface="Calibri"/>
+              </a:defRPr>
+            </a:pPr>
+            <a:r>
+              <a:t>      block.</a:t>
+            </a:r>
+          </a:p>
+          <a:p>
+            <a:pPr>
+              <a:lnSpc>
+                <a:spcPts val="2200"/>
+              </a:lnSpc>
+              <a:spcAft>
+                <a:spcPts val="1000"/>
+              </a:spcAft>
+              <a:defRPr sz="2000" b="0">
+                <a:solidFill>
+                  <a:srgbClr val="333333"/>
+                </a:solidFill>
+                <a:latin typeface="Calibri"/>
+              </a:defRPr>
+            </a:pPr>
+            <a:r>
+              <a:t>• Reality: genvar is only for generate loops; it does</a:t>
+            </a:r>
+          </a:p>
+          <a:p>
+            <a:pPr>
+              <a:lnSpc>
+                <a:spcPts val="2200"/>
+              </a:lnSpc>
+              <a:spcAft>
+                <a:spcPts val="1000"/>
+              </a:spcAft>
+              <a:defRPr sz="2000" b="0">
+                <a:solidFill>
+                  <a:srgbClr val="333333"/>
+                </a:solidFill>
+                <a:latin typeface="Calibri"/>
+              </a:defRPr>
+            </a:pPr>
+            <a:r>
+              <a:t>      not exist at runtime.</a:t>
+            </a:r>
+          </a:p>
+          <a:p>
+            <a:pPr>
+              <a:lnSpc>
+                <a:spcPts val="2200"/>
+              </a:lnSpc>
+              <a:spcAft>
+                <a:spcPts val="1000"/>
+              </a:spcAft>
+              <a:defRPr sz="2000" b="0">
+                <a:solidFill>
+                  <a:srgbClr val="333333"/>
+                </a:solidFill>
+                <a:latin typeface="Calibri"/>
+              </a:defRPr>
+            </a:pPr>
+            <a:r>
+              <a:t>• Correct: Use integer or reg for runtime loops; use</a:t>
+            </a:r>
+          </a:p>
+          <a:p>
+            <a:pPr>
+              <a:lnSpc>
+                <a:spcPts val="2200"/>
+              </a:lnSpc>
+              <a:spcAft>
+                <a:spcPts val="1000"/>
+              </a:spcAft>
+              <a:defRPr sz="2000" b="0">
+                <a:solidFill>
+                  <a:srgbClr val="333333"/>
+                </a:solidFill>
+                <a:latin typeface="Calibri"/>
+              </a:defRPr>
+            </a:pPr>
+            <a:r>
+              <a:t>      genvar only inside generate for.</a:t>
+            </a:r>
+          </a:p>
+          <a:p>
+            <a:pPr>
+              <a:lnSpc>
+                <a:spcPts val="2200"/>
+              </a:lnSpc>
+              <a:spcAft>
+                <a:spcPts val="1000"/>
+              </a:spcAft>
+              <a:defRPr sz="2000" b="0">
+                <a:solidFill>
+                  <a:srgbClr val="333333"/>
+                </a:solidFill>
+                <a:latin typeface="Calibri"/>
+              </a:defRPr>
+            </a:pPr>
+            <a:r>
+              <a:t>• Why: genvar is elaborated away; it is not a</a:t>
+            </a:r>
+          </a:p>
+          <a:p>
+            <a:pPr>
+              <a:lnSpc>
+                <a:spcPts val="2200"/>
+              </a:lnSpc>
+              <a:spcAft>
+                <a:spcPts val="1000"/>
+              </a:spcAft>
+              <a:defRPr sz="2000" b="0">
+                <a:solidFill>
+                  <a:srgbClr val="333333"/>
+                </a:solidFill>
+                <a:latin typeface="Calibri"/>
+              </a:defRPr>
+            </a:pPr>
+            <a:r>
+              <a:t>      simulation variable.</a:t>
+            </a:r>
+          </a:p>
+        </p:txBody>
+      </p:sp>
+      <p:sp>
+        <p:nvSpPr>
+          <p:cNvPr id="4" name="TextBox 3"/>
+          <p:cNvSpPr txBox="1"/>
+          <p:nvPr/>
+        </p:nvSpPr>
+        <p:spPr>
+          <a:xfrm>
+            <a:off x="548640" y="6355080"/>
+            <a:ext cx="11064240" cy="320040"/>
+          </a:xfrm>
+          <a:prstGeom prst="rect">
+            <a:avLst/>
+          </a:prstGeom>
+          <a:noFill/>
+        </p:spPr>
+        <p:txBody>
+          <a:bodyPr wrap="square">
+            <a:noAutofit/>
+          </a:bodyPr>
+          <a:lstStyle/>
+          <a:p>
+            <a:pPr algn="r">
+              <a:lnSpc>
+                <a:spcPts val="2200"/>
+              </a:lnSpc>
+              <a:defRPr sz="1000" b="0">
+                <a:solidFill>
+                  <a:srgbClr val="666666"/>
+                </a:solidFill>
+                <a:latin typeface="Calibri"/>
+              </a:defRPr>
+            </a:pPr>
+            <a:r>
+              <a:t>learn_verilog_systemverilog / Module 2</a:t>
+            </a:r>
+          </a:p>
+        </p:txBody>
+      </p:sp>
+    </p:spTree>
+  </p:cSld>
+  <p:clrMapOvr>
+    <a:masterClrMapping/>
+  </p:clrMapOvr>
+</p:sld>
+</file>
+
 <file path=ppt/slides/slide5.xml><?xml version="1.0" encoding="utf-8"?>
 <p:sld xmlns:a="http://schemas.openxmlformats.org/drawingml/2006/main" xmlns:p="http://schemas.openxmlformats.org/presentationml/2006/main" xmlns:r="http://schemas.openxmlformats.org/officeDocument/2006/relationships">
   <p:cSld>
@@ -10220,6 +14652,2099 @@
             </a:pPr>
             <a:r>
               <a:t>      Verilog stand…</a:t>
+            </a:r>
+          </a:p>
+        </p:txBody>
+      </p:sp>
+      <p:sp>
+        <p:nvSpPr>
+          <p:cNvPr id="4" name="TextBox 3"/>
+          <p:cNvSpPr txBox="1"/>
+          <p:nvPr/>
+        </p:nvSpPr>
+        <p:spPr>
+          <a:xfrm>
+            <a:off x="548640" y="6355080"/>
+            <a:ext cx="11064240" cy="320040"/>
+          </a:xfrm>
+          <a:prstGeom prst="rect">
+            <a:avLst/>
+          </a:prstGeom>
+          <a:noFill/>
+        </p:spPr>
+        <p:txBody>
+          <a:bodyPr wrap="square">
+            <a:noAutofit/>
+          </a:bodyPr>
+          <a:lstStyle/>
+          <a:p>
+            <a:pPr algn="r">
+              <a:lnSpc>
+                <a:spcPts val="2200"/>
+              </a:lnSpc>
+              <a:defRPr sz="1000" b="0">
+                <a:solidFill>
+                  <a:srgbClr val="666666"/>
+                </a:solidFill>
+                <a:latin typeface="Calibri"/>
+              </a:defRPr>
+            </a:pPr>
+            <a:r>
+              <a:t>learn_verilog_systemverilog / Module 2</a:t>
+            </a:r>
+          </a:p>
+        </p:txBody>
+      </p:sp>
+    </p:spTree>
+  </p:cSld>
+  <p:clrMapOvr>
+    <a:masterClrMapping/>
+  </p:clrMapOvr>
+</p:sld>
+</file>
+
+<file path=ppt/slides/slide50.xml><?xml version="1.0" encoding="utf-8"?>
+<p:sld xmlns:a="http://schemas.openxmlformats.org/drawingml/2006/main" xmlns:p="http://schemas.openxmlformats.org/presentationml/2006/main" xmlns:r="http://schemas.openxmlformats.org/officeDocument/2006/relationships">
+  <p:cSld>
+    <p:spTree>
+      <p:nvGrpSpPr>
+        <p:cNvPr id="1" name=""/>
+        <p:cNvGrpSpPr/>
+        <p:nvPr/>
+      </p:nvGrpSpPr>
+      <p:grpSpPr/>
+      <p:sp>
+        <p:nvSpPr>
+          <p:cNvPr id="2" name="TextBox 1"/>
+          <p:cNvSpPr txBox="1"/>
+          <p:nvPr/>
+        </p:nvSpPr>
+        <p:spPr>
+          <a:xfrm>
+            <a:off x="548640" y="411480"/>
+            <a:ext cx="11064240" cy="777240"/>
+          </a:xfrm>
+          <a:prstGeom prst="rect">
+            <a:avLst/>
+          </a:prstGeom>
+          <a:noFill/>
+        </p:spPr>
+        <p:txBody>
+          <a:bodyPr wrap="square">
+            <a:noAutofit/>
+          </a:bodyPr>
+          <a:lstStyle/>
+          <a:p>
+            <a:pPr>
+              <a:lnSpc>
+                <a:spcPts val="2200"/>
+              </a:lnSpc>
+              <a:defRPr sz="2800" b="1">
+                <a:solidFill>
+                  <a:srgbClr val="1A1A2E"/>
+                </a:solidFill>
+                <a:latin typeface="Calibri"/>
+              </a:defRPr>
+            </a:pPr>
+            <a:r>
+              <a:t>Overriding localparam</a:t>
+            </a:r>
+          </a:p>
+        </p:txBody>
+      </p:sp>
+      <p:sp>
+        <p:nvSpPr>
+          <p:cNvPr id="3" name="TextBox 2"/>
+          <p:cNvSpPr txBox="1"/>
+          <p:nvPr/>
+        </p:nvSpPr>
+        <p:spPr>
+          <a:xfrm>
+            <a:off x="548640" y="1234440"/>
+            <a:ext cx="11064240" cy="4937760"/>
+          </a:xfrm>
+          <a:prstGeom prst="rect">
+            <a:avLst/>
+          </a:prstGeom>
+          <a:noFill/>
+        </p:spPr>
+        <p:txBody>
+          <a:bodyPr wrap="square">
+            <a:noAutofit/>
+          </a:bodyPr>
+          <a:lstStyle/>
+          <a:p>
+            <a:pPr>
+              <a:lnSpc>
+                <a:spcPts val="2200"/>
+              </a:lnSpc>
+              <a:spcAft>
+                <a:spcPts val="1000"/>
+              </a:spcAft>
+              <a:defRPr sz="2000" b="0">
+                <a:solidFill>
+                  <a:srgbClr val="333333"/>
+                </a:solidFill>
+                <a:latin typeface="Calibri"/>
+              </a:defRPr>
+            </a:pPr>
+            <a:r>
+              <a:t>• Mistake: Trying to override localparam at</a:t>
+            </a:r>
+          </a:p>
+          <a:p>
+            <a:pPr>
+              <a:lnSpc>
+                <a:spcPts val="2200"/>
+              </a:lnSpc>
+              <a:spcAft>
+                <a:spcPts val="1000"/>
+              </a:spcAft>
+              <a:defRPr sz="2000" b="0">
+                <a:solidFill>
+                  <a:srgbClr val="333333"/>
+                </a:solidFill>
+                <a:latin typeface="Calibri"/>
+              </a:defRPr>
+            </a:pPr>
+            <a:r>
+              <a:t>      instantiation (e.g. `#(.MAX(100))`).</a:t>
+            </a:r>
+          </a:p>
+          <a:p>
+            <a:pPr>
+              <a:lnSpc>
+                <a:spcPts val="2200"/>
+              </a:lnSpc>
+              <a:spcAft>
+                <a:spcPts val="1000"/>
+              </a:spcAft>
+              <a:defRPr sz="2000" b="0">
+                <a:solidFill>
+                  <a:srgbClr val="333333"/>
+                </a:solidFill>
+                <a:latin typeface="Calibri"/>
+              </a:defRPr>
+            </a:pPr>
+            <a:r>
+              <a:t>• Reality: localparam cannot be overridden.</a:t>
+            </a:r>
+          </a:p>
+          <a:p>
+            <a:pPr>
+              <a:lnSpc>
+                <a:spcPts val="2200"/>
+              </a:lnSpc>
+              <a:spcAft>
+                <a:spcPts val="1000"/>
+              </a:spcAft>
+              <a:defRPr sz="2000" b="0">
+                <a:solidFill>
+                  <a:srgbClr val="333333"/>
+                </a:solidFill>
+                <a:latin typeface="Calibri"/>
+              </a:defRPr>
+            </a:pPr>
+            <a:r>
+              <a:t>• Correct: Use parameter for values that must be</a:t>
+            </a:r>
+          </a:p>
+          <a:p>
+            <a:pPr>
+              <a:lnSpc>
+                <a:spcPts val="2200"/>
+              </a:lnSpc>
+              <a:spcAft>
+                <a:spcPts val="1000"/>
+              </a:spcAft>
+              <a:defRPr sz="2000" b="0">
+                <a:solidFill>
+                  <a:srgbClr val="333333"/>
+                </a:solidFill>
+                <a:latin typeface="Calibri"/>
+              </a:defRPr>
+            </a:pPr>
+            <a:r>
+              <a:t>      overridden; use localparam for fixed or derived</a:t>
+            </a:r>
+          </a:p>
+          <a:p>
+            <a:pPr>
+              <a:lnSpc>
+                <a:spcPts val="2200"/>
+              </a:lnSpc>
+              <a:spcAft>
+                <a:spcPts val="1000"/>
+              </a:spcAft>
+              <a:defRPr sz="2000" b="0">
+                <a:solidFill>
+                  <a:srgbClr val="333333"/>
+                </a:solidFill>
+                <a:latin typeface="Calibri"/>
+              </a:defRPr>
+            </a:pPr>
+            <a:r>
+              <a:t>      cons…</a:t>
+            </a:r>
+          </a:p>
+          <a:p>
+            <a:pPr>
+              <a:lnSpc>
+                <a:spcPts val="2200"/>
+              </a:lnSpc>
+              <a:spcAft>
+                <a:spcPts val="1000"/>
+              </a:spcAft>
+              <a:defRPr sz="2000" b="0">
+                <a:solidFill>
+                  <a:srgbClr val="333333"/>
+                </a:solidFill>
+                <a:latin typeface="Calibri"/>
+              </a:defRPr>
+            </a:pPr>
+            <a:r>
+              <a:t>• Why: The standard does not allow localparam in the</a:t>
+            </a:r>
+          </a:p>
+          <a:p>
+            <a:pPr>
+              <a:lnSpc>
+                <a:spcPts val="2200"/>
+              </a:lnSpc>
+              <a:spcAft>
+                <a:spcPts val="1000"/>
+              </a:spcAft>
+              <a:defRPr sz="2000" b="0">
+                <a:solidFill>
+                  <a:srgbClr val="333333"/>
+                </a:solidFill>
+                <a:latin typeface="Calibri"/>
+              </a:defRPr>
+            </a:pPr>
+            <a:r>
+              <a:t>      parameter list.</a:t>
+            </a:r>
+          </a:p>
+        </p:txBody>
+      </p:sp>
+      <p:sp>
+        <p:nvSpPr>
+          <p:cNvPr id="4" name="TextBox 3"/>
+          <p:cNvSpPr txBox="1"/>
+          <p:nvPr/>
+        </p:nvSpPr>
+        <p:spPr>
+          <a:xfrm>
+            <a:off x="548640" y="6355080"/>
+            <a:ext cx="11064240" cy="320040"/>
+          </a:xfrm>
+          <a:prstGeom prst="rect">
+            <a:avLst/>
+          </a:prstGeom>
+          <a:noFill/>
+        </p:spPr>
+        <p:txBody>
+          <a:bodyPr wrap="square">
+            <a:noAutofit/>
+          </a:bodyPr>
+          <a:lstStyle/>
+          <a:p>
+            <a:pPr algn="r">
+              <a:lnSpc>
+                <a:spcPts val="2200"/>
+              </a:lnSpc>
+              <a:defRPr sz="1000" b="0">
+                <a:solidFill>
+                  <a:srgbClr val="666666"/>
+                </a:solidFill>
+                <a:latin typeface="Calibri"/>
+              </a:defRPr>
+            </a:pPr>
+            <a:r>
+              <a:t>learn_verilog_systemverilog / Module 2</a:t>
+            </a:r>
+          </a:p>
+        </p:txBody>
+      </p:sp>
+    </p:spTree>
+  </p:cSld>
+  <p:clrMapOvr>
+    <a:masterClrMapping/>
+  </p:clrMapOvr>
+</p:sld>
+</file>
+
+<file path=ppt/slides/slide51.xml><?xml version="1.0" encoding="utf-8"?>
+<p:sld xmlns:a="http://schemas.openxmlformats.org/drawingml/2006/main" xmlns:p="http://schemas.openxmlformats.org/presentationml/2006/main" xmlns:r="http://schemas.openxmlformats.org/officeDocument/2006/relationships">
+  <p:cSld>
+    <p:spTree>
+      <p:nvGrpSpPr>
+        <p:cNvPr id="1" name=""/>
+        <p:cNvGrpSpPr/>
+        <p:nvPr/>
+      </p:nvGrpSpPr>
+      <p:grpSpPr/>
+      <p:sp>
+        <p:nvSpPr>
+          <p:cNvPr id="2" name="TextBox 1"/>
+          <p:cNvSpPr txBox="1"/>
+          <p:nvPr/>
+        </p:nvSpPr>
+        <p:spPr>
+          <a:xfrm>
+            <a:off x="548640" y="411480"/>
+            <a:ext cx="11064240" cy="777240"/>
+          </a:xfrm>
+          <a:prstGeom prst="rect">
+            <a:avLst/>
+          </a:prstGeom>
+          <a:noFill/>
+        </p:spPr>
+        <p:txBody>
+          <a:bodyPr wrap="square">
+            <a:noAutofit/>
+          </a:bodyPr>
+          <a:lstStyle/>
+          <a:p>
+            <a:pPr>
+              <a:lnSpc>
+                <a:spcPts val="2200"/>
+              </a:lnSpc>
+              <a:defRPr sz="2800" b="1">
+                <a:solidFill>
+                  <a:srgbClr val="1A1A2E"/>
+                </a:solidFill>
+                <a:latin typeface="Calibri"/>
+              </a:defRPr>
+            </a:pPr>
+            <a:r>
+              <a:t>Signed vs Unsigned Mix</a:t>
+            </a:r>
+          </a:p>
+        </p:txBody>
+      </p:sp>
+      <p:sp>
+        <p:nvSpPr>
+          <p:cNvPr id="3" name="TextBox 2"/>
+          <p:cNvSpPr txBox="1"/>
+          <p:nvPr/>
+        </p:nvSpPr>
+        <p:spPr>
+          <a:xfrm>
+            <a:off x="548640" y="1234440"/>
+            <a:ext cx="11064240" cy="4937760"/>
+          </a:xfrm>
+          <a:prstGeom prst="rect">
+            <a:avLst/>
+          </a:prstGeom>
+          <a:noFill/>
+        </p:spPr>
+        <p:txBody>
+          <a:bodyPr wrap="square">
+            <a:noAutofit/>
+          </a:bodyPr>
+          <a:lstStyle/>
+          <a:p>
+            <a:pPr>
+              <a:lnSpc>
+                <a:spcPts val="2200"/>
+              </a:lnSpc>
+              <a:spcAft>
+                <a:spcPts val="1000"/>
+              </a:spcAft>
+              <a:defRPr sz="2000" b="0">
+                <a:solidFill>
+                  <a:srgbClr val="333333"/>
+                </a:solidFill>
+                <a:latin typeface="Calibri"/>
+              </a:defRPr>
+            </a:pPr>
+            <a:r>
+              <a:t>• Mistake: Mixing signed and unsigned in one</a:t>
+            </a:r>
+          </a:p>
+          <a:p>
+            <a:pPr>
+              <a:lnSpc>
+                <a:spcPts val="2200"/>
+              </a:lnSpc>
+              <a:spcAft>
+                <a:spcPts val="1000"/>
+              </a:spcAft>
+              <a:defRPr sz="2000" b="0">
+                <a:solidFill>
+                  <a:srgbClr val="333333"/>
+                </a:solidFill>
+                <a:latin typeface="Calibri"/>
+              </a:defRPr>
+            </a:pPr>
+            <a:r>
+              <a:t>      expression without $signed/$unsigned and expecting a</a:t>
+            </a:r>
+          </a:p>
+          <a:p>
+            <a:pPr>
+              <a:lnSpc>
+                <a:spcPts val="2200"/>
+              </a:lnSpc>
+              <a:spcAft>
+                <a:spcPts val="1000"/>
+              </a:spcAft>
+              <a:defRPr sz="2000" b="0">
+                <a:solidFill>
+                  <a:srgbClr val="333333"/>
+                </a:solidFill>
+                <a:latin typeface="Calibri"/>
+              </a:defRPr>
+            </a:pPr>
+            <a:r>
+              <a:t>      par…</a:t>
+            </a:r>
+          </a:p>
+          <a:p>
+            <a:pPr>
+              <a:lnSpc>
+                <a:spcPts val="2200"/>
+              </a:lnSpc>
+              <a:spcAft>
+                <a:spcPts val="1000"/>
+              </a:spcAft>
+              <a:defRPr sz="2000" b="0">
+                <a:solidFill>
+                  <a:srgbClr val="333333"/>
+                </a:solidFill>
+                <a:latin typeface="Calibri"/>
+              </a:defRPr>
+            </a:pPr>
+            <a:r>
+              <a:t>• Reality: Rules for sign extension and comparison</a:t>
+            </a:r>
+          </a:p>
+          <a:p>
+            <a:pPr>
+              <a:lnSpc>
+                <a:spcPts val="2200"/>
+              </a:lnSpc>
+              <a:spcAft>
+                <a:spcPts val="1000"/>
+              </a:spcAft>
+              <a:defRPr sz="2000" b="0">
+                <a:solidFill>
+                  <a:srgbClr val="333333"/>
+                </a:solidFill>
+                <a:latin typeface="Calibri"/>
+              </a:defRPr>
+            </a:pPr>
+            <a:r>
+              <a:t>      depend on operands.</a:t>
+            </a:r>
+          </a:p>
+          <a:p>
+            <a:pPr>
+              <a:lnSpc>
+                <a:spcPts val="2200"/>
+              </a:lnSpc>
+              <a:spcAft>
+                <a:spcPts val="1000"/>
+              </a:spcAft>
+              <a:defRPr sz="2000" b="0">
+                <a:solidFill>
+                  <a:srgbClr val="333333"/>
+                </a:solidFill>
+                <a:latin typeface="Calibri"/>
+              </a:defRPr>
+            </a:pPr>
+            <a:r>
+              <a:t>• Correct: Be explicit: use signed types or</a:t>
+            </a:r>
+          </a:p>
+          <a:p>
+            <a:pPr>
+              <a:lnSpc>
+                <a:spcPts val="2200"/>
+              </a:lnSpc>
+              <a:spcAft>
+                <a:spcPts val="1000"/>
+              </a:spcAft>
+              <a:defRPr sz="2000" b="0">
+                <a:solidFill>
+                  <a:srgbClr val="333333"/>
+                </a:solidFill>
+                <a:latin typeface="Calibri"/>
+              </a:defRPr>
+            </a:pPr>
+            <a:r>
+              <a:t>      $signed/$unsigned and verify with testbenches.</a:t>
+            </a:r>
+          </a:p>
+          <a:p>
+            <a:pPr>
+              <a:lnSpc>
+                <a:spcPts val="2200"/>
+              </a:lnSpc>
+              <a:spcAft>
+                <a:spcPts val="1000"/>
+              </a:spcAft>
+              <a:defRPr sz="2000" b="0">
+                <a:solidFill>
+                  <a:srgbClr val="333333"/>
+                </a:solidFill>
+                <a:latin typeface="Calibri"/>
+              </a:defRPr>
+            </a:pPr>
+            <a:r>
+              <a:t>• Why: Implicit mixing leads to wrong arithmetic and</a:t>
+            </a:r>
+          </a:p>
+          <a:p>
+            <a:pPr>
+              <a:lnSpc>
+                <a:spcPts val="2200"/>
+              </a:lnSpc>
+              <a:spcAft>
+                <a:spcPts val="1000"/>
+              </a:spcAft>
+              <a:defRPr sz="2000" b="0">
+                <a:solidFill>
+                  <a:srgbClr val="333333"/>
+                </a:solidFill>
+                <a:latin typeface="Calibri"/>
+              </a:defRPr>
+            </a:pPr>
+            <a:r>
+              <a:t>      comparison results.</a:t>
+            </a:r>
+          </a:p>
+        </p:txBody>
+      </p:sp>
+      <p:sp>
+        <p:nvSpPr>
+          <p:cNvPr id="4" name="TextBox 3"/>
+          <p:cNvSpPr txBox="1"/>
+          <p:nvPr/>
+        </p:nvSpPr>
+        <p:spPr>
+          <a:xfrm>
+            <a:off x="548640" y="6355080"/>
+            <a:ext cx="11064240" cy="320040"/>
+          </a:xfrm>
+          <a:prstGeom prst="rect">
+            <a:avLst/>
+          </a:prstGeom>
+          <a:noFill/>
+        </p:spPr>
+        <p:txBody>
+          <a:bodyPr wrap="square">
+            <a:noAutofit/>
+          </a:bodyPr>
+          <a:lstStyle/>
+          <a:p>
+            <a:pPr algn="r">
+              <a:lnSpc>
+                <a:spcPts val="2200"/>
+              </a:lnSpc>
+              <a:defRPr sz="1000" b="0">
+                <a:solidFill>
+                  <a:srgbClr val="666666"/>
+                </a:solidFill>
+                <a:latin typeface="Calibri"/>
+              </a:defRPr>
+            </a:pPr>
+            <a:r>
+              <a:t>learn_verilog_systemverilog / Module 2</a:t>
+            </a:r>
+          </a:p>
+        </p:txBody>
+      </p:sp>
+    </p:spTree>
+  </p:cSld>
+  <p:clrMapOvr>
+    <a:masterClrMapping/>
+  </p:clrMapOvr>
+</p:sld>
+</file>
+
+<file path=ppt/slides/slide52.xml><?xml version="1.0" encoding="utf-8"?>
+<p:sld xmlns:a="http://schemas.openxmlformats.org/drawingml/2006/main" xmlns:p="http://schemas.openxmlformats.org/presentationml/2006/main" xmlns:r="http://schemas.openxmlformats.org/officeDocument/2006/relationships">
+  <p:cSld>
+    <p:spTree>
+      <p:nvGrpSpPr>
+        <p:cNvPr id="1" name=""/>
+        <p:cNvGrpSpPr/>
+        <p:nvPr/>
+      </p:nvGrpSpPr>
+      <p:grpSpPr/>
+      <p:sp>
+        <p:nvSpPr>
+          <p:cNvPr id="2" name="TextBox 1"/>
+          <p:cNvSpPr txBox="1"/>
+          <p:nvPr/>
+        </p:nvSpPr>
+        <p:spPr>
+          <a:xfrm>
+            <a:off x="548640" y="411480"/>
+            <a:ext cx="11064240" cy="777240"/>
+          </a:xfrm>
+          <a:prstGeom prst="rect">
+            <a:avLst/>
+          </a:prstGeom>
+          <a:noFill/>
+        </p:spPr>
+        <p:txBody>
+          <a:bodyPr wrap="square">
+            <a:noAutofit/>
+          </a:bodyPr>
+          <a:lstStyle/>
+          <a:p>
+            <a:pPr>
+              <a:lnSpc>
+                <a:spcPts val="2200"/>
+              </a:lnSpc>
+              <a:defRPr sz="2800" b="1">
+                <a:solidFill>
+                  <a:srgbClr val="1A1A2E"/>
+                </a:solidFill>
+                <a:latin typeface="Calibri"/>
+              </a:defRPr>
+            </a:pPr>
+            <a:r>
+              <a:t>Generate Block Scope</a:t>
+            </a:r>
+          </a:p>
+        </p:txBody>
+      </p:sp>
+      <p:sp>
+        <p:nvSpPr>
+          <p:cNvPr id="3" name="TextBox 2"/>
+          <p:cNvSpPr txBox="1"/>
+          <p:nvPr/>
+        </p:nvSpPr>
+        <p:spPr>
+          <a:xfrm>
+            <a:off x="548640" y="1234440"/>
+            <a:ext cx="11064240" cy="4937760"/>
+          </a:xfrm>
+          <a:prstGeom prst="rect">
+            <a:avLst/>
+          </a:prstGeom>
+          <a:noFill/>
+        </p:spPr>
+        <p:txBody>
+          <a:bodyPr wrap="square">
+            <a:noAutofit/>
+          </a:bodyPr>
+          <a:lstStyle/>
+          <a:p>
+            <a:pPr>
+              <a:lnSpc>
+                <a:spcPts val="2200"/>
+              </a:lnSpc>
+              <a:spcAft>
+                <a:spcPts val="1000"/>
+              </a:spcAft>
+              <a:defRPr sz="2000" b="0">
+                <a:solidFill>
+                  <a:srgbClr val="333333"/>
+                </a:solidFill>
+                <a:latin typeface="Calibri"/>
+              </a:defRPr>
+            </a:pPr>
+            <a:r>
+              <a:t>• Mistake: Referencing generate block names or genvar</a:t>
+            </a:r>
+          </a:p>
+          <a:p>
+            <a:pPr>
+              <a:lnSpc>
+                <a:spcPts val="2200"/>
+              </a:lnSpc>
+              <a:spcAft>
+                <a:spcPts val="1000"/>
+              </a:spcAft>
+              <a:defRPr sz="2000" b="0">
+                <a:solidFill>
+                  <a:srgbClr val="333333"/>
+                </a:solidFill>
+                <a:latin typeface="Calibri"/>
+              </a:defRPr>
+            </a:pPr>
+            <a:r>
+              <a:t>      at runtime.</a:t>
+            </a:r>
+          </a:p>
+          <a:p>
+            <a:pPr>
+              <a:lnSpc>
+                <a:spcPts val="2200"/>
+              </a:lnSpc>
+              <a:spcAft>
+                <a:spcPts val="1000"/>
+              </a:spcAft>
+              <a:defRPr sz="2000" b="0">
+                <a:solidFill>
+                  <a:srgbClr val="333333"/>
+                </a:solidFill>
+                <a:latin typeface="Calibri"/>
+              </a:defRPr>
+            </a:pPr>
+            <a:r>
+              <a:t>• Reality: Generate blocks are elaborated at compile</a:t>
+            </a:r>
+          </a:p>
+          <a:p>
+            <a:pPr>
+              <a:lnSpc>
+                <a:spcPts val="2200"/>
+              </a:lnSpc>
+              <a:spcAft>
+                <a:spcPts val="1000"/>
+              </a:spcAft>
+              <a:defRPr sz="2000" b="0">
+                <a:solidFill>
+                  <a:srgbClr val="333333"/>
+                </a:solidFill>
+                <a:latin typeface="Calibri"/>
+              </a:defRPr>
+            </a:pPr>
+            <a:r>
+              <a:t>      time; names are for hierarchy.</a:t>
+            </a:r>
+          </a:p>
+          <a:p>
+            <a:pPr>
+              <a:lnSpc>
+                <a:spcPts val="2200"/>
+              </a:lnSpc>
+              <a:spcAft>
+                <a:spcPts val="1000"/>
+              </a:spcAft>
+              <a:defRPr sz="2000" b="0">
+                <a:solidFill>
+                  <a:srgbClr val="333333"/>
+                </a:solidFill>
+                <a:latin typeface="Calibri"/>
+              </a:defRPr>
+            </a:pPr>
+            <a:r>
+              <a:t>• Correct: Use generate for structure; use normal</a:t>
+            </a:r>
+          </a:p>
+          <a:p>
+            <a:pPr>
+              <a:lnSpc>
+                <a:spcPts val="2200"/>
+              </a:lnSpc>
+              <a:spcAft>
+                <a:spcPts val="1000"/>
+              </a:spcAft>
+              <a:defRPr sz="2000" b="0">
+                <a:solidFill>
+                  <a:srgbClr val="333333"/>
+                </a:solidFill>
+                <a:latin typeface="Calibri"/>
+              </a:defRPr>
+            </a:pPr>
+            <a:r>
+              <a:t>      variables and blocks for runtime behavior.</a:t>
+            </a:r>
+          </a:p>
+          <a:p>
+            <a:pPr>
+              <a:lnSpc>
+                <a:spcPts val="2200"/>
+              </a:lnSpc>
+              <a:spcAft>
+                <a:spcPts val="1000"/>
+              </a:spcAft>
+              <a:defRPr sz="2000" b="0">
+                <a:solidFill>
+                  <a:srgbClr val="333333"/>
+                </a:solidFill>
+                <a:latin typeface="Calibri"/>
+              </a:defRPr>
+            </a:pPr>
+            <a:r>
+              <a:t>• Why: Generate is not “runtime”; it only affects what</a:t>
+            </a:r>
+          </a:p>
+          <a:p>
+            <a:pPr>
+              <a:lnSpc>
+                <a:spcPts val="2200"/>
+              </a:lnSpc>
+              <a:spcAft>
+                <a:spcPts val="1000"/>
+              </a:spcAft>
+              <a:defRPr sz="2000" b="0">
+                <a:solidFill>
+                  <a:srgbClr val="333333"/>
+                </a:solidFill>
+                <a:latin typeface="Calibri"/>
+              </a:defRPr>
+            </a:pPr>
+            <a:r>
+              <a:t>      gets instantiated.</a:t>
+            </a:r>
+          </a:p>
+        </p:txBody>
+      </p:sp>
+      <p:sp>
+        <p:nvSpPr>
+          <p:cNvPr id="4" name="TextBox 3"/>
+          <p:cNvSpPr txBox="1"/>
+          <p:nvPr/>
+        </p:nvSpPr>
+        <p:spPr>
+          <a:xfrm>
+            <a:off x="548640" y="6355080"/>
+            <a:ext cx="11064240" cy="320040"/>
+          </a:xfrm>
+          <a:prstGeom prst="rect">
+            <a:avLst/>
+          </a:prstGeom>
+          <a:noFill/>
+        </p:spPr>
+        <p:txBody>
+          <a:bodyPr wrap="square">
+            <a:noAutofit/>
+          </a:bodyPr>
+          <a:lstStyle/>
+          <a:p>
+            <a:pPr algn="r">
+              <a:lnSpc>
+                <a:spcPts val="2200"/>
+              </a:lnSpc>
+              <a:defRPr sz="1000" b="0">
+                <a:solidFill>
+                  <a:srgbClr val="666666"/>
+                </a:solidFill>
+                <a:latin typeface="Calibri"/>
+              </a:defRPr>
+            </a:pPr>
+            <a:r>
+              <a:t>learn_verilog_systemverilog / Module 2</a:t>
+            </a:r>
+          </a:p>
+        </p:txBody>
+      </p:sp>
+    </p:spTree>
+  </p:cSld>
+  <p:clrMapOvr>
+    <a:masterClrMapping/>
+  </p:clrMapOvr>
+</p:sld>
+</file>
+
+<file path=ppt/slides/slide53.xml><?xml version="1.0" encoding="utf-8"?>
+<p:sld xmlns:a="http://schemas.openxmlformats.org/drawingml/2006/main" xmlns:p="http://schemas.openxmlformats.org/presentationml/2006/main" xmlns:r="http://schemas.openxmlformats.org/officeDocument/2006/relationships">
+  <p:cSld>
+    <p:spTree>
+      <p:nvGrpSpPr>
+        <p:cNvPr id="1" name=""/>
+        <p:cNvGrpSpPr/>
+        <p:nvPr/>
+      </p:nvGrpSpPr>
+      <p:grpSpPr/>
+      <p:sp>
+        <p:nvSpPr>
+          <p:cNvPr id="2" name="TextBox 1"/>
+          <p:cNvSpPr txBox="1"/>
+          <p:nvPr/>
+        </p:nvSpPr>
+        <p:spPr>
+          <a:xfrm>
+            <a:off x="548640" y="2743200"/>
+            <a:ext cx="11064240" cy="1371600"/>
+          </a:xfrm>
+          <a:prstGeom prst="rect">
+            <a:avLst/>
+          </a:prstGeom>
+          <a:noFill/>
+        </p:spPr>
+        <p:txBody>
+          <a:bodyPr wrap="square">
+            <a:noAutofit/>
+          </a:bodyPr>
+          <a:lstStyle/>
+          <a:p>
+            <a:pPr algn="ctr">
+              <a:lnSpc>
+                <a:spcPts val="2200"/>
+              </a:lnSpc>
+              <a:defRPr sz="3600" b="1">
+                <a:solidFill>
+                  <a:srgbClr val="1A1A2E"/>
+                </a:solidFill>
+                <a:latin typeface="Calibri"/>
+              </a:defRPr>
+            </a:pPr>
+            <a:r>
+              <a:t>Practice &amp; assessment</a:t>
+            </a:r>
+          </a:p>
+        </p:txBody>
+      </p:sp>
+      <p:sp>
+        <p:nvSpPr>
+          <p:cNvPr id="3" name="TextBox 2"/>
+          <p:cNvSpPr txBox="1"/>
+          <p:nvPr/>
+        </p:nvSpPr>
+        <p:spPr>
+          <a:xfrm>
+            <a:off x="548640" y="6355080"/>
+            <a:ext cx="11064240" cy="320040"/>
+          </a:xfrm>
+          <a:prstGeom prst="rect">
+            <a:avLst/>
+          </a:prstGeom>
+          <a:noFill/>
+        </p:spPr>
+        <p:txBody>
+          <a:bodyPr wrap="square">
+            <a:noAutofit/>
+          </a:bodyPr>
+          <a:lstStyle/>
+          <a:p>
+            <a:pPr algn="r">
+              <a:lnSpc>
+                <a:spcPts val="2200"/>
+              </a:lnSpc>
+              <a:defRPr sz="1000" b="0">
+                <a:solidFill>
+                  <a:srgbClr val="666666"/>
+                </a:solidFill>
+                <a:latin typeface="Calibri"/>
+              </a:defRPr>
+            </a:pPr>
+            <a:r>
+              <a:t>learn_verilog_systemverilog / Module 2</a:t>
+            </a:r>
+          </a:p>
+        </p:txBody>
+      </p:sp>
+    </p:spTree>
+  </p:cSld>
+  <p:clrMapOvr>
+    <a:masterClrMapping/>
+  </p:clrMapOvr>
+</p:sld>
+</file>
+
+<file path=ppt/slides/slide54.xml><?xml version="1.0" encoding="utf-8"?>
+<p:sld xmlns:a="http://schemas.openxmlformats.org/drawingml/2006/main" xmlns:p="http://schemas.openxmlformats.org/presentationml/2006/main" xmlns:r="http://schemas.openxmlformats.org/officeDocument/2006/relationships">
+  <p:cSld>
+    <p:spTree>
+      <p:nvGrpSpPr>
+        <p:cNvPr id="1" name=""/>
+        <p:cNvGrpSpPr/>
+        <p:nvPr/>
+      </p:nvGrpSpPr>
+      <p:grpSpPr/>
+      <p:sp>
+        <p:nvSpPr>
+          <p:cNvPr id="2" name="TextBox 1"/>
+          <p:cNvSpPr txBox="1"/>
+          <p:nvPr/>
+        </p:nvSpPr>
+        <p:spPr>
+          <a:xfrm>
+            <a:off x="548640" y="411480"/>
+            <a:ext cx="11064240" cy="777240"/>
+          </a:xfrm>
+          <a:prstGeom prst="rect">
+            <a:avLst/>
+          </a:prstGeom>
+          <a:noFill/>
+        </p:spPr>
+        <p:txBody>
+          <a:bodyPr wrap="square">
+            <a:noAutofit/>
+          </a:bodyPr>
+          <a:lstStyle/>
+          <a:p>
+            <a:pPr>
+              <a:lnSpc>
+                <a:spcPts val="2200"/>
+              </a:lnSpc>
+              <a:defRPr sz="2800" b="1">
+                <a:solidFill>
+                  <a:srgbClr val="1A1A2E"/>
+                </a:solidFill>
+                <a:latin typeface="Calibri"/>
+              </a:defRPr>
+            </a:pPr>
+            <a:r>
+              <a:t>What you should know (1/2)</a:t>
+            </a:r>
+          </a:p>
+        </p:txBody>
+      </p:sp>
+      <p:sp>
+        <p:nvSpPr>
+          <p:cNvPr id="3" name="TextBox 2"/>
+          <p:cNvSpPr txBox="1"/>
+          <p:nvPr/>
+        </p:nvSpPr>
+        <p:spPr>
+          <a:xfrm>
+            <a:off x="548640" y="1234440"/>
+            <a:ext cx="11064240" cy="4937760"/>
+          </a:xfrm>
+          <a:prstGeom prst="rect">
+            <a:avLst/>
+          </a:prstGeom>
+          <a:noFill/>
+        </p:spPr>
+        <p:txBody>
+          <a:bodyPr wrap="square">
+            <a:noAutofit/>
+          </a:bodyPr>
+          <a:lstStyle/>
+          <a:p>
+            <a:pPr>
+              <a:lnSpc>
+                <a:spcPts val="2200"/>
+              </a:lnSpc>
+              <a:spcAft>
+                <a:spcPts val="1000"/>
+              </a:spcAft>
+              <a:defRPr sz="2000" b="0">
+                <a:solidFill>
+                  <a:srgbClr val="333333"/>
+                </a:solidFill>
+                <a:latin typeface="Calibri"/>
+              </a:defRPr>
+            </a:pPr>
+            <a:r>
+              <a:t>• ✓ Write modules with ANSI-style port declarations</a:t>
+            </a:r>
+          </a:p>
+          <a:p>
+            <a:pPr>
+              <a:lnSpc>
+                <a:spcPts val="2200"/>
+              </a:lnSpc>
+              <a:spcAft>
+                <a:spcPts val="1000"/>
+              </a:spcAft>
+              <a:defRPr sz="2000" b="0">
+                <a:solidFill>
+                  <a:srgbClr val="333333"/>
+                </a:solidFill>
+                <a:latin typeface="Calibri"/>
+              </a:defRPr>
+            </a:pPr>
+            <a:r>
+              <a:t>      (1364-2001)</a:t>
+            </a:r>
+          </a:p>
+          <a:p>
+            <a:pPr>
+              <a:lnSpc>
+                <a:spcPts val="2200"/>
+              </a:lnSpc>
+              <a:spcAft>
+                <a:spcPts val="1000"/>
+              </a:spcAft>
+              <a:defRPr sz="2000" b="0">
+                <a:solidFill>
+                  <a:srgbClr val="333333"/>
+                </a:solidFill>
+                <a:latin typeface="Calibri"/>
+              </a:defRPr>
+            </a:pPr>
+            <a:r>
+              <a:t>• ✓ Use `always @*` for combinational logic and avoid</a:t>
+            </a:r>
+          </a:p>
+          <a:p>
+            <a:pPr>
+              <a:lnSpc>
+                <a:spcPts val="2200"/>
+              </a:lnSpc>
+              <a:spcAft>
+                <a:spcPts val="1000"/>
+              </a:spcAft>
+              <a:defRPr sz="2000" b="0">
+                <a:solidFill>
+                  <a:srgbClr val="333333"/>
+                </a:solidFill>
+                <a:latin typeface="Calibri"/>
+              </a:defRPr>
+            </a:pPr>
+            <a:r>
+              <a:t>      sensitivity-list errors</a:t>
+            </a:r>
+          </a:p>
+          <a:p>
+            <a:pPr>
+              <a:lnSpc>
+                <a:spcPts val="2200"/>
+              </a:lnSpc>
+              <a:spcAft>
+                <a:spcPts val="1000"/>
+              </a:spcAft>
+              <a:defRPr sz="2000" b="0">
+                <a:solidFill>
+                  <a:srgbClr val="333333"/>
+                </a:solidFill>
+                <a:latin typeface="Calibri"/>
+              </a:defRPr>
+            </a:pPr>
+            <a:r>
+              <a:t>• ✓ Use generate (for, if/else) for parameterized and</a:t>
+            </a:r>
+          </a:p>
+          <a:p>
+            <a:pPr>
+              <a:lnSpc>
+                <a:spcPts val="2200"/>
+              </a:lnSpc>
+              <a:spcAft>
+                <a:spcPts val="1000"/>
+              </a:spcAft>
+              <a:defRPr sz="2000" b="0">
+                <a:solidFill>
+                  <a:srgbClr val="333333"/>
+                </a:solidFill>
+                <a:latin typeface="Calibri"/>
+              </a:defRPr>
+            </a:pPr>
+            <a:r>
+              <a:t>      conditional RTL</a:t>
+            </a:r>
+          </a:p>
+          <a:p>
+            <a:pPr>
+              <a:lnSpc>
+                <a:spcPts val="2200"/>
+              </a:lnSpc>
+              <a:spcAft>
+                <a:spcPts val="1000"/>
+              </a:spcAft>
+              <a:defRPr sz="2000" b="0">
+                <a:solidFill>
+                  <a:srgbClr val="333333"/>
+                </a:solidFill>
+                <a:latin typeface="Calibri"/>
+              </a:defRPr>
+            </a:pPr>
+            <a:r>
+              <a:t>• ✓ Use signed types and $signed/$unsigned for signed</a:t>
+            </a:r>
+          </a:p>
+          <a:p>
+            <a:pPr>
+              <a:lnSpc>
+                <a:spcPts val="2200"/>
+              </a:lnSpc>
+              <a:spcAft>
+                <a:spcPts val="1000"/>
+              </a:spcAft>
+              <a:defRPr sz="2000" b="0">
+                <a:solidFill>
+                  <a:srgbClr val="333333"/>
+                </a:solidFill>
+                <a:latin typeface="Calibri"/>
+              </a:defRPr>
+            </a:pPr>
+            <a:r>
+              <a:t>      arithmetic</a:t>
+            </a:r>
+          </a:p>
+          <a:p>
+            <a:pPr>
+              <a:lnSpc>
+                <a:spcPts val="2200"/>
+              </a:lnSpc>
+              <a:spcAft>
+                <a:spcPts val="1000"/>
+              </a:spcAft>
+              <a:defRPr sz="2000" b="0">
+                <a:solidFill>
+                  <a:srgbClr val="333333"/>
+                </a:solidFill>
+                <a:latin typeface="Calibri"/>
+              </a:defRPr>
+            </a:pPr>
+            <a:r>
+              <a:t>• ✓ Declare and use multi-dimensional arrays (e.g.</a:t>
+            </a:r>
+          </a:p>
+          <a:p>
+            <a:pPr>
+              <a:lnSpc>
+                <a:spcPts val="2200"/>
+              </a:lnSpc>
+              <a:spcAft>
+                <a:spcPts val="1000"/>
+              </a:spcAft>
+              <a:defRPr sz="2000" b="0">
+                <a:solidFill>
+                  <a:srgbClr val="333333"/>
+                </a:solidFill>
+                <a:latin typeface="Calibri"/>
+              </a:defRPr>
+            </a:pPr>
+            <a:r>
+              <a:t>      memories)</a:t>
+            </a:r>
+          </a:p>
+          <a:p>
+            <a:pPr>
+              <a:lnSpc>
+                <a:spcPts val="2200"/>
+              </a:lnSpc>
+              <a:spcAft>
+                <a:spcPts val="1000"/>
+              </a:spcAft>
+              <a:defRPr sz="2000" b="0">
+                <a:solidFill>
+                  <a:srgbClr val="333333"/>
+                </a:solidFill>
+                <a:latin typeface="Calibri"/>
+              </a:defRPr>
+            </a:pPr>
+            <a:r>
+              <a:t>• ✓ Use localparam for constants that must not be</a:t>
+            </a:r>
+          </a:p>
+          <a:p>
+            <a:pPr>
+              <a:lnSpc>
+                <a:spcPts val="2200"/>
+              </a:lnSpc>
+              <a:spcAft>
+                <a:spcPts val="1000"/>
+              </a:spcAft>
+              <a:defRPr sz="2000" b="0">
+                <a:solidFill>
+                  <a:srgbClr val="333333"/>
+                </a:solidFill>
+                <a:latin typeface="Calibri"/>
+              </a:defRPr>
+            </a:pPr>
+            <a:r>
+              <a:t>      overridden</a:t>
+            </a:r>
+          </a:p>
+        </p:txBody>
+      </p:sp>
+      <p:sp>
+        <p:nvSpPr>
+          <p:cNvPr id="4" name="TextBox 3"/>
+          <p:cNvSpPr txBox="1"/>
+          <p:nvPr/>
+        </p:nvSpPr>
+        <p:spPr>
+          <a:xfrm>
+            <a:off x="548640" y="6355080"/>
+            <a:ext cx="11064240" cy="320040"/>
+          </a:xfrm>
+          <a:prstGeom prst="rect">
+            <a:avLst/>
+          </a:prstGeom>
+          <a:noFill/>
+        </p:spPr>
+        <p:txBody>
+          <a:bodyPr wrap="square">
+            <a:noAutofit/>
+          </a:bodyPr>
+          <a:lstStyle/>
+          <a:p>
+            <a:pPr algn="r">
+              <a:lnSpc>
+                <a:spcPts val="2200"/>
+              </a:lnSpc>
+              <a:defRPr sz="1000" b="0">
+                <a:solidFill>
+                  <a:srgbClr val="666666"/>
+                </a:solidFill>
+                <a:latin typeface="Calibri"/>
+              </a:defRPr>
+            </a:pPr>
+            <a:r>
+              <a:t>learn_verilog_systemverilog / Module 2</a:t>
+            </a:r>
+          </a:p>
+        </p:txBody>
+      </p:sp>
+    </p:spTree>
+  </p:cSld>
+  <p:clrMapOvr>
+    <a:masterClrMapping/>
+  </p:clrMapOvr>
+</p:sld>
+</file>
+
+<file path=ppt/slides/slide55.xml><?xml version="1.0" encoding="utf-8"?>
+<p:sld xmlns:a="http://schemas.openxmlformats.org/drawingml/2006/main" xmlns:p="http://schemas.openxmlformats.org/presentationml/2006/main" xmlns:r="http://schemas.openxmlformats.org/officeDocument/2006/relationships">
+  <p:cSld>
+    <p:spTree>
+      <p:nvGrpSpPr>
+        <p:cNvPr id="1" name=""/>
+        <p:cNvGrpSpPr/>
+        <p:nvPr/>
+      </p:nvGrpSpPr>
+      <p:grpSpPr/>
+      <p:sp>
+        <p:nvSpPr>
+          <p:cNvPr id="2" name="TextBox 1"/>
+          <p:cNvSpPr txBox="1"/>
+          <p:nvPr/>
+        </p:nvSpPr>
+        <p:spPr>
+          <a:xfrm>
+            <a:off x="548640" y="411480"/>
+            <a:ext cx="11064240" cy="777240"/>
+          </a:xfrm>
+          <a:prstGeom prst="rect">
+            <a:avLst/>
+          </a:prstGeom>
+          <a:noFill/>
+        </p:spPr>
+        <p:txBody>
+          <a:bodyPr wrap="square">
+            <a:noAutofit/>
+          </a:bodyPr>
+          <a:lstStyle/>
+          <a:p>
+            <a:pPr>
+              <a:lnSpc>
+                <a:spcPts val="2200"/>
+              </a:lnSpc>
+              <a:defRPr sz="2800" b="1">
+                <a:solidFill>
+                  <a:srgbClr val="1A1A2E"/>
+                </a:solidFill>
+                <a:latin typeface="Calibri"/>
+              </a:defRPr>
+            </a:pPr>
+            <a:r>
+              <a:t>What you should know (2/2)</a:t>
+            </a:r>
+          </a:p>
+        </p:txBody>
+      </p:sp>
+      <p:sp>
+        <p:nvSpPr>
+          <p:cNvPr id="3" name="TextBox 2"/>
+          <p:cNvSpPr txBox="1"/>
+          <p:nvPr/>
+        </p:nvSpPr>
+        <p:spPr>
+          <a:xfrm>
+            <a:off x="548640" y="1234440"/>
+            <a:ext cx="11064240" cy="4937760"/>
+          </a:xfrm>
+          <a:prstGeom prst="rect">
+            <a:avLst/>
+          </a:prstGeom>
+          <a:noFill/>
+        </p:spPr>
+        <p:txBody>
+          <a:bodyPr wrap="square">
+            <a:noAutofit/>
+          </a:bodyPr>
+          <a:lstStyle/>
+          <a:p>
+            <a:pPr>
+              <a:lnSpc>
+                <a:spcPts val="2200"/>
+              </a:lnSpc>
+              <a:spcAft>
+                <a:spcPts val="1000"/>
+              </a:spcAft>
+              <a:defRPr sz="2000" b="0">
+                <a:solidFill>
+                  <a:srgbClr val="333333"/>
+                </a:solidFill>
+                <a:latin typeface="Calibri"/>
+              </a:defRPr>
+            </a:pPr>
+            <a:r>
+              <a:t>• ✓ Write ANSI-style tasks and functions</a:t>
+            </a:r>
+          </a:p>
+          <a:p>
+            <a:pPr>
+              <a:lnSpc>
+                <a:spcPts val="2200"/>
+              </a:lnSpc>
+              <a:spcAft>
+                <a:spcPts val="1000"/>
+              </a:spcAft>
+              <a:defRPr sz="2000" b="0">
+                <a:solidFill>
+                  <a:srgbClr val="333333"/>
+                </a:solidFill>
+                <a:latin typeface="Calibri"/>
+              </a:defRPr>
+            </a:pPr>
+            <a:r>
+              <a:t>• ✓ Compare 1364-1995 and 1364-2001 and list what 2001</a:t>
+            </a:r>
+          </a:p>
+          <a:p>
+            <a:pPr>
+              <a:lnSpc>
+                <a:spcPts val="2200"/>
+              </a:lnSpc>
+              <a:spcAft>
+                <a:spcPts val="1000"/>
+              </a:spcAft>
+              <a:defRPr sz="2000" b="0">
+                <a:solidFill>
+                  <a:srgbClr val="333333"/>
+                </a:solidFill>
+                <a:latin typeface="Calibri"/>
+              </a:defRPr>
+            </a:pPr>
+            <a:r>
+              <a:t>      adds</a:t>
+            </a:r>
+          </a:p>
+        </p:txBody>
+      </p:sp>
+      <p:sp>
+        <p:nvSpPr>
+          <p:cNvPr id="4" name="TextBox 3"/>
+          <p:cNvSpPr txBox="1"/>
+          <p:nvPr/>
+        </p:nvSpPr>
+        <p:spPr>
+          <a:xfrm>
+            <a:off x="548640" y="6355080"/>
+            <a:ext cx="11064240" cy="320040"/>
+          </a:xfrm>
+          <a:prstGeom prst="rect">
+            <a:avLst/>
+          </a:prstGeom>
+          <a:noFill/>
+        </p:spPr>
+        <p:txBody>
+          <a:bodyPr wrap="square">
+            <a:noAutofit/>
+          </a:bodyPr>
+          <a:lstStyle/>
+          <a:p>
+            <a:pPr algn="r">
+              <a:lnSpc>
+                <a:spcPts val="2200"/>
+              </a:lnSpc>
+              <a:defRPr sz="1000" b="0">
+                <a:solidFill>
+                  <a:srgbClr val="666666"/>
+                </a:solidFill>
+                <a:latin typeface="Calibri"/>
+              </a:defRPr>
+            </a:pPr>
+            <a:r>
+              <a:t>learn_verilog_systemverilog / Module 2</a:t>
+            </a:r>
+          </a:p>
+        </p:txBody>
+      </p:sp>
+    </p:spTree>
+  </p:cSld>
+  <p:clrMapOvr>
+    <a:masterClrMapping/>
+  </p:clrMapOvr>
+</p:sld>
+</file>
+
+<file path=ppt/slides/slide56.xml><?xml version="1.0" encoding="utf-8"?>
+<p:sld xmlns:a="http://schemas.openxmlformats.org/drawingml/2006/main" xmlns:p="http://schemas.openxmlformats.org/presentationml/2006/main" xmlns:r="http://schemas.openxmlformats.org/officeDocument/2006/relationships">
+  <p:cSld>
+    <p:spTree>
+      <p:nvGrpSpPr>
+        <p:cNvPr id="1" name=""/>
+        <p:cNvGrpSpPr/>
+        <p:nvPr/>
+      </p:nvGrpSpPr>
+      <p:grpSpPr/>
+      <p:sp>
+        <p:nvSpPr>
+          <p:cNvPr id="2" name="TextBox 1"/>
+          <p:cNvSpPr txBox="1"/>
+          <p:nvPr/>
+        </p:nvSpPr>
+        <p:spPr>
+          <a:xfrm>
+            <a:off x="548640" y="411480"/>
+            <a:ext cx="11064240" cy="777240"/>
+          </a:xfrm>
+          <a:prstGeom prst="rect">
+            <a:avLst/>
+          </a:prstGeom>
+          <a:noFill/>
+        </p:spPr>
+        <p:txBody>
+          <a:bodyPr wrap="square">
+            <a:noAutofit/>
+          </a:bodyPr>
+          <a:lstStyle/>
+          <a:p>
+            <a:pPr>
+              <a:lnSpc>
+                <a:spcPts val="2200"/>
+              </a:lnSpc>
+              <a:defRPr sz="2800" b="1">
+                <a:solidFill>
+                  <a:srgbClr val="1A1A2E"/>
+                </a:solidFill>
+                <a:latin typeface="Calibri"/>
+              </a:defRPr>
+            </a:pPr>
+            <a:r>
+              <a:t>Exercises</a:t>
+            </a:r>
+          </a:p>
+        </p:txBody>
+      </p:sp>
+      <p:sp>
+        <p:nvSpPr>
+          <p:cNvPr id="3" name="TextBox 2"/>
+          <p:cNvSpPr txBox="1"/>
+          <p:nvPr/>
+        </p:nvSpPr>
+        <p:spPr>
+          <a:xfrm>
+            <a:off x="548640" y="1234440"/>
+            <a:ext cx="11064240" cy="4937760"/>
+          </a:xfrm>
+          <a:prstGeom prst="rect">
+            <a:avLst/>
+          </a:prstGeom>
+          <a:noFill/>
+        </p:spPr>
+        <p:txBody>
+          <a:bodyPr wrap="square">
+            <a:noAutofit/>
+          </a:bodyPr>
+          <a:lstStyle/>
+          <a:p>
+            <a:pPr>
+              <a:lnSpc>
+                <a:spcPts val="2200"/>
+              </a:lnSpc>
+              <a:spcAft>
+                <a:spcPts val="1000"/>
+              </a:spcAft>
+              <a:defRPr sz="2000" b="0">
+                <a:solidFill>
+                  <a:srgbClr val="333333"/>
+                </a:solidFill>
+                <a:latin typeface="Calibri"/>
+              </a:defRPr>
+            </a:pPr>
+            <a:r>
+              <a:t>• ANSI Ports</a:t>
+            </a:r>
+          </a:p>
+          <a:p>
+            <a:pPr>
+              <a:lnSpc>
+                <a:spcPts val="2200"/>
+              </a:lnSpc>
+              <a:spcAft>
+                <a:spcPts val="1000"/>
+              </a:spcAft>
+              <a:defRPr sz="2000" b="0">
+                <a:solidFill>
+                  <a:srgbClr val="333333"/>
+                </a:solidFill>
+                <a:latin typeface="Calibri"/>
+              </a:defRPr>
+            </a:pPr>
+            <a:r>
+              <a:t>• always @</a:t>
+            </a:r>
+          </a:p>
+          <a:p>
+            <a:pPr>
+              <a:lnSpc>
+                <a:spcPts val="2200"/>
+              </a:lnSpc>
+              <a:spcAft>
+                <a:spcPts val="1000"/>
+              </a:spcAft>
+              <a:defRPr sz="2000" b="0">
+                <a:solidFill>
+                  <a:srgbClr val="333333"/>
+                </a:solidFill>
+                <a:latin typeface="Calibri"/>
+              </a:defRPr>
+            </a:pPr>
+            <a:r>
+              <a:t>• Generate</a:t>
+            </a:r>
+          </a:p>
+          <a:p>
+            <a:pPr>
+              <a:lnSpc>
+                <a:spcPts val="2200"/>
+              </a:lnSpc>
+              <a:spcAft>
+                <a:spcPts val="1000"/>
+              </a:spcAft>
+              <a:defRPr sz="2000" b="0">
+                <a:solidFill>
+                  <a:srgbClr val="333333"/>
+                </a:solidFill>
+                <a:latin typeface="Calibri"/>
+              </a:defRPr>
+            </a:pPr>
+            <a:r>
+              <a:t>• Signed</a:t>
+            </a:r>
+          </a:p>
+          <a:p>
+            <a:pPr>
+              <a:lnSpc>
+                <a:spcPts val="2200"/>
+              </a:lnSpc>
+              <a:spcAft>
+                <a:spcPts val="1000"/>
+              </a:spcAft>
+              <a:defRPr sz="2000" b="0">
+                <a:solidFill>
+                  <a:srgbClr val="333333"/>
+                </a:solidFill>
+                <a:latin typeface="Calibri"/>
+              </a:defRPr>
+            </a:pPr>
+            <a:r>
+              <a:t>• Arrays and localparam</a:t>
+            </a:r>
+          </a:p>
+        </p:txBody>
+      </p:sp>
+      <p:sp>
+        <p:nvSpPr>
+          <p:cNvPr id="4" name="TextBox 3"/>
+          <p:cNvSpPr txBox="1"/>
+          <p:nvPr/>
+        </p:nvSpPr>
+        <p:spPr>
+          <a:xfrm>
+            <a:off x="548640" y="6355080"/>
+            <a:ext cx="11064240" cy="320040"/>
+          </a:xfrm>
+          <a:prstGeom prst="rect">
+            <a:avLst/>
+          </a:prstGeom>
+          <a:noFill/>
+        </p:spPr>
+        <p:txBody>
+          <a:bodyPr wrap="square">
+            <a:noAutofit/>
+          </a:bodyPr>
+          <a:lstStyle/>
+          <a:p>
+            <a:pPr algn="r">
+              <a:lnSpc>
+                <a:spcPts val="2200"/>
+              </a:lnSpc>
+              <a:defRPr sz="1000" b="0">
+                <a:solidFill>
+                  <a:srgbClr val="666666"/>
+                </a:solidFill>
+                <a:latin typeface="Calibri"/>
+              </a:defRPr>
+            </a:pPr>
+            <a:r>
+              <a:t>learn_verilog_systemverilog / Module 2</a:t>
+            </a:r>
+          </a:p>
+        </p:txBody>
+      </p:sp>
+    </p:spTree>
+  </p:cSld>
+  <p:clrMapOvr>
+    <a:masterClrMapping/>
+  </p:clrMapOvr>
+</p:sld>
+</file>
+
+<file path=ppt/slides/slide57.xml><?xml version="1.0" encoding="utf-8"?>
+<p:sld xmlns:a="http://schemas.openxmlformats.org/drawingml/2006/main" xmlns:p="http://schemas.openxmlformats.org/presentationml/2006/main" xmlns:r="http://schemas.openxmlformats.org/officeDocument/2006/relationships">
+  <p:cSld>
+    <p:spTree>
+      <p:nvGrpSpPr>
+        <p:cNvPr id="1" name=""/>
+        <p:cNvGrpSpPr/>
+        <p:nvPr/>
+      </p:nvGrpSpPr>
+      <p:grpSpPr/>
+      <p:sp>
+        <p:nvSpPr>
+          <p:cNvPr id="2" name="TextBox 1"/>
+          <p:cNvSpPr txBox="1"/>
+          <p:nvPr/>
+        </p:nvSpPr>
+        <p:spPr>
+          <a:xfrm>
+            <a:off x="548640" y="411480"/>
+            <a:ext cx="11064240" cy="777240"/>
+          </a:xfrm>
+          <a:prstGeom prst="rect">
+            <a:avLst/>
+          </a:prstGeom>
+          <a:noFill/>
+        </p:spPr>
+        <p:txBody>
+          <a:bodyPr wrap="square">
+            <a:noAutofit/>
+          </a:bodyPr>
+          <a:lstStyle/>
+          <a:p>
+            <a:pPr>
+              <a:lnSpc>
+                <a:spcPts val="2200"/>
+              </a:lnSpc>
+              <a:defRPr sz="2800" b="1">
+                <a:solidFill>
+                  <a:srgbClr val="1A1A2E"/>
+                </a:solidFill>
+                <a:latin typeface="Calibri"/>
+              </a:defRPr>
+            </a:pPr>
+            <a:r>
+              <a:t>Exercises</a:t>
+            </a:r>
+          </a:p>
+        </p:txBody>
+      </p:sp>
+      <p:sp>
+        <p:nvSpPr>
+          <p:cNvPr id="3" name="TextBox 2"/>
+          <p:cNvSpPr txBox="1"/>
+          <p:nvPr/>
+        </p:nvSpPr>
+        <p:spPr>
+          <a:xfrm>
+            <a:off x="548640" y="1234440"/>
+            <a:ext cx="11064240" cy="4937760"/>
+          </a:xfrm>
+          <a:prstGeom prst="rect">
+            <a:avLst/>
+          </a:prstGeom>
+          <a:noFill/>
+        </p:spPr>
+        <p:txBody>
+          <a:bodyPr wrap="square">
+            <a:noAutofit/>
+          </a:bodyPr>
+          <a:lstStyle/>
+          <a:p>
+            <a:pPr>
+              <a:lnSpc>
+                <a:spcPts val="2200"/>
+              </a:lnSpc>
+              <a:spcAft>
+                <a:spcPts val="1000"/>
+              </a:spcAft>
+              <a:defRPr sz="2000" b="0">
+                <a:solidFill>
+                  <a:srgbClr val="333333"/>
+                </a:solidFill>
+                <a:latin typeface="Calibri"/>
+              </a:defRPr>
+            </a:pPr>
+            <a:r>
+              <a:t>• Using always @* for Sequential Logic</a:t>
+            </a:r>
+          </a:p>
+          <a:p>
+            <a:pPr>
+              <a:lnSpc>
+                <a:spcPts val="2200"/>
+              </a:lnSpc>
+              <a:spcAft>
+                <a:spcPts val="1000"/>
+              </a:spcAft>
+              <a:defRPr sz="2000" b="0">
+                <a:solidFill>
+                  <a:srgbClr val="333333"/>
+                </a:solidFill>
+                <a:latin typeface="Calibri"/>
+              </a:defRPr>
+            </a:pPr>
+            <a:r>
+              <a:t>• genvar in Normal Code</a:t>
+            </a:r>
+          </a:p>
+          <a:p>
+            <a:pPr>
+              <a:lnSpc>
+                <a:spcPts val="2200"/>
+              </a:lnSpc>
+              <a:spcAft>
+                <a:spcPts val="1000"/>
+              </a:spcAft>
+              <a:defRPr sz="2000" b="0">
+                <a:solidFill>
+                  <a:srgbClr val="333333"/>
+                </a:solidFill>
+                <a:latin typeface="Calibri"/>
+              </a:defRPr>
+            </a:pPr>
+            <a:r>
+              <a:t>• Overriding localparam</a:t>
+            </a:r>
+          </a:p>
+          <a:p>
+            <a:pPr>
+              <a:lnSpc>
+                <a:spcPts val="2200"/>
+              </a:lnSpc>
+              <a:spcAft>
+                <a:spcPts val="1000"/>
+              </a:spcAft>
+              <a:defRPr sz="2000" b="0">
+                <a:solidFill>
+                  <a:srgbClr val="333333"/>
+                </a:solidFill>
+                <a:latin typeface="Calibri"/>
+              </a:defRPr>
+            </a:pPr>
+            <a:r>
+              <a:t>• Signed vs Unsigned Mix</a:t>
+            </a:r>
+          </a:p>
+          <a:p>
+            <a:pPr>
+              <a:lnSpc>
+                <a:spcPts val="2200"/>
+              </a:lnSpc>
+              <a:spcAft>
+                <a:spcPts val="1000"/>
+              </a:spcAft>
+              <a:defRPr sz="2000" b="0">
+                <a:solidFill>
+                  <a:srgbClr val="333333"/>
+                </a:solidFill>
+                <a:latin typeface="Calibri"/>
+              </a:defRPr>
+            </a:pPr>
+            <a:r>
+              <a:t>• Generate Block Scope</a:t>
+            </a:r>
+          </a:p>
+        </p:txBody>
+      </p:sp>
+      <p:sp>
+        <p:nvSpPr>
+          <p:cNvPr id="4" name="TextBox 3"/>
+          <p:cNvSpPr txBox="1"/>
+          <p:nvPr/>
+        </p:nvSpPr>
+        <p:spPr>
+          <a:xfrm>
+            <a:off x="548640" y="6355080"/>
+            <a:ext cx="11064240" cy="320040"/>
+          </a:xfrm>
+          <a:prstGeom prst="rect">
+            <a:avLst/>
+          </a:prstGeom>
+          <a:noFill/>
+        </p:spPr>
+        <p:txBody>
+          <a:bodyPr wrap="square">
+            <a:noAutofit/>
+          </a:bodyPr>
+          <a:lstStyle/>
+          <a:p>
+            <a:pPr algn="r">
+              <a:lnSpc>
+                <a:spcPts val="2200"/>
+              </a:lnSpc>
+              <a:defRPr sz="1000" b="0">
+                <a:solidFill>
+                  <a:srgbClr val="666666"/>
+                </a:solidFill>
+                <a:latin typeface="Calibri"/>
+              </a:defRPr>
+            </a:pPr>
+            <a:r>
+              <a:t>learn_verilog_systemverilog / Module 2</a:t>
+            </a:r>
+          </a:p>
+        </p:txBody>
+      </p:sp>
+    </p:spTree>
+  </p:cSld>
+  <p:clrMapOvr>
+    <a:masterClrMapping/>
+  </p:clrMapOvr>
+</p:sld>
+</file>
+
+<file path=ppt/slides/slide58.xml><?xml version="1.0" encoding="utf-8"?>
+<p:sld xmlns:a="http://schemas.openxmlformats.org/drawingml/2006/main" xmlns:p="http://schemas.openxmlformats.org/presentationml/2006/main" xmlns:r="http://schemas.openxmlformats.org/officeDocument/2006/relationships">
+  <p:cSld>
+    <p:spTree>
+      <p:nvGrpSpPr>
+        <p:cNvPr id="1" name=""/>
+        <p:cNvGrpSpPr/>
+        <p:nvPr/>
+      </p:nvGrpSpPr>
+      <p:grpSpPr/>
+      <p:sp>
+        <p:nvSpPr>
+          <p:cNvPr id="2" name="TextBox 1"/>
+          <p:cNvSpPr txBox="1"/>
+          <p:nvPr/>
+        </p:nvSpPr>
+        <p:spPr>
+          <a:xfrm>
+            <a:off x="548640" y="411480"/>
+            <a:ext cx="11064240" cy="777240"/>
+          </a:xfrm>
+          <a:prstGeom prst="rect">
+            <a:avLst/>
+          </a:prstGeom>
+          <a:noFill/>
+        </p:spPr>
+        <p:txBody>
+          <a:bodyPr wrap="square">
+            <a:noAutofit/>
+          </a:bodyPr>
+          <a:lstStyle/>
+          <a:p>
+            <a:pPr>
+              <a:lnSpc>
+                <a:spcPts val="2200"/>
+              </a:lnSpc>
+              <a:defRPr sz="2800" b="1">
+                <a:solidFill>
+                  <a:srgbClr val="1A1A2E"/>
+                </a:solidFill>
+                <a:latin typeface="Calibri"/>
+              </a:defRPr>
+            </a:pPr>
+            <a:r>
+              <a:t>Summary &amp; next steps</a:t>
+            </a:r>
+          </a:p>
+        </p:txBody>
+      </p:sp>
+      <p:sp>
+        <p:nvSpPr>
+          <p:cNvPr id="3" name="TextBox 2"/>
+          <p:cNvSpPr txBox="1"/>
+          <p:nvPr/>
+        </p:nvSpPr>
+        <p:spPr>
+          <a:xfrm>
+            <a:off x="548640" y="1234440"/>
+            <a:ext cx="11064240" cy="4937760"/>
+          </a:xfrm>
+          <a:prstGeom prst="rect">
+            <a:avLst/>
+          </a:prstGeom>
+          <a:noFill/>
+        </p:spPr>
+        <p:txBody>
+          <a:bodyPr wrap="square">
+            <a:noAutofit/>
+          </a:bodyPr>
+          <a:lstStyle/>
+          <a:p>
+            <a:pPr>
+              <a:lnSpc>
+                <a:spcPts val="2200"/>
+              </a:lnSpc>
+              <a:spcAft>
+                <a:spcPts val="1000"/>
+              </a:spcAft>
+              <a:defRPr sz="2000" b="0">
+                <a:solidFill>
+                  <a:srgbClr val="333333"/>
+                </a:solidFill>
+                <a:latin typeface="Calibri"/>
+              </a:defRPr>
+            </a:pPr>
+            <a:r>
+              <a:t>• Master the major Verilog update (IEEE 1364-2001) and</a:t>
+            </a:r>
+          </a:p>
+          <a:p>
+            <a:pPr>
+              <a:lnSpc>
+                <a:spcPts val="2200"/>
+              </a:lnSpc>
+              <a:spcAft>
+                <a:spcPts val="1000"/>
+              </a:spcAft>
+              <a:defRPr sz="2000" b="0">
+                <a:solidFill>
+                  <a:srgbClr val="333333"/>
+                </a:solidFill>
+                <a:latin typeface="Calibri"/>
+              </a:defRPr>
+            </a:pPr>
+            <a:r>
+              <a:t>      its additions over 1364-1995: ANSI ports, impl…</a:t>
+            </a:r>
+          </a:p>
+          <a:p>
+            <a:pPr>
+              <a:lnSpc>
+                <a:spcPts val="2200"/>
+              </a:lnSpc>
+              <a:spcAft>
+                <a:spcPts val="1000"/>
+              </a:spcAft>
+              <a:defRPr sz="2000" b="0">
+                <a:solidFill>
+                  <a:srgbClr val="333333"/>
+                </a:solidFill>
+                <a:latin typeface="Calibri"/>
+              </a:defRPr>
+            </a:pPr>
+            <a:r>
+              <a:t>• Complete module2/CHECKLIST.md</a:t>
+            </a:r>
+          </a:p>
+          <a:p>
+            <a:pPr>
+              <a:lnSpc>
+                <a:spcPts val="2200"/>
+              </a:lnSpc>
+              <a:spcAft>
+                <a:spcPts val="1000"/>
+              </a:spcAft>
+              <a:defRPr sz="2000" b="0">
+                <a:solidFill>
+                  <a:srgbClr val="333333"/>
+                </a:solidFill>
+                <a:latin typeface="Calibri"/>
+              </a:defRPr>
+            </a:pPr>
+            <a:r>
+              <a:t>• Review module2/EXAMPLES.md and run each lab</a:t>
+            </a:r>
+          </a:p>
+          <a:p>
+            <a:pPr>
+              <a:lnSpc>
+                <a:spcPts val="2200"/>
+              </a:lnSpc>
+              <a:spcAft>
+                <a:spcPts val="1000"/>
+              </a:spcAft>
+              <a:defRPr sz="2000" b="0">
+                <a:solidFill>
+                  <a:srgbClr val="333333"/>
+                </a:solidFill>
+                <a:latin typeface="Calibri"/>
+              </a:defRPr>
+            </a:pPr>
+            <a:r>
+              <a:t>• Next: Next module in course</a:t>
             </a:r>
           </a:p>
         </p:txBody>
@@ -10315,7 +16840,7 @@
               </a:defRPr>
             </a:pPr>
             <a:r>
-              <a:t>Syllabus topics</a:t>
+              <a:t>How to learn this module</a:t>
             </a:r>
           </a:p>
         </p:txBody>
@@ -10411,7 +16936,7 @@
               </a:defRPr>
             </a:pPr>
             <a:r>
-              <a:t>1. IEEE 1364-2001 Context (1/2)</a:t>
+              <a:t>Suggested learning path (1/2)</a:t>
             </a:r>
           </a:p>
         </p:txBody>
@@ -10453,7 +16978,7 @@
               </a:defRPr>
             </a:pPr>
             <a:r>
-              <a:t>• ANSI-style port declarations: Direction and type</a:t>
+              <a:t>• Skim this document — Goal, Overview, and Topics</a:t>
             </a:r>
           </a:p>
           <a:p>
@@ -10472,7 +16997,7 @@
               </a:defRPr>
             </a:pPr>
             <a:r>
-              <a:t>      (and size) in the port list</a:t>
+              <a:t>      Covered set the IEEE scope for Module 2.</a:t>
             </a:r>
           </a:p>
           <a:p>
@@ -10491,7 +17016,7 @@
               </a:defRPr>
             </a:pPr>
             <a:r>
-              <a:t>• **`always @*`**: Implicit sensitivity for</a:t>
+              <a:t>• Study design architecture — See how DUTs, examples,</a:t>
             </a:r>
           </a:p>
           <a:p>
@@ -10510,7 +17035,7 @@
               </a:defRPr>
             </a:pPr>
             <a:r>
-              <a:t>      combinational logic (no manual list)</a:t>
+              <a:t>      and testbenches fit together under `module2/`.</a:t>
             </a:r>
           </a:p>
           <a:p>
@@ -10529,7 +17054,7 @@
               </a:defRPr>
             </a:pPr>
             <a:r>
-              <a:t>• generate: Conditional and loop-based instantiation</a:t>
+              <a:t>• Work through labs in order — Open</a:t>
             </a:r>
           </a:p>
           <a:p>
@@ -10548,7 +17073,7 @@
               </a:defRPr>
             </a:pPr>
             <a:r>
-              <a:t>      and logic</a:t>
+              <a:t>      `module2/EXAMPLES.md` and run each `make clean &amp;&amp;</a:t>
             </a:r>
           </a:p>
           <a:p>
@@ -10567,7 +17092,7 @@
               </a:defRPr>
             </a:pPr>
             <a:r>
-              <a:t>• signed: Signed arithmetic and signed nets/variables</a:t>
+              <a:t>      make run` from…</a:t>
             </a:r>
           </a:p>
           <a:p>
@@ -10586,7 +17111,7 @@
               </a:defRPr>
             </a:pPr>
             <a:r>
-              <a:t>• Multi-dimensional arrays: e.g. `reg [7:0] mem</a:t>
+              <a:t>• Run the full module script — `./scripts/module2.sh`</a:t>
             </a:r>
           </a:p>
           <a:p>
@@ -10605,7 +17130,7 @@
               </a:defRPr>
             </a:pPr>
             <a:r>
-              <a:t>      [0:255]`</a:t>
+              <a:t>      from the repo root to simulate all examples and…</a:t>
             </a:r>
           </a:p>
           <a:p>
@@ -10624,7 +17149,7 @@
               </a:defRPr>
             </a:pPr>
             <a:r>
-              <a:t>• localparam: Named constants that cannot be</a:t>
+              <a:t>• Complete the exercises — Try each exercise in this</a:t>
             </a:r>
           </a:p>
           <a:p>
@@ -10643,7 +17168,7 @@
               </a:defRPr>
             </a:pPr>
             <a:r>
-              <a:t>      overridden</a:t>
+              <a:t>      document before reading solutions or peeking at…</a:t>
             </a:r>
           </a:p>
         </p:txBody>
@@ -10739,7 +17264,7 @@
               </a:defRPr>
             </a:pPr>
             <a:r>
-              <a:t>1. IEEE 1364-2001 Context (2/2)</a:t>
+              <a:t>Suggested learning path (2/2)</a:t>
             </a:r>
           </a:p>
         </p:txBody>
@@ -10781,7 +17306,7 @@
               </a:defRPr>
             </a:pPr>
             <a:r>
-              <a:t>• ANSI-style task/function: Input/output in the header</a:t>
+              <a:t>• Review Common Pitfalls — Can you explain each</a:t>
             </a:r>
           </a:p>
           <a:p>
@@ -10800,7 +17325,7 @@
               </a:defRPr>
             </a:pPr>
             <a:r>
-              <a:t>• Other: File I/O improvements, `$signed`/`$unsigned`,</a:t>
+              <a:t>      mistake and the fix?</a:t>
             </a:r>
           </a:p>
           <a:p>
@@ -10819,7 +17344,7 @@
               </a:defRPr>
             </a:pPr>
             <a:r>
-              <a:t>      attribute syntax, etc.</a:t>
+              <a:t>• Self-check — Use `module2/CHECKLIST.md` before</a:t>
             </a:r>
           </a:p>
           <a:p>
@@ -10838,64 +17363,7 @@
               </a:defRPr>
             </a:pPr>
             <a:r>
-              <a:t>• No SystemVerilog: no `logic`,</a:t>
-            </a:r>
-          </a:p>
-          <a:p>
-            <a:pPr>
-              <a:lnSpc>
-                <a:spcPts val="2200"/>
-              </a:lnSpc>
-              <a:spcAft>
-                <a:spcPts val="1000"/>
-              </a:spcAft>
-              <a:defRPr sz="2000" b="0">
-                <a:solidFill>
-                  <a:srgbClr val="333333"/>
-                </a:solidFill>
-                <a:latin typeface="Calibri"/>
-              </a:defRPr>
-            </a:pPr>
-            <a:r>
-              <a:t>      `always_comb`/`always_ff`, interfaces, packages,</a:t>
-            </a:r>
-          </a:p>
-          <a:p>
-            <a:pPr>
-              <a:lnSpc>
-                <a:spcPts val="2200"/>
-              </a:lnSpc>
-              <a:spcAft>
-                <a:spcPts val="1000"/>
-              </a:spcAft>
-              <a:defRPr sz="2000" b="0">
-                <a:solidFill>
-                  <a:srgbClr val="333333"/>
-                </a:solidFill>
-                <a:latin typeface="Calibri"/>
-              </a:defRPr>
-            </a:pPr>
-            <a:r>
-              <a:t>      classes</a:t>
-            </a:r>
-          </a:p>
-          <a:p>
-            <a:pPr>
-              <a:lnSpc>
-                <a:spcPts val="2200"/>
-              </a:lnSpc>
-              <a:spcAft>
-                <a:spcPts val="1000"/>
-              </a:spcAft>
-              <a:defRPr sz="2000" b="0">
-                <a:solidFill>
-                  <a:srgbClr val="333333"/>
-                </a:solidFill>
-                <a:latin typeface="Calibri"/>
-              </a:defRPr>
-            </a:pPr>
-            <a:r>
-              <a:t>• No type parameters or interfaces (those are 1800)</a:t>
+              <a:t>      starting the next module.</a:t>
             </a:r>
           </a:p>
         </p:txBody>
@@ -10965,8 +17433,8 @@
         </p:nvSpPr>
         <p:spPr>
           <a:xfrm>
-            <a:off x="548640" y="411480"/>
-            <a:ext cx="11064240" cy="777240"/>
+            <a:off x="548640" y="2743200"/>
+            <a:ext cx="11064240" cy="1371600"/>
           </a:xfrm>
           <a:prstGeom prst="rect">
             <a:avLst/>
@@ -10979,11 +17447,11 @@
           </a:bodyPr>
           <a:lstStyle/>
           <a:p>
-            <a:pPr>
-              <a:lnSpc>
-                <a:spcPts val="2200"/>
-              </a:lnSpc>
-              <a:defRPr sz="2800" b="1">
+            <a:pPr algn="ctr">
+              <a:lnSpc>
+                <a:spcPts val="2200"/>
+              </a:lnSpc>
+              <a:defRPr sz="3600" b="1">
                 <a:solidFill>
                   <a:srgbClr val="1A1A2E"/>
                 </a:solidFill>
@@ -10991,7 +17459,7 @@
               </a:defRPr>
             </a:pPr>
             <a:r>
-              <a:t>2. ANSI-Style Port Declarations (2001)</a:t>
+              <a:t>Syllabus topics</a:t>
             </a:r>
           </a:p>
         </p:txBody>
@@ -10999,181 +17467,6 @@
       <p:sp>
         <p:nvSpPr>
           <p:cNvPr id="3" name="TextBox 2"/>
-          <p:cNvSpPr txBox="1"/>
-          <p:nvPr/>
-        </p:nvSpPr>
-        <p:spPr>
-          <a:xfrm>
-            <a:off x="548640" y="1234440"/>
-            <a:ext cx="11064240" cy="4937760"/>
-          </a:xfrm>
-          <a:prstGeom prst="rect">
-            <a:avLst/>
-          </a:prstGeom>
-          <a:noFill/>
-        </p:spPr>
-        <p:txBody>
-          <a:bodyPr wrap="square">
-            <a:noAutofit/>
-          </a:bodyPr>
-          <a:lstStyle/>
-          <a:p>
-            <a:pPr>
-              <a:lnSpc>
-                <a:spcPts val="2200"/>
-              </a:lnSpc>
-              <a:spcAft>
-                <a:spcPts val="1000"/>
-              </a:spcAft>
-              <a:defRPr sz="2000" b="0">
-                <a:solidFill>
-                  <a:srgbClr val="333333"/>
-                </a:solidFill>
-                <a:latin typeface="Calibri"/>
-              </a:defRPr>
-            </a:pPr>
-            <a:r>
-              <a:t>• input wire: Default for input; can omit `wire` (e.g.</a:t>
-            </a:r>
-          </a:p>
-          <a:p>
-            <a:pPr>
-              <a:lnSpc>
-                <a:spcPts val="2200"/>
-              </a:lnSpc>
-              <a:spcAft>
-                <a:spcPts val="1000"/>
-              </a:spcAft>
-              <a:defRPr sz="2000" b="0">
-                <a:solidFill>
-                  <a:srgbClr val="333333"/>
-                </a:solidFill>
-                <a:latin typeface="Calibri"/>
-              </a:defRPr>
-            </a:pPr>
-            <a:r>
-              <a:t>      `input [7:0] a`).</a:t>
-            </a:r>
-          </a:p>
-          <a:p>
-            <a:pPr>
-              <a:lnSpc>
-                <a:spcPts val="2200"/>
-              </a:lnSpc>
-              <a:spcAft>
-                <a:spcPts val="1000"/>
-              </a:spcAft>
-              <a:defRPr sz="2000" b="0">
-                <a:solidFill>
-                  <a:srgbClr val="333333"/>
-                </a:solidFill>
-                <a:latin typeface="Calibri"/>
-              </a:defRPr>
-            </a:pPr>
-            <a:r>
-              <a:t>• output reg: Required when the output is driven in</a:t>
-            </a:r>
-          </a:p>
-          <a:p>
-            <a:pPr>
-              <a:lnSpc>
-                <a:spcPts val="2200"/>
-              </a:lnSpc>
-              <a:spcAft>
-                <a:spcPts val="1000"/>
-              </a:spcAft>
-              <a:defRPr sz="2000" b="0">
-                <a:solidFill>
-                  <a:srgbClr val="333333"/>
-                </a:solidFill>
-                <a:latin typeface="Calibri"/>
-              </a:defRPr>
-            </a:pPr>
-            <a:r>
-              <a:t>      `always`/`initial`.</a:t>
-            </a:r>
-          </a:p>
-          <a:p>
-            <a:pPr>
-              <a:lnSpc>
-                <a:spcPts val="2200"/>
-              </a:lnSpc>
-              <a:spcAft>
-                <a:spcPts val="1000"/>
-              </a:spcAft>
-              <a:defRPr sz="2000" b="0">
-                <a:solidFill>
-                  <a:srgbClr val="333333"/>
-                </a:solidFill>
-                <a:latin typeface="Calibri"/>
-              </a:defRPr>
-            </a:pPr>
-            <a:r>
-              <a:t>• output wire: When the output is driven only by</a:t>
-            </a:r>
-          </a:p>
-          <a:p>
-            <a:pPr>
-              <a:lnSpc>
-                <a:spcPts val="2200"/>
-              </a:lnSpc>
-              <a:spcAft>
-                <a:spcPts val="1000"/>
-              </a:spcAft>
-              <a:defRPr sz="2000" b="0">
-                <a:solidFill>
-                  <a:srgbClr val="333333"/>
-                </a:solidFill>
-                <a:latin typeface="Calibri"/>
-              </a:defRPr>
-            </a:pPr>
-            <a:r>
-              <a:t>      `assign` or submodule.</a:t>
-            </a:r>
-          </a:p>
-          <a:p>
-            <a:pPr>
-              <a:lnSpc>
-                <a:spcPts val="2200"/>
-              </a:lnSpc>
-              <a:spcAft>
-                <a:spcPts val="1000"/>
-              </a:spcAft>
-              <a:defRPr sz="2000" b="0">
-                <a:solidFill>
-                  <a:srgbClr val="333333"/>
-                </a:solidFill>
-                <a:latin typeface="Calibri"/>
-              </a:defRPr>
-            </a:pPr>
-            <a:r>
-              <a:t>• Same behavior; 2001 is more concise and keeps port</a:t>
-            </a:r>
-          </a:p>
-          <a:p>
-            <a:pPr>
-              <a:lnSpc>
-                <a:spcPts val="2200"/>
-              </a:lnSpc>
-              <a:spcAft>
-                <a:spcPts val="1000"/>
-              </a:spcAft>
-              <a:defRPr sz="2000" b="0">
-                <a:solidFill>
-                  <a:srgbClr val="333333"/>
-                </a:solidFill>
-                <a:latin typeface="Calibri"/>
-              </a:defRPr>
-            </a:pPr>
-            <a:r>
-              <a:t>      and type in one place.</a:t>
-            </a:r>
-          </a:p>
-        </p:txBody>
-      </p:sp>
-      <p:sp>
-        <p:nvSpPr>
-          <p:cNvPr id="4" name="TextBox 3"/>
           <p:cNvSpPr txBox="1"/>
           <p:nvPr/>
         </p:nvSpPr>
